--- a/presentation/SERUM_slides.pptx
+++ b/presentation/SERUM_slides.pptx
@@ -15112,494 +15112,1636 @@
           </a:p>
         </p:txBody>
       </p:sp>
-      <p:graphicFrame>
-        <p:nvGraphicFramePr>
-          <p:cNvPr id="6" name="Table 5"/>
-          <p:cNvGraphicFramePr>
-            <a:graphicFrameLocks noGrp="1"/>
-          </p:cNvGraphicFramePr>
-          <p:nvPr/>
-        </p:nvGraphicFramePr>
-        <p:xfrm>
-          <a:off x="655167" y="1783080"/>
-          <a:ext cx="10881360" cy="2286000"/>
-        </p:xfrm>
-        <a:graphic>
-          <a:graphicData uri="http://schemas.openxmlformats.org/drawingml/2006/table">
-            <a:tbl>
-              <a:tblPr firstRow="1" bandRow="1">
-                <a:tableStyleId>{5C22544A-7EE6-4342-B048-85BDC9FD1C3A}</a:tableStyleId>
-              </a:tblPr>
-              <a:tblGrid>
-                <a:gridCol w="5760720"/>
-                <a:gridCol w="1828800"/>
-                <a:gridCol w="1920240"/>
-                <a:gridCol w="1371600"/>
-              </a:tblGrid>
-              <a:tr h="457200">
-                <a:tc>
-                  <a:txBody>
-                    <a:bodyPr/>
-                    <a:lstStyle/>
-                    <a:p>
-                      <a:pPr algn="l"/>
-                      <a:r>
-                        <a:rPr sz="1500" b="1">
-                          <a:solidFill>
-                            <a:srgbClr val="FFFFFF"/>
-                          </a:solidFill>
-                        </a:rPr>
-                        <a:t>Defender</a:t>
-                      </a:r>
-                    </a:p>
-                  </a:txBody>
-                  <a:tcPr>
-                    <a:solidFill>
-                      <a:srgbClr val="1F355E"/>
-                    </a:solidFill>
-                  </a:tcPr>
-                </a:tc>
-                <a:tc>
-                  <a:txBody>
-                    <a:bodyPr/>
-                    <a:lstStyle/>
-                    <a:p>
-                      <a:pPr algn="ctr"/>
-                      <a:r>
-                        <a:rPr sz="1500" b="1">
-                          <a:solidFill>
-                            <a:srgbClr val="FFFFFF"/>
-                          </a:solidFill>
-                        </a:rPr>
-                        <a:t>Infected ↓</a:t>
-                      </a:r>
-                    </a:p>
-                  </a:txBody>
-                  <a:tcPr>
-                    <a:solidFill>
-                      <a:srgbClr val="1F355E"/>
-                    </a:solidFill>
-                  </a:tcPr>
-                </a:tc>
-                <a:tc>
-                  <a:txBody>
-                    <a:bodyPr/>
-                    <a:lstStyle/>
-                    <a:p>
-                      <a:pPr algn="ctr"/>
-                      <a:r>
-                        <a:rPr sz="1500" b="1">
-                          <a:solidFill>
-                            <a:srgbClr val="FFFFFF"/>
-                          </a:solidFill>
-                        </a:rPr>
-                        <a:t>Availability ↑</a:t>
-                      </a:r>
-                    </a:p>
-                  </a:txBody>
-                  <a:tcPr>
-                    <a:solidFill>
-                      <a:srgbClr val="1F355E"/>
-                    </a:solidFill>
-                  </a:tcPr>
-                </a:tc>
-                <a:tc>
-                  <a:txBody>
-                    <a:bodyPr/>
-                    <a:lstStyle/>
-                    <a:p>
-                      <a:pPr algn="ctr"/>
-                      <a:r>
-                        <a:rPr sz="1500" b="1">
-                          <a:solidFill>
-                            <a:srgbClr val="FFFFFF"/>
-                          </a:solidFill>
-                        </a:rPr>
-                        <a:t>Contained@step ↓</a:t>
-                      </a:r>
-                    </a:p>
-                  </a:txBody>
-                  <a:tcPr>
-                    <a:solidFill>
-                      <a:srgbClr val="1F355E"/>
-                    </a:solidFill>
-                  </a:tcPr>
-                </a:tc>
-              </a:tr>
-              <a:tr h="457200">
-                <a:tc>
-                  <a:txBody>
-                    <a:bodyPr/>
-                    <a:lstStyle/>
-                    <a:p>
-                      <a:pPr algn="l"/>
-                      <a:r>
-                        <a:rPr sz="1400" b="0">
-                          <a:solidFill>
-                            <a:srgbClr val="252B33"/>
-                          </a:solidFill>
-                        </a:rPr>
-                        <a:t>No defense</a:t>
-                      </a:r>
-                    </a:p>
-                  </a:txBody>
-                  <a:tcPr>
-                    <a:solidFill>
-                      <a:srgbClr val="F3F6FA"/>
-                    </a:solidFill>
-                  </a:tcPr>
-                </a:tc>
-                <a:tc>
-                  <a:txBody>
-                    <a:bodyPr/>
-                    <a:lstStyle/>
-                    <a:p>
-                      <a:pPr algn="ctr"/>
-                      <a:r>
-                        <a:rPr sz="1400" b="0">
-                          <a:solidFill>
-                            <a:srgbClr val="252B33"/>
-                          </a:solidFill>
-                        </a:rPr>
-                        <a:t>36.6%</a:t>
-                      </a:r>
-                    </a:p>
-                  </a:txBody>
-                  <a:tcPr>
-                    <a:solidFill>
-                      <a:srgbClr val="F3F6FA"/>
-                    </a:solidFill>
-                  </a:tcPr>
-                </a:tc>
-                <a:tc>
-                  <a:txBody>
-                    <a:bodyPr/>
-                    <a:lstStyle/>
-                    <a:p>
-                      <a:pPr algn="ctr"/>
-                      <a:r>
-                        <a:rPr sz="1400" b="0">
-                          <a:solidFill>
-                            <a:srgbClr val="252B33"/>
-                          </a:solidFill>
-                        </a:rPr>
-                        <a:t>100%</a:t>
-                      </a:r>
-                    </a:p>
-                  </a:txBody>
-                  <a:tcPr>
-                    <a:solidFill>
-                      <a:srgbClr val="F3F6FA"/>
-                    </a:solidFill>
-                  </a:tcPr>
-                </a:tc>
-                <a:tc>
-                  <a:txBody>
-                    <a:bodyPr/>
-                    <a:lstStyle/>
-                    <a:p>
-                      <a:pPr algn="ctr"/>
-                      <a:r>
-                        <a:rPr sz="1400" b="0">
-                          <a:solidFill>
-                            <a:srgbClr val="252B33"/>
-                          </a:solidFill>
-                        </a:rPr>
-                        <a:t>14.2</a:t>
-                      </a:r>
-                    </a:p>
-                  </a:txBody>
-                  <a:tcPr>
-                    <a:solidFill>
-                      <a:srgbClr val="F3F6FA"/>
-                    </a:solidFill>
-                  </a:tcPr>
-                </a:tc>
-              </a:tr>
-              <a:tr h="457200">
-                <a:tc>
-                  <a:txBody>
-                    <a:bodyPr/>
-                    <a:lstStyle/>
-                    <a:p>
-                      <a:pPr algn="l"/>
-                      <a:r>
-                        <a:rPr sz="1400" b="0">
-                          <a:solidFill>
-                            <a:srgbClr val="252B33"/>
-                          </a:solidFill>
-                        </a:rPr>
-                        <a:t>Best structural (degree / betweenness)</a:t>
-                      </a:r>
-                    </a:p>
-                  </a:txBody>
-                  <a:tcPr>
-                    <a:solidFill>
-                      <a:srgbClr val="FFFFFF"/>
-                    </a:solidFill>
-                  </a:tcPr>
-                </a:tc>
-                <a:tc>
-                  <a:txBody>
-                    <a:bodyPr/>
-                    <a:lstStyle/>
-                    <a:p>
-                      <a:pPr algn="ctr"/>
-                      <a:r>
-                        <a:rPr sz="1400" b="0">
-                          <a:solidFill>
-                            <a:srgbClr val="252B33"/>
-                          </a:solidFill>
-                        </a:rPr>
-                        <a:t>3.4%</a:t>
-                      </a:r>
-                    </a:p>
-                  </a:txBody>
-                  <a:tcPr>
-                    <a:solidFill>
-                      <a:srgbClr val="FFFFFF"/>
-                    </a:solidFill>
-                  </a:tcPr>
-                </a:tc>
-                <a:tc>
-                  <a:txBody>
-                    <a:bodyPr/>
-                    <a:lstStyle/>
-                    <a:p>
-                      <a:pPr algn="ctr"/>
-                      <a:r>
-                        <a:rPr sz="1400" b="0">
-                          <a:solidFill>
-                            <a:srgbClr val="252B33"/>
-                          </a:solidFill>
-                        </a:rPr>
-                        <a:t>95.5%</a:t>
-                      </a:r>
-                    </a:p>
-                  </a:txBody>
-                  <a:tcPr>
-                    <a:solidFill>
-                      <a:srgbClr val="FFFFFF"/>
-                    </a:solidFill>
-                  </a:tcPr>
-                </a:tc>
-                <a:tc>
-                  <a:txBody>
-                    <a:bodyPr/>
-                    <a:lstStyle/>
-                    <a:p>
-                      <a:pPr algn="ctr"/>
-                      <a:r>
-                        <a:rPr sz="1400" b="0">
-                          <a:solidFill>
-                            <a:srgbClr val="252B33"/>
-                          </a:solidFill>
-                        </a:rPr>
-                        <a:t>4.5</a:t>
-                      </a:r>
-                    </a:p>
-                  </a:txBody>
-                  <a:tcPr>
-                    <a:solidFill>
-                      <a:srgbClr val="FFFFFF"/>
-                    </a:solidFill>
-                  </a:tcPr>
-                </a:tc>
-              </a:tr>
-              <a:tr h="457200">
-                <a:tc>
-                  <a:txBody>
-                    <a:bodyPr/>
-                    <a:lstStyle/>
-                    <a:p>
-                      <a:pPr algn="l"/>
-                      <a:r>
-                        <a:rPr sz="1400" b="1">
-                          <a:solidFill>
-                            <a:srgbClr val="1B7F4B"/>
-                          </a:solidFill>
-                        </a:rPr>
-                        <a:t>SERUM — content-aware (ours)</a:t>
-                      </a:r>
-                    </a:p>
-                  </a:txBody>
-                  <a:tcPr>
-                    <a:solidFill>
-                      <a:srgbClr val="E3F1E8"/>
-                    </a:solidFill>
-                  </a:tcPr>
-                </a:tc>
-                <a:tc>
-                  <a:txBody>
-                    <a:bodyPr/>
-                    <a:lstStyle/>
-                    <a:p>
-                      <a:pPr algn="ctr"/>
-                      <a:r>
-                        <a:rPr sz="1400" b="1">
-                          <a:solidFill>
-                            <a:srgbClr val="1B7F4B"/>
-                          </a:solidFill>
-                        </a:rPr>
-                        <a:t>1.8%</a:t>
-                      </a:r>
-                    </a:p>
-                  </a:txBody>
-                  <a:tcPr>
-                    <a:solidFill>
-                      <a:srgbClr val="E3F1E8"/>
-                    </a:solidFill>
-                  </a:tcPr>
-                </a:tc>
-                <a:tc>
-                  <a:txBody>
-                    <a:bodyPr/>
-                    <a:lstStyle/>
-                    <a:p>
-                      <a:pPr algn="ctr"/>
-                      <a:r>
-                        <a:rPr sz="1400" b="1">
-                          <a:solidFill>
-                            <a:srgbClr val="1B7F4B"/>
-                          </a:solidFill>
-                        </a:rPr>
-                        <a:t>98.5%</a:t>
-                      </a:r>
-                    </a:p>
-                  </a:txBody>
-                  <a:tcPr>
-                    <a:solidFill>
-                      <a:srgbClr val="E3F1E8"/>
-                    </a:solidFill>
-                  </a:tcPr>
-                </a:tc>
-                <a:tc>
-                  <a:txBody>
-                    <a:bodyPr/>
-                    <a:lstStyle/>
-                    <a:p>
-                      <a:pPr algn="ctr"/>
-                      <a:r>
-                        <a:rPr sz="1400" b="1">
-                          <a:solidFill>
-                            <a:srgbClr val="1B7F4B"/>
-                          </a:solidFill>
-                        </a:rPr>
-                        <a:t>3.0</a:t>
-                      </a:r>
-                    </a:p>
-                  </a:txBody>
-                  <a:tcPr>
-                    <a:solidFill>
-                      <a:srgbClr val="E3F1E8"/>
-                    </a:solidFill>
-                  </a:tcPr>
-                </a:tc>
-              </a:tr>
-              <a:tr h="457200">
-                <a:tc>
-                  <a:txBody>
-                    <a:bodyPr/>
-                    <a:lstStyle/>
-                    <a:p>
-                      <a:pPr algn="l"/>
-                      <a:r>
-                        <a:rPr sz="1400" b="0">
-                          <a:solidFill>
-                            <a:srgbClr val="252B33"/>
-                          </a:solidFill>
-                        </a:rPr>
-                        <a:t>Oracle (is told the exploit)</a:t>
-                      </a:r>
-                    </a:p>
-                  </a:txBody>
-                  <a:tcPr>
-                    <a:solidFill>
-                      <a:srgbClr val="FFFFFF"/>
-                    </a:solidFill>
-                  </a:tcPr>
-                </a:tc>
-                <a:tc>
-                  <a:txBody>
-                    <a:bodyPr/>
-                    <a:lstStyle/>
-                    <a:p>
-                      <a:pPr algn="ctr"/>
-                      <a:r>
-                        <a:rPr sz="1400" b="0">
-                          <a:solidFill>
-                            <a:srgbClr val="252B33"/>
-                          </a:solidFill>
-                        </a:rPr>
-                        <a:t>1.1%</a:t>
-                      </a:r>
-                    </a:p>
-                  </a:txBody>
-                  <a:tcPr>
-                    <a:solidFill>
-                      <a:srgbClr val="FFFFFF"/>
-                    </a:solidFill>
-                  </a:tcPr>
-                </a:tc>
-                <a:tc>
-                  <a:txBody>
-                    <a:bodyPr/>
-                    <a:lstStyle/>
-                    <a:p>
-                      <a:pPr algn="ctr"/>
-                      <a:r>
-                        <a:rPr sz="1400" b="0">
-                          <a:solidFill>
-                            <a:srgbClr val="252B33"/>
-                          </a:solidFill>
-                        </a:rPr>
-                        <a:t>100%</a:t>
-                      </a:r>
-                    </a:p>
-                  </a:txBody>
-                  <a:tcPr>
-                    <a:solidFill>
-                      <a:srgbClr val="FFFFFF"/>
-                    </a:solidFill>
-                  </a:tcPr>
-                </a:tc>
-                <a:tc>
-                  <a:txBody>
-                    <a:bodyPr/>
-                    <a:lstStyle/>
-                    <a:p>
-                      <a:pPr algn="ctr"/>
-                      <a:r>
-                        <a:rPr sz="1400" b="0">
-                          <a:solidFill>
-                            <a:srgbClr val="252B33"/>
-                          </a:solidFill>
-                        </a:rPr>
-                        <a:t>2.0</a:t>
-                      </a:r>
-                    </a:p>
-                  </a:txBody>
-                  <a:tcPr>
-                    <a:solidFill>
-                      <a:srgbClr val="FFFFFF"/>
-                    </a:solidFill>
-                  </a:tcPr>
-                </a:tc>
-              </a:tr>
-            </a:tbl>
-          </a:graphicData>
-        </a:graphic>
-      </p:graphicFrame>
-      <p:sp>
-        <p:nvSpPr>
-          <p:cNvPr id="7" name="Rectangle 6"/>
+      <p:sp>
+        <p:nvSpPr>
+          <p:cNvPr id="6" name="Rectangle 5"/>
           <p:cNvSpPr/>
           <p:nvPr/>
         </p:nvSpPr>
         <p:spPr>
           <a:xfrm>
-            <a:off x="640080" y="4251960"/>
-            <a:ext cx="10881360" cy="1143000"/>
+            <a:off x="655167" y="1783080"/>
+            <a:ext cx="5760720" cy="457200"/>
+          </a:xfrm>
+          <a:prstGeom prst="rect">
+            <a:avLst/>
+          </a:prstGeom>
+          <a:solidFill>
+            <a:srgbClr val="1F355E"/>
+          </a:solidFill>
+          <a:ln w="12700">
+            <a:solidFill>
+              <a:srgbClr val="D9E0E8"/>
+            </a:solidFill>
+          </a:ln>
+          <a:effectLst/>
+        </p:spPr>
+        <p:style>
+          <a:lnRef idx="1">
+            <a:schemeClr val="accent1"/>
+          </a:lnRef>
+          <a:fillRef idx="3">
+            <a:schemeClr val="accent1"/>
+          </a:fillRef>
+          <a:effectRef idx="2">
+            <a:schemeClr val="accent1"/>
+          </a:effectRef>
+          <a:fontRef idx="minor">
+            <a:schemeClr val="lt1"/>
+          </a:fontRef>
+        </p:style>
+        <p:txBody>
+          <a:bodyPr rtlCol="0" anchor="ctr"/>
+          <a:lstStyle/>
+          <a:p>
+            <a:pPr algn="ctr"/>
+          </a:p>
+        </p:txBody>
+      </p:sp>
+      <p:sp>
+        <p:nvSpPr>
+          <p:cNvPr id="7" name="TextBox 6"/>
+          <p:cNvSpPr txBox="1"/>
+          <p:nvPr/>
+        </p:nvSpPr>
+        <p:spPr>
+          <a:xfrm>
+            <a:off x="764895" y="1783080"/>
+            <a:ext cx="5559552" cy="457200"/>
+          </a:xfrm>
+          <a:prstGeom prst="rect">
+            <a:avLst/>
+          </a:prstGeom>
+          <a:noFill/>
+        </p:spPr>
+        <p:txBody>
+          <a:bodyPr wrap="square" anchor="ctr">
+            <a:spAutoFit/>
+          </a:bodyPr>
+          <a:lstStyle/>
+          <a:p>
+            <a:pPr algn="l"/>
+            <a:r>
+              <a:rPr sz="1400" b="1" i="0">
+                <a:solidFill>
+                  <a:srgbClr val="FFFFFF"/>
+                </a:solidFill>
+                <a:latin typeface="Calibri"/>
+              </a:rPr>
+              <a:t>Defender</a:t>
+            </a:r>
+          </a:p>
+        </p:txBody>
+      </p:sp>
+      <p:sp>
+        <p:nvSpPr>
+          <p:cNvPr id="8" name="Rectangle 7"/>
+          <p:cNvSpPr/>
+          <p:nvPr/>
+        </p:nvSpPr>
+        <p:spPr>
+          <a:xfrm>
+            <a:off x="6415887" y="1783080"/>
+            <a:ext cx="1828800" cy="457200"/>
+          </a:xfrm>
+          <a:prstGeom prst="rect">
+            <a:avLst/>
+          </a:prstGeom>
+          <a:solidFill>
+            <a:srgbClr val="1F355E"/>
+          </a:solidFill>
+          <a:ln w="12700">
+            <a:solidFill>
+              <a:srgbClr val="D9E0E8"/>
+            </a:solidFill>
+          </a:ln>
+          <a:effectLst/>
+        </p:spPr>
+        <p:style>
+          <a:lnRef idx="1">
+            <a:schemeClr val="accent1"/>
+          </a:lnRef>
+          <a:fillRef idx="3">
+            <a:schemeClr val="accent1"/>
+          </a:fillRef>
+          <a:effectRef idx="2">
+            <a:schemeClr val="accent1"/>
+          </a:effectRef>
+          <a:fontRef idx="minor">
+            <a:schemeClr val="lt1"/>
+          </a:fontRef>
+        </p:style>
+        <p:txBody>
+          <a:bodyPr rtlCol="0" anchor="ctr"/>
+          <a:lstStyle/>
+          <a:p>
+            <a:pPr algn="ctr"/>
+          </a:p>
+        </p:txBody>
+      </p:sp>
+      <p:sp>
+        <p:nvSpPr>
+          <p:cNvPr id="9" name="TextBox 8"/>
+          <p:cNvSpPr txBox="1"/>
+          <p:nvPr/>
+        </p:nvSpPr>
+        <p:spPr>
+          <a:xfrm>
+            <a:off x="6525615" y="1783080"/>
+            <a:ext cx="1627632" cy="457200"/>
+          </a:xfrm>
+          <a:prstGeom prst="rect">
+            <a:avLst/>
+          </a:prstGeom>
+          <a:noFill/>
+        </p:spPr>
+        <p:txBody>
+          <a:bodyPr wrap="square" anchor="ctr">
+            <a:spAutoFit/>
+          </a:bodyPr>
+          <a:lstStyle/>
+          <a:p>
+            <a:pPr algn="ctr"/>
+            <a:r>
+              <a:rPr sz="1400" b="1" i="0">
+                <a:solidFill>
+                  <a:srgbClr val="FFFFFF"/>
+                </a:solidFill>
+                <a:latin typeface="Calibri"/>
+              </a:rPr>
+              <a:t>Infected ↓</a:t>
+            </a:r>
+          </a:p>
+        </p:txBody>
+      </p:sp>
+      <p:sp>
+        <p:nvSpPr>
+          <p:cNvPr id="10" name="Rectangle 9"/>
+          <p:cNvSpPr/>
+          <p:nvPr/>
+        </p:nvSpPr>
+        <p:spPr>
+          <a:xfrm>
+            <a:off x="8244687" y="1783080"/>
+            <a:ext cx="1920240" cy="457200"/>
+          </a:xfrm>
+          <a:prstGeom prst="rect">
+            <a:avLst/>
+          </a:prstGeom>
+          <a:solidFill>
+            <a:srgbClr val="1F355E"/>
+          </a:solidFill>
+          <a:ln w="12700">
+            <a:solidFill>
+              <a:srgbClr val="D9E0E8"/>
+            </a:solidFill>
+          </a:ln>
+          <a:effectLst/>
+        </p:spPr>
+        <p:style>
+          <a:lnRef idx="1">
+            <a:schemeClr val="accent1"/>
+          </a:lnRef>
+          <a:fillRef idx="3">
+            <a:schemeClr val="accent1"/>
+          </a:fillRef>
+          <a:effectRef idx="2">
+            <a:schemeClr val="accent1"/>
+          </a:effectRef>
+          <a:fontRef idx="minor">
+            <a:schemeClr val="lt1"/>
+          </a:fontRef>
+        </p:style>
+        <p:txBody>
+          <a:bodyPr rtlCol="0" anchor="ctr"/>
+          <a:lstStyle/>
+          <a:p>
+            <a:pPr algn="ctr"/>
+          </a:p>
+        </p:txBody>
+      </p:sp>
+      <p:sp>
+        <p:nvSpPr>
+          <p:cNvPr id="11" name="TextBox 10"/>
+          <p:cNvSpPr txBox="1"/>
+          <p:nvPr/>
+        </p:nvSpPr>
+        <p:spPr>
+          <a:xfrm>
+            <a:off x="8354415" y="1783080"/>
+            <a:ext cx="1719072" cy="457200"/>
+          </a:xfrm>
+          <a:prstGeom prst="rect">
+            <a:avLst/>
+          </a:prstGeom>
+          <a:noFill/>
+        </p:spPr>
+        <p:txBody>
+          <a:bodyPr wrap="square" anchor="ctr">
+            <a:spAutoFit/>
+          </a:bodyPr>
+          <a:lstStyle/>
+          <a:p>
+            <a:pPr algn="ctr"/>
+            <a:r>
+              <a:rPr sz="1400" b="1" i="0">
+                <a:solidFill>
+                  <a:srgbClr val="FFFFFF"/>
+                </a:solidFill>
+                <a:latin typeface="Calibri"/>
+              </a:rPr>
+              <a:t>Availability ↑</a:t>
+            </a:r>
+          </a:p>
+        </p:txBody>
+      </p:sp>
+      <p:sp>
+        <p:nvSpPr>
+          <p:cNvPr id="12" name="Rectangle 11"/>
+          <p:cNvSpPr/>
+          <p:nvPr/>
+        </p:nvSpPr>
+        <p:spPr>
+          <a:xfrm>
+            <a:off x="10164927" y="1783080"/>
+            <a:ext cx="1371600" cy="457200"/>
+          </a:xfrm>
+          <a:prstGeom prst="rect">
+            <a:avLst/>
+          </a:prstGeom>
+          <a:solidFill>
+            <a:srgbClr val="1F355E"/>
+          </a:solidFill>
+          <a:ln w="12700">
+            <a:solidFill>
+              <a:srgbClr val="D9E0E8"/>
+            </a:solidFill>
+          </a:ln>
+          <a:effectLst/>
+        </p:spPr>
+        <p:style>
+          <a:lnRef idx="1">
+            <a:schemeClr val="accent1"/>
+          </a:lnRef>
+          <a:fillRef idx="3">
+            <a:schemeClr val="accent1"/>
+          </a:fillRef>
+          <a:effectRef idx="2">
+            <a:schemeClr val="accent1"/>
+          </a:effectRef>
+          <a:fontRef idx="minor">
+            <a:schemeClr val="lt1"/>
+          </a:fontRef>
+        </p:style>
+        <p:txBody>
+          <a:bodyPr rtlCol="0" anchor="ctr"/>
+          <a:lstStyle/>
+          <a:p>
+            <a:pPr algn="ctr"/>
+          </a:p>
+        </p:txBody>
+      </p:sp>
+      <p:sp>
+        <p:nvSpPr>
+          <p:cNvPr id="13" name="TextBox 12"/>
+          <p:cNvSpPr txBox="1"/>
+          <p:nvPr/>
+        </p:nvSpPr>
+        <p:spPr>
+          <a:xfrm>
+            <a:off x="10274655" y="1783080"/>
+            <a:ext cx="1170432" cy="457200"/>
+          </a:xfrm>
+          <a:prstGeom prst="rect">
+            <a:avLst/>
+          </a:prstGeom>
+          <a:noFill/>
+        </p:spPr>
+        <p:txBody>
+          <a:bodyPr wrap="square" anchor="ctr">
+            <a:spAutoFit/>
+          </a:bodyPr>
+          <a:lstStyle/>
+          <a:p>
+            <a:pPr algn="ctr"/>
+            <a:r>
+              <a:rPr sz="1400" b="1" i="0">
+                <a:solidFill>
+                  <a:srgbClr val="FFFFFF"/>
+                </a:solidFill>
+                <a:latin typeface="Calibri"/>
+              </a:rPr>
+              <a:t>Contained@step ↓</a:t>
+            </a:r>
+          </a:p>
+        </p:txBody>
+      </p:sp>
+      <p:sp>
+        <p:nvSpPr>
+          <p:cNvPr id="14" name="Rectangle 13"/>
+          <p:cNvSpPr/>
+          <p:nvPr/>
+        </p:nvSpPr>
+        <p:spPr>
+          <a:xfrm>
+            <a:off x="655167" y="2240280"/>
+            <a:ext cx="5760720" cy="457200"/>
+          </a:xfrm>
+          <a:prstGeom prst="rect">
+            <a:avLst/>
+          </a:prstGeom>
+          <a:solidFill>
+            <a:srgbClr val="F3F6FA"/>
+          </a:solidFill>
+          <a:ln w="12700">
+            <a:solidFill>
+              <a:srgbClr val="D9E0E8"/>
+            </a:solidFill>
+          </a:ln>
+          <a:effectLst/>
+        </p:spPr>
+        <p:style>
+          <a:lnRef idx="1">
+            <a:schemeClr val="accent1"/>
+          </a:lnRef>
+          <a:fillRef idx="3">
+            <a:schemeClr val="accent1"/>
+          </a:fillRef>
+          <a:effectRef idx="2">
+            <a:schemeClr val="accent1"/>
+          </a:effectRef>
+          <a:fontRef idx="minor">
+            <a:schemeClr val="lt1"/>
+          </a:fontRef>
+        </p:style>
+        <p:txBody>
+          <a:bodyPr rtlCol="0" anchor="ctr"/>
+          <a:lstStyle/>
+          <a:p>
+            <a:pPr algn="ctr"/>
+          </a:p>
+        </p:txBody>
+      </p:sp>
+      <p:sp>
+        <p:nvSpPr>
+          <p:cNvPr id="15" name="TextBox 14"/>
+          <p:cNvSpPr txBox="1"/>
+          <p:nvPr/>
+        </p:nvSpPr>
+        <p:spPr>
+          <a:xfrm>
+            <a:off x="764895" y="2240280"/>
+            <a:ext cx="5559552" cy="457200"/>
+          </a:xfrm>
+          <a:prstGeom prst="rect">
+            <a:avLst/>
+          </a:prstGeom>
+          <a:noFill/>
+        </p:spPr>
+        <p:txBody>
+          <a:bodyPr wrap="square" anchor="ctr">
+            <a:spAutoFit/>
+          </a:bodyPr>
+          <a:lstStyle/>
+          <a:p>
+            <a:pPr algn="l"/>
+            <a:r>
+              <a:rPr sz="1400" b="0" i="0">
+                <a:solidFill>
+                  <a:srgbClr val="252B33"/>
+                </a:solidFill>
+                <a:latin typeface="Calibri"/>
+              </a:rPr>
+              <a:t>No defense</a:t>
+            </a:r>
+          </a:p>
+        </p:txBody>
+      </p:sp>
+      <p:sp>
+        <p:nvSpPr>
+          <p:cNvPr id="16" name="Rectangle 15"/>
+          <p:cNvSpPr/>
+          <p:nvPr/>
+        </p:nvSpPr>
+        <p:spPr>
+          <a:xfrm>
+            <a:off x="6415887" y="2240280"/>
+            <a:ext cx="1828800" cy="457200"/>
+          </a:xfrm>
+          <a:prstGeom prst="rect">
+            <a:avLst/>
+          </a:prstGeom>
+          <a:solidFill>
+            <a:srgbClr val="F3F6FA"/>
+          </a:solidFill>
+          <a:ln w="12700">
+            <a:solidFill>
+              <a:srgbClr val="D9E0E8"/>
+            </a:solidFill>
+          </a:ln>
+          <a:effectLst/>
+        </p:spPr>
+        <p:style>
+          <a:lnRef idx="1">
+            <a:schemeClr val="accent1"/>
+          </a:lnRef>
+          <a:fillRef idx="3">
+            <a:schemeClr val="accent1"/>
+          </a:fillRef>
+          <a:effectRef idx="2">
+            <a:schemeClr val="accent1"/>
+          </a:effectRef>
+          <a:fontRef idx="minor">
+            <a:schemeClr val="lt1"/>
+          </a:fontRef>
+        </p:style>
+        <p:txBody>
+          <a:bodyPr rtlCol="0" anchor="ctr"/>
+          <a:lstStyle/>
+          <a:p>
+            <a:pPr algn="ctr"/>
+          </a:p>
+        </p:txBody>
+      </p:sp>
+      <p:sp>
+        <p:nvSpPr>
+          <p:cNvPr id="17" name="TextBox 16"/>
+          <p:cNvSpPr txBox="1"/>
+          <p:nvPr/>
+        </p:nvSpPr>
+        <p:spPr>
+          <a:xfrm>
+            <a:off x="6525615" y="2240280"/>
+            <a:ext cx="1627632" cy="457200"/>
+          </a:xfrm>
+          <a:prstGeom prst="rect">
+            <a:avLst/>
+          </a:prstGeom>
+          <a:noFill/>
+        </p:spPr>
+        <p:txBody>
+          <a:bodyPr wrap="square" anchor="ctr">
+            <a:spAutoFit/>
+          </a:bodyPr>
+          <a:lstStyle/>
+          <a:p>
+            <a:pPr algn="ctr"/>
+            <a:r>
+              <a:rPr sz="1400" b="0" i="0">
+                <a:solidFill>
+                  <a:srgbClr val="252B33"/>
+                </a:solidFill>
+                <a:latin typeface="Calibri"/>
+              </a:rPr>
+              <a:t>36.6%</a:t>
+            </a:r>
+          </a:p>
+        </p:txBody>
+      </p:sp>
+      <p:sp>
+        <p:nvSpPr>
+          <p:cNvPr id="18" name="Rectangle 17"/>
+          <p:cNvSpPr/>
+          <p:nvPr/>
+        </p:nvSpPr>
+        <p:spPr>
+          <a:xfrm>
+            <a:off x="8244687" y="2240280"/>
+            <a:ext cx="1920240" cy="457200"/>
+          </a:xfrm>
+          <a:prstGeom prst="rect">
+            <a:avLst/>
+          </a:prstGeom>
+          <a:solidFill>
+            <a:srgbClr val="F3F6FA"/>
+          </a:solidFill>
+          <a:ln w="12700">
+            <a:solidFill>
+              <a:srgbClr val="D9E0E8"/>
+            </a:solidFill>
+          </a:ln>
+          <a:effectLst/>
+        </p:spPr>
+        <p:style>
+          <a:lnRef idx="1">
+            <a:schemeClr val="accent1"/>
+          </a:lnRef>
+          <a:fillRef idx="3">
+            <a:schemeClr val="accent1"/>
+          </a:fillRef>
+          <a:effectRef idx="2">
+            <a:schemeClr val="accent1"/>
+          </a:effectRef>
+          <a:fontRef idx="minor">
+            <a:schemeClr val="lt1"/>
+          </a:fontRef>
+        </p:style>
+        <p:txBody>
+          <a:bodyPr rtlCol="0" anchor="ctr"/>
+          <a:lstStyle/>
+          <a:p>
+            <a:pPr algn="ctr"/>
+          </a:p>
+        </p:txBody>
+      </p:sp>
+      <p:sp>
+        <p:nvSpPr>
+          <p:cNvPr id="19" name="TextBox 18"/>
+          <p:cNvSpPr txBox="1"/>
+          <p:nvPr/>
+        </p:nvSpPr>
+        <p:spPr>
+          <a:xfrm>
+            <a:off x="8354415" y="2240280"/>
+            <a:ext cx="1719072" cy="457200"/>
+          </a:xfrm>
+          <a:prstGeom prst="rect">
+            <a:avLst/>
+          </a:prstGeom>
+          <a:noFill/>
+        </p:spPr>
+        <p:txBody>
+          <a:bodyPr wrap="square" anchor="ctr">
+            <a:spAutoFit/>
+          </a:bodyPr>
+          <a:lstStyle/>
+          <a:p>
+            <a:pPr algn="ctr"/>
+            <a:r>
+              <a:rPr sz="1400" b="0" i="0">
+                <a:solidFill>
+                  <a:srgbClr val="252B33"/>
+                </a:solidFill>
+                <a:latin typeface="Calibri"/>
+              </a:rPr>
+              <a:t>100%</a:t>
+            </a:r>
+          </a:p>
+        </p:txBody>
+      </p:sp>
+      <p:sp>
+        <p:nvSpPr>
+          <p:cNvPr id="20" name="Rectangle 19"/>
+          <p:cNvSpPr/>
+          <p:nvPr/>
+        </p:nvSpPr>
+        <p:spPr>
+          <a:xfrm>
+            <a:off x="10164927" y="2240280"/>
+            <a:ext cx="1371600" cy="457200"/>
+          </a:xfrm>
+          <a:prstGeom prst="rect">
+            <a:avLst/>
+          </a:prstGeom>
+          <a:solidFill>
+            <a:srgbClr val="F3F6FA"/>
+          </a:solidFill>
+          <a:ln w="12700">
+            <a:solidFill>
+              <a:srgbClr val="D9E0E8"/>
+            </a:solidFill>
+          </a:ln>
+          <a:effectLst/>
+        </p:spPr>
+        <p:style>
+          <a:lnRef idx="1">
+            <a:schemeClr val="accent1"/>
+          </a:lnRef>
+          <a:fillRef idx="3">
+            <a:schemeClr val="accent1"/>
+          </a:fillRef>
+          <a:effectRef idx="2">
+            <a:schemeClr val="accent1"/>
+          </a:effectRef>
+          <a:fontRef idx="minor">
+            <a:schemeClr val="lt1"/>
+          </a:fontRef>
+        </p:style>
+        <p:txBody>
+          <a:bodyPr rtlCol="0" anchor="ctr"/>
+          <a:lstStyle/>
+          <a:p>
+            <a:pPr algn="ctr"/>
+          </a:p>
+        </p:txBody>
+      </p:sp>
+      <p:sp>
+        <p:nvSpPr>
+          <p:cNvPr id="21" name="TextBox 20"/>
+          <p:cNvSpPr txBox="1"/>
+          <p:nvPr/>
+        </p:nvSpPr>
+        <p:spPr>
+          <a:xfrm>
+            <a:off x="10274655" y="2240280"/>
+            <a:ext cx="1170432" cy="457200"/>
+          </a:xfrm>
+          <a:prstGeom prst="rect">
+            <a:avLst/>
+          </a:prstGeom>
+          <a:noFill/>
+        </p:spPr>
+        <p:txBody>
+          <a:bodyPr wrap="square" anchor="ctr">
+            <a:spAutoFit/>
+          </a:bodyPr>
+          <a:lstStyle/>
+          <a:p>
+            <a:pPr algn="ctr"/>
+            <a:r>
+              <a:rPr sz="1400" b="0" i="0">
+                <a:solidFill>
+                  <a:srgbClr val="252B33"/>
+                </a:solidFill>
+                <a:latin typeface="Calibri"/>
+              </a:rPr>
+              <a:t>14.2</a:t>
+            </a:r>
+          </a:p>
+        </p:txBody>
+      </p:sp>
+      <p:sp>
+        <p:nvSpPr>
+          <p:cNvPr id="22" name="Rectangle 21"/>
+          <p:cNvSpPr/>
+          <p:nvPr/>
+        </p:nvSpPr>
+        <p:spPr>
+          <a:xfrm>
+            <a:off x="655167" y="2697480"/>
+            <a:ext cx="5760720" cy="457200"/>
+          </a:xfrm>
+          <a:prstGeom prst="rect">
+            <a:avLst/>
+          </a:prstGeom>
+          <a:solidFill>
+            <a:srgbClr val="FFFFFF"/>
+          </a:solidFill>
+          <a:ln w="12700">
+            <a:solidFill>
+              <a:srgbClr val="D9E0E8"/>
+            </a:solidFill>
+          </a:ln>
+          <a:effectLst/>
+        </p:spPr>
+        <p:style>
+          <a:lnRef idx="1">
+            <a:schemeClr val="accent1"/>
+          </a:lnRef>
+          <a:fillRef idx="3">
+            <a:schemeClr val="accent1"/>
+          </a:fillRef>
+          <a:effectRef idx="2">
+            <a:schemeClr val="accent1"/>
+          </a:effectRef>
+          <a:fontRef idx="minor">
+            <a:schemeClr val="lt1"/>
+          </a:fontRef>
+        </p:style>
+        <p:txBody>
+          <a:bodyPr rtlCol="0" anchor="ctr"/>
+          <a:lstStyle/>
+          <a:p>
+            <a:pPr algn="ctr"/>
+          </a:p>
+        </p:txBody>
+      </p:sp>
+      <p:sp>
+        <p:nvSpPr>
+          <p:cNvPr id="23" name="TextBox 22"/>
+          <p:cNvSpPr txBox="1"/>
+          <p:nvPr/>
+        </p:nvSpPr>
+        <p:spPr>
+          <a:xfrm>
+            <a:off x="764895" y="2697480"/>
+            <a:ext cx="5559552" cy="457200"/>
+          </a:xfrm>
+          <a:prstGeom prst="rect">
+            <a:avLst/>
+          </a:prstGeom>
+          <a:noFill/>
+        </p:spPr>
+        <p:txBody>
+          <a:bodyPr wrap="square" anchor="ctr">
+            <a:spAutoFit/>
+          </a:bodyPr>
+          <a:lstStyle/>
+          <a:p>
+            <a:pPr algn="l"/>
+            <a:r>
+              <a:rPr sz="1400" b="0" i="0">
+                <a:solidFill>
+                  <a:srgbClr val="252B33"/>
+                </a:solidFill>
+                <a:latin typeface="Calibri"/>
+              </a:rPr>
+              <a:t>Best structural (degree / betweenness)</a:t>
+            </a:r>
+          </a:p>
+        </p:txBody>
+      </p:sp>
+      <p:sp>
+        <p:nvSpPr>
+          <p:cNvPr id="24" name="Rectangle 23"/>
+          <p:cNvSpPr/>
+          <p:nvPr/>
+        </p:nvSpPr>
+        <p:spPr>
+          <a:xfrm>
+            <a:off x="6415887" y="2697480"/>
+            <a:ext cx="1828800" cy="457200"/>
+          </a:xfrm>
+          <a:prstGeom prst="rect">
+            <a:avLst/>
+          </a:prstGeom>
+          <a:solidFill>
+            <a:srgbClr val="FFFFFF"/>
+          </a:solidFill>
+          <a:ln w="12700">
+            <a:solidFill>
+              <a:srgbClr val="D9E0E8"/>
+            </a:solidFill>
+          </a:ln>
+          <a:effectLst/>
+        </p:spPr>
+        <p:style>
+          <a:lnRef idx="1">
+            <a:schemeClr val="accent1"/>
+          </a:lnRef>
+          <a:fillRef idx="3">
+            <a:schemeClr val="accent1"/>
+          </a:fillRef>
+          <a:effectRef idx="2">
+            <a:schemeClr val="accent1"/>
+          </a:effectRef>
+          <a:fontRef idx="minor">
+            <a:schemeClr val="lt1"/>
+          </a:fontRef>
+        </p:style>
+        <p:txBody>
+          <a:bodyPr rtlCol="0" anchor="ctr"/>
+          <a:lstStyle/>
+          <a:p>
+            <a:pPr algn="ctr"/>
+          </a:p>
+        </p:txBody>
+      </p:sp>
+      <p:sp>
+        <p:nvSpPr>
+          <p:cNvPr id="25" name="TextBox 24"/>
+          <p:cNvSpPr txBox="1"/>
+          <p:nvPr/>
+        </p:nvSpPr>
+        <p:spPr>
+          <a:xfrm>
+            <a:off x="6525615" y="2697480"/>
+            <a:ext cx="1627632" cy="457200"/>
+          </a:xfrm>
+          <a:prstGeom prst="rect">
+            <a:avLst/>
+          </a:prstGeom>
+          <a:noFill/>
+        </p:spPr>
+        <p:txBody>
+          <a:bodyPr wrap="square" anchor="ctr">
+            <a:spAutoFit/>
+          </a:bodyPr>
+          <a:lstStyle/>
+          <a:p>
+            <a:pPr algn="ctr"/>
+            <a:r>
+              <a:rPr sz="1400" b="0" i="0">
+                <a:solidFill>
+                  <a:srgbClr val="252B33"/>
+                </a:solidFill>
+                <a:latin typeface="Calibri"/>
+              </a:rPr>
+              <a:t>3.4%</a:t>
+            </a:r>
+          </a:p>
+        </p:txBody>
+      </p:sp>
+      <p:sp>
+        <p:nvSpPr>
+          <p:cNvPr id="26" name="Rectangle 25"/>
+          <p:cNvSpPr/>
+          <p:nvPr/>
+        </p:nvSpPr>
+        <p:spPr>
+          <a:xfrm>
+            <a:off x="8244687" y="2697480"/>
+            <a:ext cx="1920240" cy="457200"/>
+          </a:xfrm>
+          <a:prstGeom prst="rect">
+            <a:avLst/>
+          </a:prstGeom>
+          <a:solidFill>
+            <a:srgbClr val="FFFFFF"/>
+          </a:solidFill>
+          <a:ln w="12700">
+            <a:solidFill>
+              <a:srgbClr val="D9E0E8"/>
+            </a:solidFill>
+          </a:ln>
+          <a:effectLst/>
+        </p:spPr>
+        <p:style>
+          <a:lnRef idx="1">
+            <a:schemeClr val="accent1"/>
+          </a:lnRef>
+          <a:fillRef idx="3">
+            <a:schemeClr val="accent1"/>
+          </a:fillRef>
+          <a:effectRef idx="2">
+            <a:schemeClr val="accent1"/>
+          </a:effectRef>
+          <a:fontRef idx="minor">
+            <a:schemeClr val="lt1"/>
+          </a:fontRef>
+        </p:style>
+        <p:txBody>
+          <a:bodyPr rtlCol="0" anchor="ctr"/>
+          <a:lstStyle/>
+          <a:p>
+            <a:pPr algn="ctr"/>
+          </a:p>
+        </p:txBody>
+      </p:sp>
+      <p:sp>
+        <p:nvSpPr>
+          <p:cNvPr id="27" name="TextBox 26"/>
+          <p:cNvSpPr txBox="1"/>
+          <p:nvPr/>
+        </p:nvSpPr>
+        <p:spPr>
+          <a:xfrm>
+            <a:off x="8354415" y="2697480"/>
+            <a:ext cx="1719072" cy="457200"/>
+          </a:xfrm>
+          <a:prstGeom prst="rect">
+            <a:avLst/>
+          </a:prstGeom>
+          <a:noFill/>
+        </p:spPr>
+        <p:txBody>
+          <a:bodyPr wrap="square" anchor="ctr">
+            <a:spAutoFit/>
+          </a:bodyPr>
+          <a:lstStyle/>
+          <a:p>
+            <a:pPr algn="ctr"/>
+            <a:r>
+              <a:rPr sz="1400" b="0" i="0">
+                <a:solidFill>
+                  <a:srgbClr val="252B33"/>
+                </a:solidFill>
+                <a:latin typeface="Calibri"/>
+              </a:rPr>
+              <a:t>95.5%</a:t>
+            </a:r>
+          </a:p>
+        </p:txBody>
+      </p:sp>
+      <p:sp>
+        <p:nvSpPr>
+          <p:cNvPr id="28" name="Rectangle 27"/>
+          <p:cNvSpPr/>
+          <p:nvPr/>
+        </p:nvSpPr>
+        <p:spPr>
+          <a:xfrm>
+            <a:off x="10164927" y="2697480"/>
+            <a:ext cx="1371600" cy="457200"/>
+          </a:xfrm>
+          <a:prstGeom prst="rect">
+            <a:avLst/>
+          </a:prstGeom>
+          <a:solidFill>
+            <a:srgbClr val="FFFFFF"/>
+          </a:solidFill>
+          <a:ln w="12700">
+            <a:solidFill>
+              <a:srgbClr val="D9E0E8"/>
+            </a:solidFill>
+          </a:ln>
+          <a:effectLst/>
+        </p:spPr>
+        <p:style>
+          <a:lnRef idx="1">
+            <a:schemeClr val="accent1"/>
+          </a:lnRef>
+          <a:fillRef idx="3">
+            <a:schemeClr val="accent1"/>
+          </a:fillRef>
+          <a:effectRef idx="2">
+            <a:schemeClr val="accent1"/>
+          </a:effectRef>
+          <a:fontRef idx="minor">
+            <a:schemeClr val="lt1"/>
+          </a:fontRef>
+        </p:style>
+        <p:txBody>
+          <a:bodyPr rtlCol="0" anchor="ctr"/>
+          <a:lstStyle/>
+          <a:p>
+            <a:pPr algn="ctr"/>
+          </a:p>
+        </p:txBody>
+      </p:sp>
+      <p:sp>
+        <p:nvSpPr>
+          <p:cNvPr id="29" name="TextBox 28"/>
+          <p:cNvSpPr txBox="1"/>
+          <p:nvPr/>
+        </p:nvSpPr>
+        <p:spPr>
+          <a:xfrm>
+            <a:off x="10274655" y="2697480"/>
+            <a:ext cx="1170432" cy="457200"/>
+          </a:xfrm>
+          <a:prstGeom prst="rect">
+            <a:avLst/>
+          </a:prstGeom>
+          <a:noFill/>
+        </p:spPr>
+        <p:txBody>
+          <a:bodyPr wrap="square" anchor="ctr">
+            <a:spAutoFit/>
+          </a:bodyPr>
+          <a:lstStyle/>
+          <a:p>
+            <a:pPr algn="ctr"/>
+            <a:r>
+              <a:rPr sz="1400" b="0" i="0">
+                <a:solidFill>
+                  <a:srgbClr val="252B33"/>
+                </a:solidFill>
+                <a:latin typeface="Calibri"/>
+              </a:rPr>
+              <a:t>4.5</a:t>
+            </a:r>
+          </a:p>
+        </p:txBody>
+      </p:sp>
+      <p:sp>
+        <p:nvSpPr>
+          <p:cNvPr id="30" name="Rectangle 29"/>
+          <p:cNvSpPr/>
+          <p:nvPr/>
+        </p:nvSpPr>
+        <p:spPr>
+          <a:xfrm>
+            <a:off x="655167" y="3154680"/>
+            <a:ext cx="5760720" cy="457200"/>
+          </a:xfrm>
+          <a:prstGeom prst="rect">
+            <a:avLst/>
+          </a:prstGeom>
+          <a:solidFill>
+            <a:srgbClr val="E3F1E8"/>
+          </a:solidFill>
+          <a:ln w="12700">
+            <a:solidFill>
+              <a:srgbClr val="D9E0E8"/>
+            </a:solidFill>
+          </a:ln>
+          <a:effectLst/>
+        </p:spPr>
+        <p:style>
+          <a:lnRef idx="1">
+            <a:schemeClr val="accent1"/>
+          </a:lnRef>
+          <a:fillRef idx="3">
+            <a:schemeClr val="accent1"/>
+          </a:fillRef>
+          <a:effectRef idx="2">
+            <a:schemeClr val="accent1"/>
+          </a:effectRef>
+          <a:fontRef idx="minor">
+            <a:schemeClr val="lt1"/>
+          </a:fontRef>
+        </p:style>
+        <p:txBody>
+          <a:bodyPr rtlCol="0" anchor="ctr"/>
+          <a:lstStyle/>
+          <a:p>
+            <a:pPr algn="ctr"/>
+          </a:p>
+        </p:txBody>
+      </p:sp>
+      <p:sp>
+        <p:nvSpPr>
+          <p:cNvPr id="31" name="TextBox 30"/>
+          <p:cNvSpPr txBox="1"/>
+          <p:nvPr/>
+        </p:nvSpPr>
+        <p:spPr>
+          <a:xfrm>
+            <a:off x="764895" y="3154680"/>
+            <a:ext cx="5559552" cy="457200"/>
+          </a:xfrm>
+          <a:prstGeom prst="rect">
+            <a:avLst/>
+          </a:prstGeom>
+          <a:noFill/>
+        </p:spPr>
+        <p:txBody>
+          <a:bodyPr wrap="square" anchor="ctr">
+            <a:spAutoFit/>
+          </a:bodyPr>
+          <a:lstStyle/>
+          <a:p>
+            <a:pPr algn="l"/>
+            <a:r>
+              <a:rPr sz="1400" b="1" i="0">
+                <a:solidFill>
+                  <a:srgbClr val="1B7F4B"/>
+                </a:solidFill>
+                <a:latin typeface="Calibri"/>
+              </a:rPr>
+              <a:t>SERUM — content-aware (ours)</a:t>
+            </a:r>
+          </a:p>
+        </p:txBody>
+      </p:sp>
+      <p:sp>
+        <p:nvSpPr>
+          <p:cNvPr id="32" name="Rectangle 31"/>
+          <p:cNvSpPr/>
+          <p:nvPr/>
+        </p:nvSpPr>
+        <p:spPr>
+          <a:xfrm>
+            <a:off x="6415887" y="3154680"/>
+            <a:ext cx="1828800" cy="457200"/>
+          </a:xfrm>
+          <a:prstGeom prst="rect">
+            <a:avLst/>
+          </a:prstGeom>
+          <a:solidFill>
+            <a:srgbClr val="E3F1E8"/>
+          </a:solidFill>
+          <a:ln w="12700">
+            <a:solidFill>
+              <a:srgbClr val="D9E0E8"/>
+            </a:solidFill>
+          </a:ln>
+          <a:effectLst/>
+        </p:spPr>
+        <p:style>
+          <a:lnRef idx="1">
+            <a:schemeClr val="accent1"/>
+          </a:lnRef>
+          <a:fillRef idx="3">
+            <a:schemeClr val="accent1"/>
+          </a:fillRef>
+          <a:effectRef idx="2">
+            <a:schemeClr val="accent1"/>
+          </a:effectRef>
+          <a:fontRef idx="minor">
+            <a:schemeClr val="lt1"/>
+          </a:fontRef>
+        </p:style>
+        <p:txBody>
+          <a:bodyPr rtlCol="0" anchor="ctr"/>
+          <a:lstStyle/>
+          <a:p>
+            <a:pPr algn="ctr"/>
+          </a:p>
+        </p:txBody>
+      </p:sp>
+      <p:sp>
+        <p:nvSpPr>
+          <p:cNvPr id="33" name="TextBox 32"/>
+          <p:cNvSpPr txBox="1"/>
+          <p:nvPr/>
+        </p:nvSpPr>
+        <p:spPr>
+          <a:xfrm>
+            <a:off x="6525615" y="3154680"/>
+            <a:ext cx="1627632" cy="457200"/>
+          </a:xfrm>
+          <a:prstGeom prst="rect">
+            <a:avLst/>
+          </a:prstGeom>
+          <a:noFill/>
+        </p:spPr>
+        <p:txBody>
+          <a:bodyPr wrap="square" anchor="ctr">
+            <a:spAutoFit/>
+          </a:bodyPr>
+          <a:lstStyle/>
+          <a:p>
+            <a:pPr algn="ctr"/>
+            <a:r>
+              <a:rPr sz="1400" b="1" i="0">
+                <a:solidFill>
+                  <a:srgbClr val="1B7F4B"/>
+                </a:solidFill>
+                <a:latin typeface="Calibri"/>
+              </a:rPr>
+              <a:t>1.8%</a:t>
+            </a:r>
+          </a:p>
+        </p:txBody>
+      </p:sp>
+      <p:sp>
+        <p:nvSpPr>
+          <p:cNvPr id="34" name="Rectangle 33"/>
+          <p:cNvSpPr/>
+          <p:nvPr/>
+        </p:nvSpPr>
+        <p:spPr>
+          <a:xfrm>
+            <a:off x="8244687" y="3154680"/>
+            <a:ext cx="1920240" cy="457200"/>
+          </a:xfrm>
+          <a:prstGeom prst="rect">
+            <a:avLst/>
+          </a:prstGeom>
+          <a:solidFill>
+            <a:srgbClr val="E3F1E8"/>
+          </a:solidFill>
+          <a:ln w="12700">
+            <a:solidFill>
+              <a:srgbClr val="D9E0E8"/>
+            </a:solidFill>
+          </a:ln>
+          <a:effectLst/>
+        </p:spPr>
+        <p:style>
+          <a:lnRef idx="1">
+            <a:schemeClr val="accent1"/>
+          </a:lnRef>
+          <a:fillRef idx="3">
+            <a:schemeClr val="accent1"/>
+          </a:fillRef>
+          <a:effectRef idx="2">
+            <a:schemeClr val="accent1"/>
+          </a:effectRef>
+          <a:fontRef idx="minor">
+            <a:schemeClr val="lt1"/>
+          </a:fontRef>
+        </p:style>
+        <p:txBody>
+          <a:bodyPr rtlCol="0" anchor="ctr"/>
+          <a:lstStyle/>
+          <a:p>
+            <a:pPr algn="ctr"/>
+          </a:p>
+        </p:txBody>
+      </p:sp>
+      <p:sp>
+        <p:nvSpPr>
+          <p:cNvPr id="35" name="TextBox 34"/>
+          <p:cNvSpPr txBox="1"/>
+          <p:nvPr/>
+        </p:nvSpPr>
+        <p:spPr>
+          <a:xfrm>
+            <a:off x="8354415" y="3154680"/>
+            <a:ext cx="1719072" cy="457200"/>
+          </a:xfrm>
+          <a:prstGeom prst="rect">
+            <a:avLst/>
+          </a:prstGeom>
+          <a:noFill/>
+        </p:spPr>
+        <p:txBody>
+          <a:bodyPr wrap="square" anchor="ctr">
+            <a:spAutoFit/>
+          </a:bodyPr>
+          <a:lstStyle/>
+          <a:p>
+            <a:pPr algn="ctr"/>
+            <a:r>
+              <a:rPr sz="1400" b="1" i="0">
+                <a:solidFill>
+                  <a:srgbClr val="1B7F4B"/>
+                </a:solidFill>
+                <a:latin typeface="Calibri"/>
+              </a:rPr>
+              <a:t>98.5%</a:t>
+            </a:r>
+          </a:p>
+        </p:txBody>
+      </p:sp>
+      <p:sp>
+        <p:nvSpPr>
+          <p:cNvPr id="36" name="Rectangle 35"/>
+          <p:cNvSpPr/>
+          <p:nvPr/>
+        </p:nvSpPr>
+        <p:spPr>
+          <a:xfrm>
+            <a:off x="10164927" y="3154680"/>
+            <a:ext cx="1371600" cy="457200"/>
+          </a:xfrm>
+          <a:prstGeom prst="rect">
+            <a:avLst/>
+          </a:prstGeom>
+          <a:solidFill>
+            <a:srgbClr val="E3F1E8"/>
+          </a:solidFill>
+          <a:ln w="12700">
+            <a:solidFill>
+              <a:srgbClr val="D9E0E8"/>
+            </a:solidFill>
+          </a:ln>
+          <a:effectLst/>
+        </p:spPr>
+        <p:style>
+          <a:lnRef idx="1">
+            <a:schemeClr val="accent1"/>
+          </a:lnRef>
+          <a:fillRef idx="3">
+            <a:schemeClr val="accent1"/>
+          </a:fillRef>
+          <a:effectRef idx="2">
+            <a:schemeClr val="accent1"/>
+          </a:effectRef>
+          <a:fontRef idx="minor">
+            <a:schemeClr val="lt1"/>
+          </a:fontRef>
+        </p:style>
+        <p:txBody>
+          <a:bodyPr rtlCol="0" anchor="ctr"/>
+          <a:lstStyle/>
+          <a:p>
+            <a:pPr algn="ctr"/>
+          </a:p>
+        </p:txBody>
+      </p:sp>
+      <p:sp>
+        <p:nvSpPr>
+          <p:cNvPr id="37" name="TextBox 36"/>
+          <p:cNvSpPr txBox="1"/>
+          <p:nvPr/>
+        </p:nvSpPr>
+        <p:spPr>
+          <a:xfrm>
+            <a:off x="10274655" y="3154680"/>
+            <a:ext cx="1170432" cy="457200"/>
+          </a:xfrm>
+          <a:prstGeom prst="rect">
+            <a:avLst/>
+          </a:prstGeom>
+          <a:noFill/>
+        </p:spPr>
+        <p:txBody>
+          <a:bodyPr wrap="square" anchor="ctr">
+            <a:spAutoFit/>
+          </a:bodyPr>
+          <a:lstStyle/>
+          <a:p>
+            <a:pPr algn="ctr"/>
+            <a:r>
+              <a:rPr sz="1400" b="1" i="0">
+                <a:solidFill>
+                  <a:srgbClr val="1B7F4B"/>
+                </a:solidFill>
+                <a:latin typeface="Calibri"/>
+              </a:rPr>
+              <a:t>3.0</a:t>
+            </a:r>
+          </a:p>
+        </p:txBody>
+      </p:sp>
+      <p:sp>
+        <p:nvSpPr>
+          <p:cNvPr id="38" name="Rectangle 37"/>
+          <p:cNvSpPr/>
+          <p:nvPr/>
+        </p:nvSpPr>
+        <p:spPr>
+          <a:xfrm>
+            <a:off x="655167" y="3611880"/>
+            <a:ext cx="5760720" cy="457200"/>
+          </a:xfrm>
+          <a:prstGeom prst="rect">
+            <a:avLst/>
+          </a:prstGeom>
+          <a:solidFill>
+            <a:srgbClr val="FFFFFF"/>
+          </a:solidFill>
+          <a:ln w="12700">
+            <a:solidFill>
+              <a:srgbClr val="D9E0E8"/>
+            </a:solidFill>
+          </a:ln>
+          <a:effectLst/>
+        </p:spPr>
+        <p:style>
+          <a:lnRef idx="1">
+            <a:schemeClr val="accent1"/>
+          </a:lnRef>
+          <a:fillRef idx="3">
+            <a:schemeClr val="accent1"/>
+          </a:fillRef>
+          <a:effectRef idx="2">
+            <a:schemeClr val="accent1"/>
+          </a:effectRef>
+          <a:fontRef idx="minor">
+            <a:schemeClr val="lt1"/>
+          </a:fontRef>
+        </p:style>
+        <p:txBody>
+          <a:bodyPr rtlCol="0" anchor="ctr"/>
+          <a:lstStyle/>
+          <a:p>
+            <a:pPr algn="ctr"/>
+          </a:p>
+        </p:txBody>
+      </p:sp>
+      <p:sp>
+        <p:nvSpPr>
+          <p:cNvPr id="39" name="TextBox 38"/>
+          <p:cNvSpPr txBox="1"/>
+          <p:nvPr/>
+        </p:nvSpPr>
+        <p:spPr>
+          <a:xfrm>
+            <a:off x="764895" y="3611880"/>
+            <a:ext cx="5559552" cy="457200"/>
+          </a:xfrm>
+          <a:prstGeom prst="rect">
+            <a:avLst/>
+          </a:prstGeom>
+          <a:noFill/>
+        </p:spPr>
+        <p:txBody>
+          <a:bodyPr wrap="square" anchor="ctr">
+            <a:spAutoFit/>
+          </a:bodyPr>
+          <a:lstStyle/>
+          <a:p>
+            <a:pPr algn="l"/>
+            <a:r>
+              <a:rPr sz="1400" b="0" i="0">
+                <a:solidFill>
+                  <a:srgbClr val="252B33"/>
+                </a:solidFill>
+                <a:latin typeface="Calibri"/>
+              </a:rPr>
+              <a:t>Oracle (is told the exploit)</a:t>
+            </a:r>
+          </a:p>
+        </p:txBody>
+      </p:sp>
+      <p:sp>
+        <p:nvSpPr>
+          <p:cNvPr id="40" name="Rectangle 39"/>
+          <p:cNvSpPr/>
+          <p:nvPr/>
+        </p:nvSpPr>
+        <p:spPr>
+          <a:xfrm>
+            <a:off x="6415887" y="3611880"/>
+            <a:ext cx="1828800" cy="457200"/>
+          </a:xfrm>
+          <a:prstGeom prst="rect">
+            <a:avLst/>
+          </a:prstGeom>
+          <a:solidFill>
+            <a:srgbClr val="FFFFFF"/>
+          </a:solidFill>
+          <a:ln w="12700">
+            <a:solidFill>
+              <a:srgbClr val="D9E0E8"/>
+            </a:solidFill>
+          </a:ln>
+          <a:effectLst/>
+        </p:spPr>
+        <p:style>
+          <a:lnRef idx="1">
+            <a:schemeClr val="accent1"/>
+          </a:lnRef>
+          <a:fillRef idx="3">
+            <a:schemeClr val="accent1"/>
+          </a:fillRef>
+          <a:effectRef idx="2">
+            <a:schemeClr val="accent1"/>
+          </a:effectRef>
+          <a:fontRef idx="minor">
+            <a:schemeClr val="lt1"/>
+          </a:fontRef>
+        </p:style>
+        <p:txBody>
+          <a:bodyPr rtlCol="0" anchor="ctr"/>
+          <a:lstStyle/>
+          <a:p>
+            <a:pPr algn="ctr"/>
+          </a:p>
+        </p:txBody>
+      </p:sp>
+      <p:sp>
+        <p:nvSpPr>
+          <p:cNvPr id="41" name="TextBox 40"/>
+          <p:cNvSpPr txBox="1"/>
+          <p:nvPr/>
+        </p:nvSpPr>
+        <p:spPr>
+          <a:xfrm>
+            <a:off x="6525615" y="3611880"/>
+            <a:ext cx="1627632" cy="457200"/>
+          </a:xfrm>
+          <a:prstGeom prst="rect">
+            <a:avLst/>
+          </a:prstGeom>
+          <a:noFill/>
+        </p:spPr>
+        <p:txBody>
+          <a:bodyPr wrap="square" anchor="ctr">
+            <a:spAutoFit/>
+          </a:bodyPr>
+          <a:lstStyle/>
+          <a:p>
+            <a:pPr algn="ctr"/>
+            <a:r>
+              <a:rPr sz="1400" b="0" i="0">
+                <a:solidFill>
+                  <a:srgbClr val="252B33"/>
+                </a:solidFill>
+                <a:latin typeface="Calibri"/>
+              </a:rPr>
+              <a:t>1.1%</a:t>
+            </a:r>
+          </a:p>
+        </p:txBody>
+      </p:sp>
+      <p:sp>
+        <p:nvSpPr>
+          <p:cNvPr id="42" name="Rectangle 41"/>
+          <p:cNvSpPr/>
+          <p:nvPr/>
+        </p:nvSpPr>
+        <p:spPr>
+          <a:xfrm>
+            <a:off x="8244687" y="3611880"/>
+            <a:ext cx="1920240" cy="457200"/>
+          </a:xfrm>
+          <a:prstGeom prst="rect">
+            <a:avLst/>
+          </a:prstGeom>
+          <a:solidFill>
+            <a:srgbClr val="FFFFFF"/>
+          </a:solidFill>
+          <a:ln w="12700">
+            <a:solidFill>
+              <a:srgbClr val="D9E0E8"/>
+            </a:solidFill>
+          </a:ln>
+          <a:effectLst/>
+        </p:spPr>
+        <p:style>
+          <a:lnRef idx="1">
+            <a:schemeClr val="accent1"/>
+          </a:lnRef>
+          <a:fillRef idx="3">
+            <a:schemeClr val="accent1"/>
+          </a:fillRef>
+          <a:effectRef idx="2">
+            <a:schemeClr val="accent1"/>
+          </a:effectRef>
+          <a:fontRef idx="minor">
+            <a:schemeClr val="lt1"/>
+          </a:fontRef>
+        </p:style>
+        <p:txBody>
+          <a:bodyPr rtlCol="0" anchor="ctr"/>
+          <a:lstStyle/>
+          <a:p>
+            <a:pPr algn="ctr"/>
+          </a:p>
+        </p:txBody>
+      </p:sp>
+      <p:sp>
+        <p:nvSpPr>
+          <p:cNvPr id="43" name="TextBox 42"/>
+          <p:cNvSpPr txBox="1"/>
+          <p:nvPr/>
+        </p:nvSpPr>
+        <p:spPr>
+          <a:xfrm>
+            <a:off x="8354415" y="3611880"/>
+            <a:ext cx="1719072" cy="457200"/>
+          </a:xfrm>
+          <a:prstGeom prst="rect">
+            <a:avLst/>
+          </a:prstGeom>
+          <a:noFill/>
+        </p:spPr>
+        <p:txBody>
+          <a:bodyPr wrap="square" anchor="ctr">
+            <a:spAutoFit/>
+          </a:bodyPr>
+          <a:lstStyle/>
+          <a:p>
+            <a:pPr algn="ctr"/>
+            <a:r>
+              <a:rPr sz="1400" b="0" i="0">
+                <a:solidFill>
+                  <a:srgbClr val="252B33"/>
+                </a:solidFill>
+                <a:latin typeface="Calibri"/>
+              </a:rPr>
+              <a:t>100%</a:t>
+            </a:r>
+          </a:p>
+        </p:txBody>
+      </p:sp>
+      <p:sp>
+        <p:nvSpPr>
+          <p:cNvPr id="44" name="Rectangle 43"/>
+          <p:cNvSpPr/>
+          <p:nvPr/>
+        </p:nvSpPr>
+        <p:spPr>
+          <a:xfrm>
+            <a:off x="10164927" y="3611880"/>
+            <a:ext cx="1371600" cy="457200"/>
+          </a:xfrm>
+          <a:prstGeom prst="rect">
+            <a:avLst/>
+          </a:prstGeom>
+          <a:solidFill>
+            <a:srgbClr val="FFFFFF"/>
+          </a:solidFill>
+          <a:ln w="12700">
+            <a:solidFill>
+              <a:srgbClr val="D9E0E8"/>
+            </a:solidFill>
+          </a:ln>
+          <a:effectLst/>
+        </p:spPr>
+        <p:style>
+          <a:lnRef idx="1">
+            <a:schemeClr val="accent1"/>
+          </a:lnRef>
+          <a:fillRef idx="3">
+            <a:schemeClr val="accent1"/>
+          </a:fillRef>
+          <a:effectRef idx="2">
+            <a:schemeClr val="accent1"/>
+          </a:effectRef>
+          <a:fontRef idx="minor">
+            <a:schemeClr val="lt1"/>
+          </a:fontRef>
+        </p:style>
+        <p:txBody>
+          <a:bodyPr rtlCol="0" anchor="ctr"/>
+          <a:lstStyle/>
+          <a:p>
+            <a:pPr algn="ctr"/>
+          </a:p>
+        </p:txBody>
+      </p:sp>
+      <p:sp>
+        <p:nvSpPr>
+          <p:cNvPr id="45" name="TextBox 44"/>
+          <p:cNvSpPr txBox="1"/>
+          <p:nvPr/>
+        </p:nvSpPr>
+        <p:spPr>
+          <a:xfrm>
+            <a:off x="10274655" y="3611880"/>
+            <a:ext cx="1170432" cy="457200"/>
+          </a:xfrm>
+          <a:prstGeom prst="rect">
+            <a:avLst/>
+          </a:prstGeom>
+          <a:noFill/>
+        </p:spPr>
+        <p:txBody>
+          <a:bodyPr wrap="square" anchor="ctr">
+            <a:spAutoFit/>
+          </a:bodyPr>
+          <a:lstStyle/>
+          <a:p>
+            <a:pPr algn="ctr"/>
+            <a:r>
+              <a:rPr sz="1400" b="0" i="0">
+                <a:solidFill>
+                  <a:srgbClr val="252B33"/>
+                </a:solidFill>
+                <a:latin typeface="Calibri"/>
+              </a:rPr>
+              <a:t>2.0</a:t>
+            </a:r>
+          </a:p>
+        </p:txBody>
+      </p:sp>
+      <p:sp>
+        <p:nvSpPr>
+          <p:cNvPr id="46" name="Rectangle 45"/>
+          <p:cNvSpPr/>
+          <p:nvPr/>
+        </p:nvSpPr>
+        <p:spPr>
+          <a:xfrm>
+            <a:off x="640080" y="4270248"/>
+            <a:ext cx="10881360" cy="1097280"/>
           </a:xfrm>
           <a:prstGeom prst="rect">
             <a:avLst/>
@@ -15636,14 +16778,14 @@
       </p:sp>
       <p:sp>
         <p:nvSpPr>
-          <p:cNvPr id="8" name="TextBox 7"/>
+          <p:cNvPr id="47" name="TextBox 46"/>
           <p:cNvSpPr txBox="1"/>
           <p:nvPr/>
         </p:nvSpPr>
         <p:spPr>
           <a:xfrm>
             <a:off x="868680" y="4343400"/>
-            <a:ext cx="10424160" cy="1005840"/>
+            <a:ext cx="10424160" cy="932688"/>
           </a:xfrm>
           <a:prstGeom prst="rect">
             <a:avLst/>
@@ -15844,451 +16986,1474 @@
           </a:p>
         </p:txBody>
       </p:sp>
-      <p:graphicFrame>
-        <p:nvGraphicFramePr>
-          <p:cNvPr id="6" name="Table 5"/>
-          <p:cNvGraphicFramePr>
-            <a:graphicFrameLocks noGrp="1"/>
-          </p:cNvGraphicFramePr>
-          <p:nvPr/>
-        </p:nvGraphicFramePr>
-        <p:xfrm>
-          <a:off x="655167" y="1783080"/>
-          <a:ext cx="10789918" cy="2743200"/>
-        </p:xfrm>
-        <a:graphic>
-          <a:graphicData uri="http://schemas.openxmlformats.org/drawingml/2006/table">
-            <a:tbl>
-              <a:tblPr firstRow="1" bandRow="1">
-                <a:tableStyleId>{5C22544A-7EE6-4342-B048-85BDC9FD1C3A}</a:tableStyleId>
-              </a:tblPr>
-              <a:tblGrid>
-                <a:gridCol w="7040880"/>
-                <a:gridCol w="1874519"/>
-                <a:gridCol w="1874519"/>
-              </a:tblGrid>
-              <a:tr h="457200">
-                <a:tc>
-                  <a:txBody>
-                    <a:bodyPr/>
-                    <a:lstStyle/>
-                    <a:p>
-                      <a:pPr algn="l"/>
-                      <a:r>
-                        <a:rPr sz="1500" b="1">
-                          <a:solidFill>
-                            <a:srgbClr val="FFFFFF"/>
-                          </a:solidFill>
-                        </a:rPr>
-                        <a:t>Defender</a:t>
-                      </a:r>
-                    </a:p>
-                  </a:txBody>
-                  <a:tcPr>
-                    <a:solidFill>
-                      <a:srgbClr val="1F355E"/>
-                    </a:solidFill>
-                  </a:tcPr>
-                </a:tc>
-                <a:tc>
-                  <a:txBody>
-                    <a:bodyPr/>
-                    <a:lstStyle/>
-                    <a:p>
-                      <a:pPr algn="ctr"/>
-                      <a:r>
-                        <a:rPr sz="1500" b="1">
-                          <a:solidFill>
-                            <a:srgbClr val="FFFFFF"/>
-                          </a:solidFill>
-                        </a:rPr>
-                        <a:t>Infected ↓</a:t>
-                      </a:r>
-                    </a:p>
-                  </a:txBody>
-                  <a:tcPr>
-                    <a:solidFill>
-                      <a:srgbClr val="1F355E"/>
-                    </a:solidFill>
-                  </a:tcPr>
-                </a:tc>
-                <a:tc>
-                  <a:txBody>
-                    <a:bodyPr/>
-                    <a:lstStyle/>
-                    <a:p>
-                      <a:pPr algn="ctr"/>
-                      <a:r>
-                        <a:rPr sz="1500" b="1">
-                          <a:solidFill>
-                            <a:srgbClr val="FFFFFF"/>
-                          </a:solidFill>
-                        </a:rPr>
-                        <a:t>Availability ↑</a:t>
-                      </a:r>
-                    </a:p>
-                  </a:txBody>
-                  <a:tcPr>
-                    <a:solidFill>
-                      <a:srgbClr val="1F355E"/>
-                    </a:solidFill>
-                  </a:tcPr>
-                </a:tc>
-              </a:tr>
-              <a:tr h="457200">
-                <a:tc>
-                  <a:txBody>
-                    <a:bodyPr/>
-                    <a:lstStyle/>
-                    <a:p>
-                      <a:pPr algn="l"/>
-                      <a:r>
-                        <a:rPr sz="1400" b="0">
-                          <a:solidFill>
-                            <a:srgbClr val="252B33"/>
-                          </a:solidFill>
-                        </a:rPr>
-                        <a:t>No defense</a:t>
-                      </a:r>
-                    </a:p>
-                  </a:txBody>
-                  <a:tcPr>
-                    <a:solidFill>
-                      <a:srgbClr val="F3F6FA"/>
-                    </a:solidFill>
-                  </a:tcPr>
-                </a:tc>
-                <a:tc>
-                  <a:txBody>
-                    <a:bodyPr/>
-                    <a:lstStyle/>
-                    <a:p>
-                      <a:pPr algn="ctr"/>
-                      <a:r>
-                        <a:rPr sz="1400" b="0">
-                          <a:solidFill>
-                            <a:srgbClr val="252B33"/>
-                          </a:solidFill>
-                        </a:rPr>
-                        <a:t>20.1%</a:t>
-                      </a:r>
-                    </a:p>
-                  </a:txBody>
-                  <a:tcPr>
-                    <a:solidFill>
-                      <a:srgbClr val="F3F6FA"/>
-                    </a:solidFill>
-                  </a:tcPr>
-                </a:tc>
-                <a:tc>
-                  <a:txBody>
-                    <a:bodyPr/>
-                    <a:lstStyle/>
-                    <a:p>
-                      <a:pPr algn="ctr"/>
-                      <a:r>
-                        <a:rPr sz="1400" b="0">
-                          <a:solidFill>
-                            <a:srgbClr val="252B33"/>
-                          </a:solidFill>
-                        </a:rPr>
-                        <a:t>100%</a:t>
-                      </a:r>
-                    </a:p>
-                  </a:txBody>
-                  <a:tcPr>
-                    <a:solidFill>
-                      <a:srgbClr val="F3F6FA"/>
-                    </a:solidFill>
-                  </a:tcPr>
-                </a:tc>
-              </a:tr>
-              <a:tr h="457200">
-                <a:tc>
-                  <a:txBody>
-                    <a:bodyPr/>
-                    <a:lstStyle/>
-                    <a:p>
-                      <a:pPr algn="l"/>
-                      <a:r>
-                        <a:rPr sz="1400" b="0">
-                          <a:solidFill>
-                            <a:srgbClr val="252B33"/>
-                          </a:solidFill>
-                        </a:rPr>
-                        <a:t>Degree immunization</a:t>
-                      </a:r>
-                    </a:p>
-                  </a:txBody>
-                  <a:tcPr>
-                    <a:solidFill>
-                      <a:srgbClr val="FFFFFF"/>
-                    </a:solidFill>
-                  </a:tcPr>
-                </a:tc>
-                <a:tc>
-                  <a:txBody>
-                    <a:bodyPr/>
-                    <a:lstStyle/>
-                    <a:p>
-                      <a:pPr algn="ctr"/>
-                      <a:r>
-                        <a:rPr sz="1400" b="0">
-                          <a:solidFill>
-                            <a:srgbClr val="252B33"/>
-                          </a:solidFill>
-                        </a:rPr>
-                        <a:t>18.8%</a:t>
-                      </a:r>
-                    </a:p>
-                  </a:txBody>
-                  <a:tcPr>
-                    <a:solidFill>
-                      <a:srgbClr val="FFFFFF"/>
-                    </a:solidFill>
-                  </a:tcPr>
-                </a:tc>
-                <a:tc>
-                  <a:txBody>
-                    <a:bodyPr/>
-                    <a:lstStyle/>
-                    <a:p>
-                      <a:pPr algn="ctr"/>
-                      <a:r>
-                        <a:rPr sz="1400" b="0">
-                          <a:solidFill>
-                            <a:srgbClr val="252B33"/>
-                          </a:solidFill>
-                        </a:rPr>
-                        <a:t>92.2%</a:t>
-                      </a:r>
-                    </a:p>
-                  </a:txBody>
-                  <a:tcPr>
-                    <a:solidFill>
-                      <a:srgbClr val="FFFFFF"/>
-                    </a:solidFill>
-                  </a:tcPr>
-                </a:tc>
-              </a:tr>
-              <a:tr h="457200">
-                <a:tc>
-                  <a:txBody>
-                    <a:bodyPr/>
-                    <a:lstStyle/>
-                    <a:p>
-                      <a:pPr algn="l"/>
-                      <a:r>
-                        <a:rPr sz="1400" b="0">
-                          <a:solidFill>
-                            <a:srgbClr val="252B33"/>
-                          </a:solidFill>
-                        </a:rPr>
-                        <a:t>Betweenness (best structural)</a:t>
-                      </a:r>
-                    </a:p>
-                  </a:txBody>
-                  <a:tcPr>
-                    <a:solidFill>
-                      <a:srgbClr val="F3F6FA"/>
-                    </a:solidFill>
-                  </a:tcPr>
-                </a:tc>
-                <a:tc>
-                  <a:txBody>
-                    <a:bodyPr/>
-                    <a:lstStyle/>
-                    <a:p>
-                      <a:pPr algn="ctr"/>
-                      <a:r>
-                        <a:rPr sz="1400" b="0">
-                          <a:solidFill>
-                            <a:srgbClr val="252B33"/>
-                          </a:solidFill>
-                        </a:rPr>
-                        <a:t>17.6%</a:t>
-                      </a:r>
-                    </a:p>
-                  </a:txBody>
-                  <a:tcPr>
-                    <a:solidFill>
-                      <a:srgbClr val="F3F6FA"/>
-                    </a:solidFill>
-                  </a:tcPr>
-                </a:tc>
-                <a:tc>
-                  <a:txBody>
-                    <a:bodyPr/>
-                    <a:lstStyle/>
-                    <a:p>
-                      <a:pPr algn="ctr"/>
-                      <a:r>
-                        <a:rPr sz="1400" b="0">
-                          <a:solidFill>
-                            <a:srgbClr val="252B33"/>
-                          </a:solidFill>
-                        </a:rPr>
-                        <a:t>92.5%</a:t>
-                      </a:r>
-                    </a:p>
-                  </a:txBody>
-                  <a:tcPr>
-                    <a:solidFill>
-                      <a:srgbClr val="F3F6FA"/>
-                    </a:solidFill>
-                  </a:tcPr>
-                </a:tc>
-              </a:tr>
-              <a:tr h="457200">
-                <a:tc>
-                  <a:txBody>
-                    <a:bodyPr/>
-                    <a:lstStyle/>
-                    <a:p>
-                      <a:pPr algn="l"/>
-                      <a:r>
-                        <a:rPr sz="1400" b="1">
-                          <a:solidFill>
-                            <a:srgbClr val="1B7F4B"/>
-                          </a:solidFill>
-                        </a:rPr>
-                        <a:t>SERUM — content-aware (ours)</a:t>
-                      </a:r>
-                    </a:p>
-                  </a:txBody>
-                  <a:tcPr>
-                    <a:solidFill>
-                      <a:srgbClr val="E3F1E8"/>
-                    </a:solidFill>
-                  </a:tcPr>
-                </a:tc>
-                <a:tc>
-                  <a:txBody>
-                    <a:bodyPr/>
-                    <a:lstStyle/>
-                    <a:p>
-                      <a:pPr algn="ctr"/>
-                      <a:r>
-                        <a:rPr sz="1400" b="1">
-                          <a:solidFill>
-                            <a:srgbClr val="1B7F4B"/>
-                          </a:solidFill>
-                        </a:rPr>
-                        <a:t>11.7%</a:t>
-                      </a:r>
-                    </a:p>
-                  </a:txBody>
-                  <a:tcPr>
-                    <a:solidFill>
-                      <a:srgbClr val="E3F1E8"/>
-                    </a:solidFill>
-                  </a:tcPr>
-                </a:tc>
-                <a:tc>
-                  <a:txBody>
-                    <a:bodyPr/>
-                    <a:lstStyle/>
-                    <a:p>
-                      <a:pPr algn="ctr"/>
-                      <a:r>
-                        <a:rPr sz="1400" b="1">
-                          <a:solidFill>
-                            <a:srgbClr val="1B7F4B"/>
-                          </a:solidFill>
-                        </a:rPr>
-                        <a:t>97.5%</a:t>
-                      </a:r>
-                    </a:p>
-                  </a:txBody>
-                  <a:tcPr>
-                    <a:solidFill>
-                      <a:srgbClr val="E3F1E8"/>
-                    </a:solidFill>
-                  </a:tcPr>
-                </a:tc>
-              </a:tr>
-              <a:tr h="457200">
-                <a:tc>
-                  <a:txBody>
-                    <a:bodyPr/>
-                    <a:lstStyle/>
-                    <a:p>
-                      <a:pPr algn="l"/>
-                      <a:r>
-                        <a:rPr sz="1400" b="0">
-                          <a:solidFill>
-                            <a:srgbClr val="252B33"/>
-                          </a:solidFill>
-                        </a:rPr>
-                        <a:t>Content-aware oracle (bound)</a:t>
-                      </a:r>
-                    </a:p>
-                  </a:txBody>
-                  <a:tcPr>
-                    <a:solidFill>
-                      <a:srgbClr val="F3F6FA"/>
-                    </a:solidFill>
-                  </a:tcPr>
-                </a:tc>
-                <a:tc>
-                  <a:txBody>
-                    <a:bodyPr/>
-                    <a:lstStyle/>
-                    <a:p>
-                      <a:pPr algn="ctr"/>
-                      <a:r>
-                        <a:rPr sz="1400" b="0">
-                          <a:solidFill>
-                            <a:srgbClr val="252B33"/>
-                          </a:solidFill>
-                        </a:rPr>
-                        <a:t>9.1%</a:t>
-                      </a:r>
-                    </a:p>
-                  </a:txBody>
-                  <a:tcPr>
-                    <a:solidFill>
-                      <a:srgbClr val="F3F6FA"/>
-                    </a:solidFill>
-                  </a:tcPr>
-                </a:tc>
-                <a:tc>
-                  <a:txBody>
-                    <a:bodyPr/>
-                    <a:lstStyle/>
-                    <a:p>
-                      <a:pPr algn="ctr"/>
-                      <a:r>
-                        <a:rPr sz="1400" b="0">
-                          <a:solidFill>
-                            <a:srgbClr val="252B33"/>
-                          </a:solidFill>
-                        </a:rPr>
-                        <a:t>100%</a:t>
-                      </a:r>
-                    </a:p>
-                  </a:txBody>
-                  <a:tcPr>
-                    <a:solidFill>
-                      <a:srgbClr val="F3F6FA"/>
-                    </a:solidFill>
-                  </a:tcPr>
-                </a:tc>
-              </a:tr>
-            </a:tbl>
-          </a:graphicData>
-        </a:graphic>
-      </p:graphicFrame>
-      <p:sp>
-        <p:nvSpPr>
-          <p:cNvPr id="7" name="Rectangle 6"/>
+      <p:sp>
+        <p:nvSpPr>
+          <p:cNvPr id="6" name="Rectangle 5"/>
           <p:cNvSpPr/>
           <p:nvPr/>
         </p:nvSpPr>
         <p:spPr>
           <a:xfrm>
-            <a:off x="640080" y="4709160"/>
-            <a:ext cx="10881360" cy="1143000"/>
+            <a:off x="655167" y="1783080"/>
+            <a:ext cx="7100548" cy="457200"/>
+          </a:xfrm>
+          <a:prstGeom prst="rect">
+            <a:avLst/>
+          </a:prstGeom>
+          <a:solidFill>
+            <a:srgbClr val="1F355E"/>
+          </a:solidFill>
+          <a:ln w="12700">
+            <a:solidFill>
+              <a:srgbClr val="D9E0E8"/>
+            </a:solidFill>
+          </a:ln>
+          <a:effectLst/>
+        </p:spPr>
+        <p:style>
+          <a:lnRef idx="1">
+            <a:schemeClr val="accent1"/>
+          </a:lnRef>
+          <a:fillRef idx="3">
+            <a:schemeClr val="accent1"/>
+          </a:fillRef>
+          <a:effectRef idx="2">
+            <a:schemeClr val="accent1"/>
+          </a:effectRef>
+          <a:fontRef idx="minor">
+            <a:schemeClr val="lt1"/>
+          </a:fontRef>
+        </p:style>
+        <p:txBody>
+          <a:bodyPr rtlCol="0" anchor="ctr"/>
+          <a:lstStyle/>
+          <a:p>
+            <a:pPr algn="ctr"/>
+          </a:p>
+        </p:txBody>
+      </p:sp>
+      <p:sp>
+        <p:nvSpPr>
+          <p:cNvPr id="7" name="TextBox 6"/>
+          <p:cNvSpPr txBox="1"/>
+          <p:nvPr/>
+        </p:nvSpPr>
+        <p:spPr>
+          <a:xfrm>
+            <a:off x="764895" y="1783080"/>
+            <a:ext cx="6899380" cy="457200"/>
+          </a:xfrm>
+          <a:prstGeom prst="rect">
+            <a:avLst/>
+          </a:prstGeom>
+          <a:noFill/>
+        </p:spPr>
+        <p:txBody>
+          <a:bodyPr wrap="square" anchor="ctr">
+            <a:spAutoFit/>
+          </a:bodyPr>
+          <a:lstStyle/>
+          <a:p>
+            <a:pPr algn="l"/>
+            <a:r>
+              <a:rPr sz="1400" b="1" i="0">
+                <a:solidFill>
+                  <a:srgbClr val="FFFFFF"/>
+                </a:solidFill>
+                <a:latin typeface="Calibri"/>
+              </a:rPr>
+              <a:t>Defender</a:t>
+            </a:r>
+          </a:p>
+        </p:txBody>
+      </p:sp>
+      <p:sp>
+        <p:nvSpPr>
+          <p:cNvPr id="8" name="Rectangle 7"/>
+          <p:cNvSpPr/>
+          <p:nvPr/>
+        </p:nvSpPr>
+        <p:spPr>
+          <a:xfrm>
+            <a:off x="7755716" y="1783080"/>
+            <a:ext cx="1890405" cy="457200"/>
+          </a:xfrm>
+          <a:prstGeom prst="rect">
+            <a:avLst/>
+          </a:prstGeom>
+          <a:solidFill>
+            <a:srgbClr val="1F355E"/>
+          </a:solidFill>
+          <a:ln w="12700">
+            <a:solidFill>
+              <a:srgbClr val="D9E0E8"/>
+            </a:solidFill>
+          </a:ln>
+          <a:effectLst/>
+        </p:spPr>
+        <p:style>
+          <a:lnRef idx="1">
+            <a:schemeClr val="accent1"/>
+          </a:lnRef>
+          <a:fillRef idx="3">
+            <a:schemeClr val="accent1"/>
+          </a:fillRef>
+          <a:effectRef idx="2">
+            <a:schemeClr val="accent1"/>
+          </a:effectRef>
+          <a:fontRef idx="minor">
+            <a:schemeClr val="lt1"/>
+          </a:fontRef>
+        </p:style>
+        <p:txBody>
+          <a:bodyPr rtlCol="0" anchor="ctr"/>
+          <a:lstStyle/>
+          <a:p>
+            <a:pPr algn="ctr"/>
+          </a:p>
+        </p:txBody>
+      </p:sp>
+      <p:sp>
+        <p:nvSpPr>
+          <p:cNvPr id="9" name="TextBox 8"/>
+          <p:cNvSpPr txBox="1"/>
+          <p:nvPr/>
+        </p:nvSpPr>
+        <p:spPr>
+          <a:xfrm>
+            <a:off x="7865444" y="1783080"/>
+            <a:ext cx="1689237" cy="457200"/>
+          </a:xfrm>
+          <a:prstGeom prst="rect">
+            <a:avLst/>
+          </a:prstGeom>
+          <a:noFill/>
+        </p:spPr>
+        <p:txBody>
+          <a:bodyPr wrap="square" anchor="ctr">
+            <a:spAutoFit/>
+          </a:bodyPr>
+          <a:lstStyle/>
+          <a:p>
+            <a:pPr algn="ctr"/>
+            <a:r>
+              <a:rPr sz="1400" b="1" i="0">
+                <a:solidFill>
+                  <a:srgbClr val="FFFFFF"/>
+                </a:solidFill>
+                <a:latin typeface="Calibri"/>
+              </a:rPr>
+              <a:t>Infected ↓</a:t>
+            </a:r>
+          </a:p>
+        </p:txBody>
+      </p:sp>
+      <p:sp>
+        <p:nvSpPr>
+          <p:cNvPr id="10" name="Rectangle 9"/>
+          <p:cNvSpPr/>
+          <p:nvPr/>
+        </p:nvSpPr>
+        <p:spPr>
+          <a:xfrm>
+            <a:off x="9646121" y="1783080"/>
+            <a:ext cx="1890405" cy="457200"/>
+          </a:xfrm>
+          <a:prstGeom prst="rect">
+            <a:avLst/>
+          </a:prstGeom>
+          <a:solidFill>
+            <a:srgbClr val="1F355E"/>
+          </a:solidFill>
+          <a:ln w="12700">
+            <a:solidFill>
+              <a:srgbClr val="D9E0E8"/>
+            </a:solidFill>
+          </a:ln>
+          <a:effectLst/>
+        </p:spPr>
+        <p:style>
+          <a:lnRef idx="1">
+            <a:schemeClr val="accent1"/>
+          </a:lnRef>
+          <a:fillRef idx="3">
+            <a:schemeClr val="accent1"/>
+          </a:fillRef>
+          <a:effectRef idx="2">
+            <a:schemeClr val="accent1"/>
+          </a:effectRef>
+          <a:fontRef idx="minor">
+            <a:schemeClr val="lt1"/>
+          </a:fontRef>
+        </p:style>
+        <p:txBody>
+          <a:bodyPr rtlCol="0" anchor="ctr"/>
+          <a:lstStyle/>
+          <a:p>
+            <a:pPr algn="ctr"/>
+          </a:p>
+        </p:txBody>
+      </p:sp>
+      <p:sp>
+        <p:nvSpPr>
+          <p:cNvPr id="11" name="TextBox 10"/>
+          <p:cNvSpPr txBox="1"/>
+          <p:nvPr/>
+        </p:nvSpPr>
+        <p:spPr>
+          <a:xfrm>
+            <a:off x="9755849" y="1783080"/>
+            <a:ext cx="1689237" cy="457200"/>
+          </a:xfrm>
+          <a:prstGeom prst="rect">
+            <a:avLst/>
+          </a:prstGeom>
+          <a:noFill/>
+        </p:spPr>
+        <p:txBody>
+          <a:bodyPr wrap="square" anchor="ctr">
+            <a:spAutoFit/>
+          </a:bodyPr>
+          <a:lstStyle/>
+          <a:p>
+            <a:pPr algn="ctr"/>
+            <a:r>
+              <a:rPr sz="1400" b="1" i="0">
+                <a:solidFill>
+                  <a:srgbClr val="FFFFFF"/>
+                </a:solidFill>
+                <a:latin typeface="Calibri"/>
+              </a:rPr>
+              <a:t>Availability ↑</a:t>
+            </a:r>
+          </a:p>
+        </p:txBody>
+      </p:sp>
+      <p:sp>
+        <p:nvSpPr>
+          <p:cNvPr id="12" name="Rectangle 11"/>
+          <p:cNvSpPr/>
+          <p:nvPr/>
+        </p:nvSpPr>
+        <p:spPr>
+          <a:xfrm>
+            <a:off x="655167" y="2240280"/>
+            <a:ext cx="7100548" cy="457200"/>
+          </a:xfrm>
+          <a:prstGeom prst="rect">
+            <a:avLst/>
+          </a:prstGeom>
+          <a:solidFill>
+            <a:srgbClr val="F3F6FA"/>
+          </a:solidFill>
+          <a:ln w="12700">
+            <a:solidFill>
+              <a:srgbClr val="D9E0E8"/>
+            </a:solidFill>
+          </a:ln>
+          <a:effectLst/>
+        </p:spPr>
+        <p:style>
+          <a:lnRef idx="1">
+            <a:schemeClr val="accent1"/>
+          </a:lnRef>
+          <a:fillRef idx="3">
+            <a:schemeClr val="accent1"/>
+          </a:fillRef>
+          <a:effectRef idx="2">
+            <a:schemeClr val="accent1"/>
+          </a:effectRef>
+          <a:fontRef idx="minor">
+            <a:schemeClr val="lt1"/>
+          </a:fontRef>
+        </p:style>
+        <p:txBody>
+          <a:bodyPr rtlCol="0" anchor="ctr"/>
+          <a:lstStyle/>
+          <a:p>
+            <a:pPr algn="ctr"/>
+          </a:p>
+        </p:txBody>
+      </p:sp>
+      <p:sp>
+        <p:nvSpPr>
+          <p:cNvPr id="13" name="TextBox 12"/>
+          <p:cNvSpPr txBox="1"/>
+          <p:nvPr/>
+        </p:nvSpPr>
+        <p:spPr>
+          <a:xfrm>
+            <a:off x="764895" y="2240280"/>
+            <a:ext cx="6899380" cy="457200"/>
+          </a:xfrm>
+          <a:prstGeom prst="rect">
+            <a:avLst/>
+          </a:prstGeom>
+          <a:noFill/>
+        </p:spPr>
+        <p:txBody>
+          <a:bodyPr wrap="square" anchor="ctr">
+            <a:spAutoFit/>
+          </a:bodyPr>
+          <a:lstStyle/>
+          <a:p>
+            <a:pPr algn="l"/>
+            <a:r>
+              <a:rPr sz="1400" b="0" i="0">
+                <a:solidFill>
+                  <a:srgbClr val="252B33"/>
+                </a:solidFill>
+                <a:latin typeface="Calibri"/>
+              </a:rPr>
+              <a:t>No defense</a:t>
+            </a:r>
+          </a:p>
+        </p:txBody>
+      </p:sp>
+      <p:sp>
+        <p:nvSpPr>
+          <p:cNvPr id="14" name="Rectangle 13"/>
+          <p:cNvSpPr/>
+          <p:nvPr/>
+        </p:nvSpPr>
+        <p:spPr>
+          <a:xfrm>
+            <a:off x="7755716" y="2240280"/>
+            <a:ext cx="1890405" cy="457200"/>
+          </a:xfrm>
+          <a:prstGeom prst="rect">
+            <a:avLst/>
+          </a:prstGeom>
+          <a:solidFill>
+            <a:srgbClr val="F3F6FA"/>
+          </a:solidFill>
+          <a:ln w="12700">
+            <a:solidFill>
+              <a:srgbClr val="D9E0E8"/>
+            </a:solidFill>
+          </a:ln>
+          <a:effectLst/>
+        </p:spPr>
+        <p:style>
+          <a:lnRef idx="1">
+            <a:schemeClr val="accent1"/>
+          </a:lnRef>
+          <a:fillRef idx="3">
+            <a:schemeClr val="accent1"/>
+          </a:fillRef>
+          <a:effectRef idx="2">
+            <a:schemeClr val="accent1"/>
+          </a:effectRef>
+          <a:fontRef idx="minor">
+            <a:schemeClr val="lt1"/>
+          </a:fontRef>
+        </p:style>
+        <p:txBody>
+          <a:bodyPr rtlCol="0" anchor="ctr"/>
+          <a:lstStyle/>
+          <a:p>
+            <a:pPr algn="ctr"/>
+          </a:p>
+        </p:txBody>
+      </p:sp>
+      <p:sp>
+        <p:nvSpPr>
+          <p:cNvPr id="15" name="TextBox 14"/>
+          <p:cNvSpPr txBox="1"/>
+          <p:nvPr/>
+        </p:nvSpPr>
+        <p:spPr>
+          <a:xfrm>
+            <a:off x="7865444" y="2240280"/>
+            <a:ext cx="1689237" cy="457200"/>
+          </a:xfrm>
+          <a:prstGeom prst="rect">
+            <a:avLst/>
+          </a:prstGeom>
+          <a:noFill/>
+        </p:spPr>
+        <p:txBody>
+          <a:bodyPr wrap="square" anchor="ctr">
+            <a:spAutoFit/>
+          </a:bodyPr>
+          <a:lstStyle/>
+          <a:p>
+            <a:pPr algn="ctr"/>
+            <a:r>
+              <a:rPr sz="1400" b="0" i="0">
+                <a:solidFill>
+                  <a:srgbClr val="252B33"/>
+                </a:solidFill>
+                <a:latin typeface="Calibri"/>
+              </a:rPr>
+              <a:t>20.1%</a:t>
+            </a:r>
+          </a:p>
+        </p:txBody>
+      </p:sp>
+      <p:sp>
+        <p:nvSpPr>
+          <p:cNvPr id="16" name="Rectangle 15"/>
+          <p:cNvSpPr/>
+          <p:nvPr/>
+        </p:nvSpPr>
+        <p:spPr>
+          <a:xfrm>
+            <a:off x="9646121" y="2240280"/>
+            <a:ext cx="1890405" cy="457200"/>
+          </a:xfrm>
+          <a:prstGeom prst="rect">
+            <a:avLst/>
+          </a:prstGeom>
+          <a:solidFill>
+            <a:srgbClr val="F3F6FA"/>
+          </a:solidFill>
+          <a:ln w="12700">
+            <a:solidFill>
+              <a:srgbClr val="D9E0E8"/>
+            </a:solidFill>
+          </a:ln>
+          <a:effectLst/>
+        </p:spPr>
+        <p:style>
+          <a:lnRef idx="1">
+            <a:schemeClr val="accent1"/>
+          </a:lnRef>
+          <a:fillRef idx="3">
+            <a:schemeClr val="accent1"/>
+          </a:fillRef>
+          <a:effectRef idx="2">
+            <a:schemeClr val="accent1"/>
+          </a:effectRef>
+          <a:fontRef idx="minor">
+            <a:schemeClr val="lt1"/>
+          </a:fontRef>
+        </p:style>
+        <p:txBody>
+          <a:bodyPr rtlCol="0" anchor="ctr"/>
+          <a:lstStyle/>
+          <a:p>
+            <a:pPr algn="ctr"/>
+          </a:p>
+        </p:txBody>
+      </p:sp>
+      <p:sp>
+        <p:nvSpPr>
+          <p:cNvPr id="17" name="TextBox 16"/>
+          <p:cNvSpPr txBox="1"/>
+          <p:nvPr/>
+        </p:nvSpPr>
+        <p:spPr>
+          <a:xfrm>
+            <a:off x="9755849" y="2240280"/>
+            <a:ext cx="1689237" cy="457200"/>
+          </a:xfrm>
+          <a:prstGeom prst="rect">
+            <a:avLst/>
+          </a:prstGeom>
+          <a:noFill/>
+        </p:spPr>
+        <p:txBody>
+          <a:bodyPr wrap="square" anchor="ctr">
+            <a:spAutoFit/>
+          </a:bodyPr>
+          <a:lstStyle/>
+          <a:p>
+            <a:pPr algn="ctr"/>
+            <a:r>
+              <a:rPr sz="1400" b="0" i="0">
+                <a:solidFill>
+                  <a:srgbClr val="252B33"/>
+                </a:solidFill>
+                <a:latin typeface="Calibri"/>
+              </a:rPr>
+              <a:t>100%</a:t>
+            </a:r>
+          </a:p>
+        </p:txBody>
+      </p:sp>
+      <p:sp>
+        <p:nvSpPr>
+          <p:cNvPr id="18" name="Rectangle 17"/>
+          <p:cNvSpPr/>
+          <p:nvPr/>
+        </p:nvSpPr>
+        <p:spPr>
+          <a:xfrm>
+            <a:off x="655167" y="2697480"/>
+            <a:ext cx="7100548" cy="457200"/>
+          </a:xfrm>
+          <a:prstGeom prst="rect">
+            <a:avLst/>
+          </a:prstGeom>
+          <a:solidFill>
+            <a:srgbClr val="FFFFFF"/>
+          </a:solidFill>
+          <a:ln w="12700">
+            <a:solidFill>
+              <a:srgbClr val="D9E0E8"/>
+            </a:solidFill>
+          </a:ln>
+          <a:effectLst/>
+        </p:spPr>
+        <p:style>
+          <a:lnRef idx="1">
+            <a:schemeClr val="accent1"/>
+          </a:lnRef>
+          <a:fillRef idx="3">
+            <a:schemeClr val="accent1"/>
+          </a:fillRef>
+          <a:effectRef idx="2">
+            <a:schemeClr val="accent1"/>
+          </a:effectRef>
+          <a:fontRef idx="minor">
+            <a:schemeClr val="lt1"/>
+          </a:fontRef>
+        </p:style>
+        <p:txBody>
+          <a:bodyPr rtlCol="0" anchor="ctr"/>
+          <a:lstStyle/>
+          <a:p>
+            <a:pPr algn="ctr"/>
+          </a:p>
+        </p:txBody>
+      </p:sp>
+      <p:sp>
+        <p:nvSpPr>
+          <p:cNvPr id="19" name="TextBox 18"/>
+          <p:cNvSpPr txBox="1"/>
+          <p:nvPr/>
+        </p:nvSpPr>
+        <p:spPr>
+          <a:xfrm>
+            <a:off x="764895" y="2697480"/>
+            <a:ext cx="6899380" cy="457200"/>
+          </a:xfrm>
+          <a:prstGeom prst="rect">
+            <a:avLst/>
+          </a:prstGeom>
+          <a:noFill/>
+        </p:spPr>
+        <p:txBody>
+          <a:bodyPr wrap="square" anchor="ctr">
+            <a:spAutoFit/>
+          </a:bodyPr>
+          <a:lstStyle/>
+          <a:p>
+            <a:pPr algn="l"/>
+            <a:r>
+              <a:rPr sz="1400" b="0" i="0">
+                <a:solidFill>
+                  <a:srgbClr val="252B33"/>
+                </a:solidFill>
+                <a:latin typeface="Calibri"/>
+              </a:rPr>
+              <a:t>Degree immunization</a:t>
+            </a:r>
+          </a:p>
+        </p:txBody>
+      </p:sp>
+      <p:sp>
+        <p:nvSpPr>
+          <p:cNvPr id="20" name="Rectangle 19"/>
+          <p:cNvSpPr/>
+          <p:nvPr/>
+        </p:nvSpPr>
+        <p:spPr>
+          <a:xfrm>
+            <a:off x="7755716" y="2697480"/>
+            <a:ext cx="1890405" cy="457200"/>
+          </a:xfrm>
+          <a:prstGeom prst="rect">
+            <a:avLst/>
+          </a:prstGeom>
+          <a:solidFill>
+            <a:srgbClr val="FFFFFF"/>
+          </a:solidFill>
+          <a:ln w="12700">
+            <a:solidFill>
+              <a:srgbClr val="D9E0E8"/>
+            </a:solidFill>
+          </a:ln>
+          <a:effectLst/>
+        </p:spPr>
+        <p:style>
+          <a:lnRef idx="1">
+            <a:schemeClr val="accent1"/>
+          </a:lnRef>
+          <a:fillRef idx="3">
+            <a:schemeClr val="accent1"/>
+          </a:fillRef>
+          <a:effectRef idx="2">
+            <a:schemeClr val="accent1"/>
+          </a:effectRef>
+          <a:fontRef idx="minor">
+            <a:schemeClr val="lt1"/>
+          </a:fontRef>
+        </p:style>
+        <p:txBody>
+          <a:bodyPr rtlCol="0" anchor="ctr"/>
+          <a:lstStyle/>
+          <a:p>
+            <a:pPr algn="ctr"/>
+          </a:p>
+        </p:txBody>
+      </p:sp>
+      <p:sp>
+        <p:nvSpPr>
+          <p:cNvPr id="21" name="TextBox 20"/>
+          <p:cNvSpPr txBox="1"/>
+          <p:nvPr/>
+        </p:nvSpPr>
+        <p:spPr>
+          <a:xfrm>
+            <a:off x="7865444" y="2697480"/>
+            <a:ext cx="1689237" cy="457200"/>
+          </a:xfrm>
+          <a:prstGeom prst="rect">
+            <a:avLst/>
+          </a:prstGeom>
+          <a:noFill/>
+        </p:spPr>
+        <p:txBody>
+          <a:bodyPr wrap="square" anchor="ctr">
+            <a:spAutoFit/>
+          </a:bodyPr>
+          <a:lstStyle/>
+          <a:p>
+            <a:pPr algn="ctr"/>
+            <a:r>
+              <a:rPr sz="1400" b="0" i="0">
+                <a:solidFill>
+                  <a:srgbClr val="252B33"/>
+                </a:solidFill>
+                <a:latin typeface="Calibri"/>
+              </a:rPr>
+              <a:t>18.8%</a:t>
+            </a:r>
+          </a:p>
+        </p:txBody>
+      </p:sp>
+      <p:sp>
+        <p:nvSpPr>
+          <p:cNvPr id="22" name="Rectangle 21"/>
+          <p:cNvSpPr/>
+          <p:nvPr/>
+        </p:nvSpPr>
+        <p:spPr>
+          <a:xfrm>
+            <a:off x="9646121" y="2697480"/>
+            <a:ext cx="1890405" cy="457200"/>
+          </a:xfrm>
+          <a:prstGeom prst="rect">
+            <a:avLst/>
+          </a:prstGeom>
+          <a:solidFill>
+            <a:srgbClr val="FFFFFF"/>
+          </a:solidFill>
+          <a:ln w="12700">
+            <a:solidFill>
+              <a:srgbClr val="D9E0E8"/>
+            </a:solidFill>
+          </a:ln>
+          <a:effectLst/>
+        </p:spPr>
+        <p:style>
+          <a:lnRef idx="1">
+            <a:schemeClr val="accent1"/>
+          </a:lnRef>
+          <a:fillRef idx="3">
+            <a:schemeClr val="accent1"/>
+          </a:fillRef>
+          <a:effectRef idx="2">
+            <a:schemeClr val="accent1"/>
+          </a:effectRef>
+          <a:fontRef idx="minor">
+            <a:schemeClr val="lt1"/>
+          </a:fontRef>
+        </p:style>
+        <p:txBody>
+          <a:bodyPr rtlCol="0" anchor="ctr"/>
+          <a:lstStyle/>
+          <a:p>
+            <a:pPr algn="ctr"/>
+          </a:p>
+        </p:txBody>
+      </p:sp>
+      <p:sp>
+        <p:nvSpPr>
+          <p:cNvPr id="23" name="TextBox 22"/>
+          <p:cNvSpPr txBox="1"/>
+          <p:nvPr/>
+        </p:nvSpPr>
+        <p:spPr>
+          <a:xfrm>
+            <a:off x="9755849" y="2697480"/>
+            <a:ext cx="1689237" cy="457200"/>
+          </a:xfrm>
+          <a:prstGeom prst="rect">
+            <a:avLst/>
+          </a:prstGeom>
+          <a:noFill/>
+        </p:spPr>
+        <p:txBody>
+          <a:bodyPr wrap="square" anchor="ctr">
+            <a:spAutoFit/>
+          </a:bodyPr>
+          <a:lstStyle/>
+          <a:p>
+            <a:pPr algn="ctr"/>
+            <a:r>
+              <a:rPr sz="1400" b="0" i="0">
+                <a:solidFill>
+                  <a:srgbClr val="252B33"/>
+                </a:solidFill>
+                <a:latin typeface="Calibri"/>
+              </a:rPr>
+              <a:t>92.2%</a:t>
+            </a:r>
+          </a:p>
+        </p:txBody>
+      </p:sp>
+      <p:sp>
+        <p:nvSpPr>
+          <p:cNvPr id="24" name="Rectangle 23"/>
+          <p:cNvSpPr/>
+          <p:nvPr/>
+        </p:nvSpPr>
+        <p:spPr>
+          <a:xfrm>
+            <a:off x="655167" y="3154680"/>
+            <a:ext cx="7100548" cy="457200"/>
+          </a:xfrm>
+          <a:prstGeom prst="rect">
+            <a:avLst/>
+          </a:prstGeom>
+          <a:solidFill>
+            <a:srgbClr val="F3F6FA"/>
+          </a:solidFill>
+          <a:ln w="12700">
+            <a:solidFill>
+              <a:srgbClr val="D9E0E8"/>
+            </a:solidFill>
+          </a:ln>
+          <a:effectLst/>
+        </p:spPr>
+        <p:style>
+          <a:lnRef idx="1">
+            <a:schemeClr val="accent1"/>
+          </a:lnRef>
+          <a:fillRef idx="3">
+            <a:schemeClr val="accent1"/>
+          </a:fillRef>
+          <a:effectRef idx="2">
+            <a:schemeClr val="accent1"/>
+          </a:effectRef>
+          <a:fontRef idx="minor">
+            <a:schemeClr val="lt1"/>
+          </a:fontRef>
+        </p:style>
+        <p:txBody>
+          <a:bodyPr rtlCol="0" anchor="ctr"/>
+          <a:lstStyle/>
+          <a:p>
+            <a:pPr algn="ctr"/>
+          </a:p>
+        </p:txBody>
+      </p:sp>
+      <p:sp>
+        <p:nvSpPr>
+          <p:cNvPr id="25" name="TextBox 24"/>
+          <p:cNvSpPr txBox="1"/>
+          <p:nvPr/>
+        </p:nvSpPr>
+        <p:spPr>
+          <a:xfrm>
+            <a:off x="764895" y="3154680"/>
+            <a:ext cx="6899380" cy="457200"/>
+          </a:xfrm>
+          <a:prstGeom prst="rect">
+            <a:avLst/>
+          </a:prstGeom>
+          <a:noFill/>
+        </p:spPr>
+        <p:txBody>
+          <a:bodyPr wrap="square" anchor="ctr">
+            <a:spAutoFit/>
+          </a:bodyPr>
+          <a:lstStyle/>
+          <a:p>
+            <a:pPr algn="l"/>
+            <a:r>
+              <a:rPr sz="1400" b="0" i="0">
+                <a:solidFill>
+                  <a:srgbClr val="252B33"/>
+                </a:solidFill>
+                <a:latin typeface="Calibri"/>
+              </a:rPr>
+              <a:t>Betweenness (best structural)</a:t>
+            </a:r>
+          </a:p>
+        </p:txBody>
+      </p:sp>
+      <p:sp>
+        <p:nvSpPr>
+          <p:cNvPr id="26" name="Rectangle 25"/>
+          <p:cNvSpPr/>
+          <p:nvPr/>
+        </p:nvSpPr>
+        <p:spPr>
+          <a:xfrm>
+            <a:off x="7755716" y="3154680"/>
+            <a:ext cx="1890405" cy="457200"/>
+          </a:xfrm>
+          <a:prstGeom prst="rect">
+            <a:avLst/>
+          </a:prstGeom>
+          <a:solidFill>
+            <a:srgbClr val="F3F6FA"/>
+          </a:solidFill>
+          <a:ln w="12700">
+            <a:solidFill>
+              <a:srgbClr val="D9E0E8"/>
+            </a:solidFill>
+          </a:ln>
+          <a:effectLst/>
+        </p:spPr>
+        <p:style>
+          <a:lnRef idx="1">
+            <a:schemeClr val="accent1"/>
+          </a:lnRef>
+          <a:fillRef idx="3">
+            <a:schemeClr val="accent1"/>
+          </a:fillRef>
+          <a:effectRef idx="2">
+            <a:schemeClr val="accent1"/>
+          </a:effectRef>
+          <a:fontRef idx="minor">
+            <a:schemeClr val="lt1"/>
+          </a:fontRef>
+        </p:style>
+        <p:txBody>
+          <a:bodyPr rtlCol="0" anchor="ctr"/>
+          <a:lstStyle/>
+          <a:p>
+            <a:pPr algn="ctr"/>
+          </a:p>
+        </p:txBody>
+      </p:sp>
+      <p:sp>
+        <p:nvSpPr>
+          <p:cNvPr id="27" name="TextBox 26"/>
+          <p:cNvSpPr txBox="1"/>
+          <p:nvPr/>
+        </p:nvSpPr>
+        <p:spPr>
+          <a:xfrm>
+            <a:off x="7865444" y="3154680"/>
+            <a:ext cx="1689237" cy="457200"/>
+          </a:xfrm>
+          <a:prstGeom prst="rect">
+            <a:avLst/>
+          </a:prstGeom>
+          <a:noFill/>
+        </p:spPr>
+        <p:txBody>
+          <a:bodyPr wrap="square" anchor="ctr">
+            <a:spAutoFit/>
+          </a:bodyPr>
+          <a:lstStyle/>
+          <a:p>
+            <a:pPr algn="ctr"/>
+            <a:r>
+              <a:rPr sz="1400" b="0" i="0">
+                <a:solidFill>
+                  <a:srgbClr val="252B33"/>
+                </a:solidFill>
+                <a:latin typeface="Calibri"/>
+              </a:rPr>
+              <a:t>17.6%</a:t>
+            </a:r>
+          </a:p>
+        </p:txBody>
+      </p:sp>
+      <p:sp>
+        <p:nvSpPr>
+          <p:cNvPr id="28" name="Rectangle 27"/>
+          <p:cNvSpPr/>
+          <p:nvPr/>
+        </p:nvSpPr>
+        <p:spPr>
+          <a:xfrm>
+            <a:off x="9646121" y="3154680"/>
+            <a:ext cx="1890405" cy="457200"/>
+          </a:xfrm>
+          <a:prstGeom prst="rect">
+            <a:avLst/>
+          </a:prstGeom>
+          <a:solidFill>
+            <a:srgbClr val="F3F6FA"/>
+          </a:solidFill>
+          <a:ln w="12700">
+            <a:solidFill>
+              <a:srgbClr val="D9E0E8"/>
+            </a:solidFill>
+          </a:ln>
+          <a:effectLst/>
+        </p:spPr>
+        <p:style>
+          <a:lnRef idx="1">
+            <a:schemeClr val="accent1"/>
+          </a:lnRef>
+          <a:fillRef idx="3">
+            <a:schemeClr val="accent1"/>
+          </a:fillRef>
+          <a:effectRef idx="2">
+            <a:schemeClr val="accent1"/>
+          </a:effectRef>
+          <a:fontRef idx="minor">
+            <a:schemeClr val="lt1"/>
+          </a:fontRef>
+        </p:style>
+        <p:txBody>
+          <a:bodyPr rtlCol="0" anchor="ctr"/>
+          <a:lstStyle/>
+          <a:p>
+            <a:pPr algn="ctr"/>
+          </a:p>
+        </p:txBody>
+      </p:sp>
+      <p:sp>
+        <p:nvSpPr>
+          <p:cNvPr id="29" name="TextBox 28"/>
+          <p:cNvSpPr txBox="1"/>
+          <p:nvPr/>
+        </p:nvSpPr>
+        <p:spPr>
+          <a:xfrm>
+            <a:off x="9755849" y="3154680"/>
+            <a:ext cx="1689237" cy="457200"/>
+          </a:xfrm>
+          <a:prstGeom prst="rect">
+            <a:avLst/>
+          </a:prstGeom>
+          <a:noFill/>
+        </p:spPr>
+        <p:txBody>
+          <a:bodyPr wrap="square" anchor="ctr">
+            <a:spAutoFit/>
+          </a:bodyPr>
+          <a:lstStyle/>
+          <a:p>
+            <a:pPr algn="ctr"/>
+            <a:r>
+              <a:rPr sz="1400" b="0" i="0">
+                <a:solidFill>
+                  <a:srgbClr val="252B33"/>
+                </a:solidFill>
+                <a:latin typeface="Calibri"/>
+              </a:rPr>
+              <a:t>92.5%</a:t>
+            </a:r>
+          </a:p>
+        </p:txBody>
+      </p:sp>
+      <p:sp>
+        <p:nvSpPr>
+          <p:cNvPr id="30" name="Rectangle 29"/>
+          <p:cNvSpPr/>
+          <p:nvPr/>
+        </p:nvSpPr>
+        <p:spPr>
+          <a:xfrm>
+            <a:off x="655167" y="3611880"/>
+            <a:ext cx="7100548" cy="457200"/>
+          </a:xfrm>
+          <a:prstGeom prst="rect">
+            <a:avLst/>
+          </a:prstGeom>
+          <a:solidFill>
+            <a:srgbClr val="E3F1E8"/>
+          </a:solidFill>
+          <a:ln w="12700">
+            <a:solidFill>
+              <a:srgbClr val="D9E0E8"/>
+            </a:solidFill>
+          </a:ln>
+          <a:effectLst/>
+        </p:spPr>
+        <p:style>
+          <a:lnRef idx="1">
+            <a:schemeClr val="accent1"/>
+          </a:lnRef>
+          <a:fillRef idx="3">
+            <a:schemeClr val="accent1"/>
+          </a:fillRef>
+          <a:effectRef idx="2">
+            <a:schemeClr val="accent1"/>
+          </a:effectRef>
+          <a:fontRef idx="minor">
+            <a:schemeClr val="lt1"/>
+          </a:fontRef>
+        </p:style>
+        <p:txBody>
+          <a:bodyPr rtlCol="0" anchor="ctr"/>
+          <a:lstStyle/>
+          <a:p>
+            <a:pPr algn="ctr"/>
+          </a:p>
+        </p:txBody>
+      </p:sp>
+      <p:sp>
+        <p:nvSpPr>
+          <p:cNvPr id="31" name="TextBox 30"/>
+          <p:cNvSpPr txBox="1"/>
+          <p:nvPr/>
+        </p:nvSpPr>
+        <p:spPr>
+          <a:xfrm>
+            <a:off x="764895" y="3611880"/>
+            <a:ext cx="6899380" cy="457200"/>
+          </a:xfrm>
+          <a:prstGeom prst="rect">
+            <a:avLst/>
+          </a:prstGeom>
+          <a:noFill/>
+        </p:spPr>
+        <p:txBody>
+          <a:bodyPr wrap="square" anchor="ctr">
+            <a:spAutoFit/>
+          </a:bodyPr>
+          <a:lstStyle/>
+          <a:p>
+            <a:pPr algn="l"/>
+            <a:r>
+              <a:rPr sz="1400" b="1" i="0">
+                <a:solidFill>
+                  <a:srgbClr val="1B7F4B"/>
+                </a:solidFill>
+                <a:latin typeface="Calibri"/>
+              </a:rPr>
+              <a:t>SERUM — content-aware (ours)</a:t>
+            </a:r>
+          </a:p>
+        </p:txBody>
+      </p:sp>
+      <p:sp>
+        <p:nvSpPr>
+          <p:cNvPr id="32" name="Rectangle 31"/>
+          <p:cNvSpPr/>
+          <p:nvPr/>
+        </p:nvSpPr>
+        <p:spPr>
+          <a:xfrm>
+            <a:off x="7755716" y="3611880"/>
+            <a:ext cx="1890405" cy="457200"/>
+          </a:xfrm>
+          <a:prstGeom prst="rect">
+            <a:avLst/>
+          </a:prstGeom>
+          <a:solidFill>
+            <a:srgbClr val="E3F1E8"/>
+          </a:solidFill>
+          <a:ln w="12700">
+            <a:solidFill>
+              <a:srgbClr val="D9E0E8"/>
+            </a:solidFill>
+          </a:ln>
+          <a:effectLst/>
+        </p:spPr>
+        <p:style>
+          <a:lnRef idx="1">
+            <a:schemeClr val="accent1"/>
+          </a:lnRef>
+          <a:fillRef idx="3">
+            <a:schemeClr val="accent1"/>
+          </a:fillRef>
+          <a:effectRef idx="2">
+            <a:schemeClr val="accent1"/>
+          </a:effectRef>
+          <a:fontRef idx="minor">
+            <a:schemeClr val="lt1"/>
+          </a:fontRef>
+        </p:style>
+        <p:txBody>
+          <a:bodyPr rtlCol="0" anchor="ctr"/>
+          <a:lstStyle/>
+          <a:p>
+            <a:pPr algn="ctr"/>
+          </a:p>
+        </p:txBody>
+      </p:sp>
+      <p:sp>
+        <p:nvSpPr>
+          <p:cNvPr id="33" name="TextBox 32"/>
+          <p:cNvSpPr txBox="1"/>
+          <p:nvPr/>
+        </p:nvSpPr>
+        <p:spPr>
+          <a:xfrm>
+            <a:off x="7865444" y="3611880"/>
+            <a:ext cx="1689237" cy="457200"/>
+          </a:xfrm>
+          <a:prstGeom prst="rect">
+            <a:avLst/>
+          </a:prstGeom>
+          <a:noFill/>
+        </p:spPr>
+        <p:txBody>
+          <a:bodyPr wrap="square" anchor="ctr">
+            <a:spAutoFit/>
+          </a:bodyPr>
+          <a:lstStyle/>
+          <a:p>
+            <a:pPr algn="ctr"/>
+            <a:r>
+              <a:rPr sz="1400" b="1" i="0">
+                <a:solidFill>
+                  <a:srgbClr val="1B7F4B"/>
+                </a:solidFill>
+                <a:latin typeface="Calibri"/>
+              </a:rPr>
+              <a:t>11.7%</a:t>
+            </a:r>
+          </a:p>
+        </p:txBody>
+      </p:sp>
+      <p:sp>
+        <p:nvSpPr>
+          <p:cNvPr id="34" name="Rectangle 33"/>
+          <p:cNvSpPr/>
+          <p:nvPr/>
+        </p:nvSpPr>
+        <p:spPr>
+          <a:xfrm>
+            <a:off x="9646121" y="3611880"/>
+            <a:ext cx="1890405" cy="457200"/>
+          </a:xfrm>
+          <a:prstGeom prst="rect">
+            <a:avLst/>
+          </a:prstGeom>
+          <a:solidFill>
+            <a:srgbClr val="E3F1E8"/>
+          </a:solidFill>
+          <a:ln w="12700">
+            <a:solidFill>
+              <a:srgbClr val="D9E0E8"/>
+            </a:solidFill>
+          </a:ln>
+          <a:effectLst/>
+        </p:spPr>
+        <p:style>
+          <a:lnRef idx="1">
+            <a:schemeClr val="accent1"/>
+          </a:lnRef>
+          <a:fillRef idx="3">
+            <a:schemeClr val="accent1"/>
+          </a:fillRef>
+          <a:effectRef idx="2">
+            <a:schemeClr val="accent1"/>
+          </a:effectRef>
+          <a:fontRef idx="minor">
+            <a:schemeClr val="lt1"/>
+          </a:fontRef>
+        </p:style>
+        <p:txBody>
+          <a:bodyPr rtlCol="0" anchor="ctr"/>
+          <a:lstStyle/>
+          <a:p>
+            <a:pPr algn="ctr"/>
+          </a:p>
+        </p:txBody>
+      </p:sp>
+      <p:sp>
+        <p:nvSpPr>
+          <p:cNvPr id="35" name="TextBox 34"/>
+          <p:cNvSpPr txBox="1"/>
+          <p:nvPr/>
+        </p:nvSpPr>
+        <p:spPr>
+          <a:xfrm>
+            <a:off x="9755849" y="3611880"/>
+            <a:ext cx="1689237" cy="457200"/>
+          </a:xfrm>
+          <a:prstGeom prst="rect">
+            <a:avLst/>
+          </a:prstGeom>
+          <a:noFill/>
+        </p:spPr>
+        <p:txBody>
+          <a:bodyPr wrap="square" anchor="ctr">
+            <a:spAutoFit/>
+          </a:bodyPr>
+          <a:lstStyle/>
+          <a:p>
+            <a:pPr algn="ctr"/>
+            <a:r>
+              <a:rPr sz="1400" b="1" i="0">
+                <a:solidFill>
+                  <a:srgbClr val="1B7F4B"/>
+                </a:solidFill>
+                <a:latin typeface="Calibri"/>
+              </a:rPr>
+              <a:t>97.5%</a:t>
+            </a:r>
+          </a:p>
+        </p:txBody>
+      </p:sp>
+      <p:sp>
+        <p:nvSpPr>
+          <p:cNvPr id="36" name="Rectangle 35"/>
+          <p:cNvSpPr/>
+          <p:nvPr/>
+        </p:nvSpPr>
+        <p:spPr>
+          <a:xfrm>
+            <a:off x="655167" y="4069080"/>
+            <a:ext cx="7100548" cy="457200"/>
+          </a:xfrm>
+          <a:prstGeom prst="rect">
+            <a:avLst/>
+          </a:prstGeom>
+          <a:solidFill>
+            <a:srgbClr val="F3F6FA"/>
+          </a:solidFill>
+          <a:ln w="12700">
+            <a:solidFill>
+              <a:srgbClr val="D9E0E8"/>
+            </a:solidFill>
+          </a:ln>
+          <a:effectLst/>
+        </p:spPr>
+        <p:style>
+          <a:lnRef idx="1">
+            <a:schemeClr val="accent1"/>
+          </a:lnRef>
+          <a:fillRef idx="3">
+            <a:schemeClr val="accent1"/>
+          </a:fillRef>
+          <a:effectRef idx="2">
+            <a:schemeClr val="accent1"/>
+          </a:effectRef>
+          <a:fontRef idx="minor">
+            <a:schemeClr val="lt1"/>
+          </a:fontRef>
+        </p:style>
+        <p:txBody>
+          <a:bodyPr rtlCol="0" anchor="ctr"/>
+          <a:lstStyle/>
+          <a:p>
+            <a:pPr algn="ctr"/>
+          </a:p>
+        </p:txBody>
+      </p:sp>
+      <p:sp>
+        <p:nvSpPr>
+          <p:cNvPr id="37" name="TextBox 36"/>
+          <p:cNvSpPr txBox="1"/>
+          <p:nvPr/>
+        </p:nvSpPr>
+        <p:spPr>
+          <a:xfrm>
+            <a:off x="764895" y="4069080"/>
+            <a:ext cx="6899380" cy="457200"/>
+          </a:xfrm>
+          <a:prstGeom prst="rect">
+            <a:avLst/>
+          </a:prstGeom>
+          <a:noFill/>
+        </p:spPr>
+        <p:txBody>
+          <a:bodyPr wrap="square" anchor="ctr">
+            <a:spAutoFit/>
+          </a:bodyPr>
+          <a:lstStyle/>
+          <a:p>
+            <a:pPr algn="l"/>
+            <a:r>
+              <a:rPr sz="1400" b="0" i="0">
+                <a:solidFill>
+                  <a:srgbClr val="252B33"/>
+                </a:solidFill>
+                <a:latin typeface="Calibri"/>
+              </a:rPr>
+              <a:t>Content-aware oracle (bound)</a:t>
+            </a:r>
+          </a:p>
+        </p:txBody>
+      </p:sp>
+      <p:sp>
+        <p:nvSpPr>
+          <p:cNvPr id="38" name="Rectangle 37"/>
+          <p:cNvSpPr/>
+          <p:nvPr/>
+        </p:nvSpPr>
+        <p:spPr>
+          <a:xfrm>
+            <a:off x="7755716" y="4069080"/>
+            <a:ext cx="1890405" cy="457200"/>
+          </a:xfrm>
+          <a:prstGeom prst="rect">
+            <a:avLst/>
+          </a:prstGeom>
+          <a:solidFill>
+            <a:srgbClr val="F3F6FA"/>
+          </a:solidFill>
+          <a:ln w="12700">
+            <a:solidFill>
+              <a:srgbClr val="D9E0E8"/>
+            </a:solidFill>
+          </a:ln>
+          <a:effectLst/>
+        </p:spPr>
+        <p:style>
+          <a:lnRef idx="1">
+            <a:schemeClr val="accent1"/>
+          </a:lnRef>
+          <a:fillRef idx="3">
+            <a:schemeClr val="accent1"/>
+          </a:fillRef>
+          <a:effectRef idx="2">
+            <a:schemeClr val="accent1"/>
+          </a:effectRef>
+          <a:fontRef idx="minor">
+            <a:schemeClr val="lt1"/>
+          </a:fontRef>
+        </p:style>
+        <p:txBody>
+          <a:bodyPr rtlCol="0" anchor="ctr"/>
+          <a:lstStyle/>
+          <a:p>
+            <a:pPr algn="ctr"/>
+          </a:p>
+        </p:txBody>
+      </p:sp>
+      <p:sp>
+        <p:nvSpPr>
+          <p:cNvPr id="39" name="TextBox 38"/>
+          <p:cNvSpPr txBox="1"/>
+          <p:nvPr/>
+        </p:nvSpPr>
+        <p:spPr>
+          <a:xfrm>
+            <a:off x="7865444" y="4069080"/>
+            <a:ext cx="1689237" cy="457200"/>
+          </a:xfrm>
+          <a:prstGeom prst="rect">
+            <a:avLst/>
+          </a:prstGeom>
+          <a:noFill/>
+        </p:spPr>
+        <p:txBody>
+          <a:bodyPr wrap="square" anchor="ctr">
+            <a:spAutoFit/>
+          </a:bodyPr>
+          <a:lstStyle/>
+          <a:p>
+            <a:pPr algn="ctr"/>
+            <a:r>
+              <a:rPr sz="1400" b="0" i="0">
+                <a:solidFill>
+                  <a:srgbClr val="252B33"/>
+                </a:solidFill>
+                <a:latin typeface="Calibri"/>
+              </a:rPr>
+              <a:t>9.1%</a:t>
+            </a:r>
+          </a:p>
+        </p:txBody>
+      </p:sp>
+      <p:sp>
+        <p:nvSpPr>
+          <p:cNvPr id="40" name="Rectangle 39"/>
+          <p:cNvSpPr/>
+          <p:nvPr/>
+        </p:nvSpPr>
+        <p:spPr>
+          <a:xfrm>
+            <a:off x="9646121" y="4069080"/>
+            <a:ext cx="1890405" cy="457200"/>
+          </a:xfrm>
+          <a:prstGeom prst="rect">
+            <a:avLst/>
+          </a:prstGeom>
+          <a:solidFill>
+            <a:srgbClr val="F3F6FA"/>
+          </a:solidFill>
+          <a:ln w="12700">
+            <a:solidFill>
+              <a:srgbClr val="D9E0E8"/>
+            </a:solidFill>
+          </a:ln>
+          <a:effectLst/>
+        </p:spPr>
+        <p:style>
+          <a:lnRef idx="1">
+            <a:schemeClr val="accent1"/>
+          </a:lnRef>
+          <a:fillRef idx="3">
+            <a:schemeClr val="accent1"/>
+          </a:fillRef>
+          <a:effectRef idx="2">
+            <a:schemeClr val="accent1"/>
+          </a:effectRef>
+          <a:fontRef idx="minor">
+            <a:schemeClr val="lt1"/>
+          </a:fontRef>
+        </p:style>
+        <p:txBody>
+          <a:bodyPr rtlCol="0" anchor="ctr"/>
+          <a:lstStyle/>
+          <a:p>
+            <a:pPr algn="ctr"/>
+          </a:p>
+        </p:txBody>
+      </p:sp>
+      <p:sp>
+        <p:nvSpPr>
+          <p:cNvPr id="41" name="TextBox 40"/>
+          <p:cNvSpPr txBox="1"/>
+          <p:nvPr/>
+        </p:nvSpPr>
+        <p:spPr>
+          <a:xfrm>
+            <a:off x="9755849" y="4069080"/>
+            <a:ext cx="1689237" cy="457200"/>
+          </a:xfrm>
+          <a:prstGeom prst="rect">
+            <a:avLst/>
+          </a:prstGeom>
+          <a:noFill/>
+        </p:spPr>
+        <p:txBody>
+          <a:bodyPr wrap="square" anchor="ctr">
+            <a:spAutoFit/>
+          </a:bodyPr>
+          <a:lstStyle/>
+          <a:p>
+            <a:pPr algn="ctr"/>
+            <a:r>
+              <a:rPr sz="1400" b="0" i="0">
+                <a:solidFill>
+                  <a:srgbClr val="252B33"/>
+                </a:solidFill>
+                <a:latin typeface="Calibri"/>
+              </a:rPr>
+              <a:t>100%</a:t>
+            </a:r>
+          </a:p>
+        </p:txBody>
+      </p:sp>
+      <p:sp>
+        <p:nvSpPr>
+          <p:cNvPr id="42" name="Rectangle 41"/>
+          <p:cNvSpPr/>
+          <p:nvPr/>
+        </p:nvSpPr>
+        <p:spPr>
+          <a:xfrm>
+            <a:off x="640080" y="4727448"/>
+            <a:ext cx="10881360" cy="1097280"/>
           </a:xfrm>
           <a:prstGeom prst="rect">
             <a:avLst/>
@@ -16325,14 +18490,14 @@
       </p:sp>
       <p:sp>
         <p:nvSpPr>
-          <p:cNvPr id="8" name="TextBox 7"/>
+          <p:cNvPr id="43" name="TextBox 42"/>
           <p:cNvSpPr txBox="1"/>
           <p:nvPr/>
         </p:nvSpPr>
         <p:spPr>
           <a:xfrm>
             <a:off x="868680" y="4800600"/>
-            <a:ext cx="10424160" cy="1005840"/>
+            <a:ext cx="10424160" cy="932688"/>
           </a:xfrm>
           <a:prstGeom prst="rect">
             <a:avLst/>
@@ -17743,315 +19908,988 @@
           </a:p>
         </p:txBody>
       </p:sp>
-      <p:graphicFrame>
-        <p:nvGraphicFramePr>
-          <p:cNvPr id="6" name="Table 5"/>
-          <p:cNvGraphicFramePr>
-            <a:graphicFrameLocks noGrp="1"/>
-          </p:cNvGraphicFramePr>
-          <p:nvPr/>
-        </p:nvGraphicFramePr>
-        <p:xfrm>
-          <a:off x="655167" y="1783080"/>
-          <a:ext cx="10881360" cy="1828800"/>
-        </p:xfrm>
-        <a:graphic>
-          <a:graphicData uri="http://schemas.openxmlformats.org/drawingml/2006/table">
-            <a:tbl>
-              <a:tblPr firstRow="1" bandRow="1">
-                <a:tableStyleId>{5C22544A-7EE6-4342-B048-85BDC9FD1C3A}</a:tableStyleId>
-              </a:tblPr>
-              <a:tblGrid>
-                <a:gridCol w="6400800"/>
-                <a:gridCol w="1828800"/>
-                <a:gridCol w="2651760"/>
-              </a:tblGrid>
-              <a:tr h="457200">
-                <a:tc>
-                  <a:txBody>
-                    <a:bodyPr/>
-                    <a:lstStyle/>
-                    <a:p>
-                      <a:pPr algn="l"/>
-                      <a:r>
-                        <a:rPr sz="1500" b="1">
-                          <a:solidFill>
-                            <a:srgbClr val="FFFFFF"/>
-                          </a:solidFill>
-                        </a:rPr>
-                        <a:t>Defender (of this class)</a:t>
-                      </a:r>
-                    </a:p>
-                  </a:txBody>
-                  <a:tcPr>
-                    <a:solidFill>
-                      <a:srgbClr val="1F355E"/>
-                    </a:solidFill>
-                  </a:tcPr>
-                </a:tc>
-                <a:tc>
-                  <a:txBody>
-                    <a:bodyPr/>
-                    <a:lstStyle/>
-                    <a:p>
-                      <a:pPr algn="ctr"/>
-                      <a:r>
-                        <a:rPr sz="1500" b="1">
-                          <a:solidFill>
-                            <a:srgbClr val="FFFFFF"/>
-                          </a:solidFill>
-                        </a:rPr>
-                        <a:t>Infected ↓</a:t>
-                      </a:r>
-                    </a:p>
-                  </a:txBody>
-                  <a:tcPr>
-                    <a:solidFill>
-                      <a:srgbClr val="1F355E"/>
-                    </a:solidFill>
-                  </a:tcPr>
-                </a:tc>
-                <a:tc>
-                  <a:txBody>
-                    <a:bodyPr/>
-                    <a:lstStyle/>
-                    <a:p>
-                      <a:pPr algn="ctr"/>
-                      <a:r>
-                        <a:rPr sz="1500" b="1">
-                          <a:solidFill>
-                            <a:srgbClr val="FFFFFF"/>
-                          </a:solidFill>
-                        </a:rPr>
-                        <a:t>vs ours</a:t>
-                      </a:r>
-                    </a:p>
-                  </a:txBody>
-                  <a:tcPr>
-                    <a:solidFill>
-                      <a:srgbClr val="1F355E"/>
-                    </a:solidFill>
-                  </a:tcPr>
-                </a:tc>
-              </a:tr>
-              <a:tr h="457200">
-                <a:tc>
-                  <a:txBody>
-                    <a:bodyPr/>
-                    <a:lstStyle/>
-                    <a:p>
-                      <a:pPr algn="l"/>
-                      <a:r>
-                        <a:rPr sz="1400" b="0">
-                          <a:solidFill>
-                            <a:srgbClr val="252B33"/>
-                          </a:solidFill>
-                        </a:rPr>
-                        <a:t>DAVA-style — data-aware but exploit-blind</a:t>
-                      </a:r>
-                    </a:p>
-                  </a:txBody>
-                  <a:tcPr>
-                    <a:solidFill>
-                      <a:srgbClr val="F3F6FA"/>
-                    </a:solidFill>
-                  </a:tcPr>
-                </a:tc>
-                <a:tc>
-                  <a:txBody>
-                    <a:bodyPr/>
-                    <a:lstStyle/>
-                    <a:p>
-                      <a:pPr algn="ctr"/>
-                      <a:r>
-                        <a:rPr sz="1400" b="0">
-                          <a:solidFill>
-                            <a:srgbClr val="252B33"/>
-                          </a:solidFill>
-                        </a:rPr>
-                        <a:t>1.70%</a:t>
-                      </a:r>
-                    </a:p>
-                  </a:txBody>
-                  <a:tcPr>
-                    <a:solidFill>
-                      <a:srgbClr val="F3F6FA"/>
-                    </a:solidFill>
-                  </a:tcPr>
-                </a:tc>
-                <a:tc>
-                  <a:txBody>
-                    <a:bodyPr/>
-                    <a:lstStyle/>
-                    <a:p>
-                      <a:pPr algn="ctr"/>
-                      <a:r>
-                        <a:rPr sz="1400" b="0">
-                          <a:solidFill>
-                            <a:srgbClr val="252B33"/>
-                          </a:solidFill>
-                        </a:rPr>
-                        <a:t>+43.8%  ·  p=2.8×10⁻⁴</a:t>
-                      </a:r>
-                    </a:p>
-                  </a:txBody>
-                  <a:tcPr>
-                    <a:solidFill>
-                      <a:srgbClr val="F3F6FA"/>
-                    </a:solidFill>
-                  </a:tcPr>
-                </a:tc>
-              </a:tr>
-              <a:tr h="457200">
-                <a:tc>
-                  <a:txBody>
-                    <a:bodyPr/>
-                    <a:lstStyle/>
-                    <a:p>
-                      <a:pPr algn="l"/>
-                      <a:r>
-                        <a:rPr sz="1400" b="0">
-                          <a:solidFill>
-                            <a:srgbClr val="252B33"/>
-                          </a:solidFill>
-                        </a:rPr>
-                        <a:t>CyGym-style — static prior, no online update</a:t>
-                      </a:r>
-                    </a:p>
-                  </a:txBody>
-                  <a:tcPr>
-                    <a:solidFill>
-                      <a:srgbClr val="FFFFFF"/>
-                    </a:solidFill>
-                  </a:tcPr>
-                </a:tc>
-                <a:tc>
-                  <a:txBody>
-                    <a:bodyPr/>
-                    <a:lstStyle/>
-                    <a:p>
-                      <a:pPr algn="ctr"/>
-                      <a:r>
-                        <a:rPr sz="1400" b="0">
-                          <a:solidFill>
-                            <a:srgbClr val="252B33"/>
-                          </a:solidFill>
-                        </a:rPr>
-                        <a:t>1.15%</a:t>
-                      </a:r>
-                    </a:p>
-                  </a:txBody>
-                  <a:tcPr>
-                    <a:solidFill>
-                      <a:srgbClr val="FFFFFF"/>
-                    </a:solidFill>
-                  </a:tcPr>
-                </a:tc>
-                <a:tc>
-                  <a:txBody>
-                    <a:bodyPr/>
-                    <a:lstStyle/>
-                    <a:p>
-                      <a:pPr algn="ctr"/>
-                      <a:r>
-                        <a:rPr sz="1400" b="0">
-                          <a:solidFill>
-                            <a:srgbClr val="252B33"/>
-                          </a:solidFill>
-                        </a:rPr>
-                        <a:t>+16.6%  ·  p=1.1×10⁻²</a:t>
-                      </a:r>
-                    </a:p>
-                  </a:txBody>
-                  <a:tcPr>
-                    <a:solidFill>
-                      <a:srgbClr val="FFFFFF"/>
-                    </a:solidFill>
-                  </a:tcPr>
-                </a:tc>
-              </a:tr>
-              <a:tr h="457200">
-                <a:tc>
-                  <a:txBody>
-                    <a:bodyPr/>
-                    <a:lstStyle/>
-                    <a:p>
-                      <a:pPr algn="l"/>
-                      <a:r>
-                        <a:rPr sz="1400" b="1">
-                          <a:solidFill>
-                            <a:srgbClr val="1B7F4B"/>
-                          </a:solidFill>
-                        </a:rPr>
-                        <a:t>SERUM — content-aware (ours)</a:t>
-                      </a:r>
-                    </a:p>
-                  </a:txBody>
-                  <a:tcPr>
-                    <a:solidFill>
-                      <a:srgbClr val="E3F1E8"/>
-                    </a:solidFill>
-                  </a:tcPr>
-                </a:tc>
-                <a:tc>
-                  <a:txBody>
-                    <a:bodyPr/>
-                    <a:lstStyle/>
-                    <a:p>
-                      <a:pPr algn="ctr"/>
-                      <a:r>
-                        <a:rPr sz="1400" b="1">
-                          <a:solidFill>
-                            <a:srgbClr val="1B7F4B"/>
-                          </a:solidFill>
-                        </a:rPr>
-                        <a:t>0.95%</a:t>
-                      </a:r>
-                    </a:p>
-                  </a:txBody>
-                  <a:tcPr>
-                    <a:solidFill>
-                      <a:srgbClr val="E3F1E8"/>
-                    </a:solidFill>
-                  </a:tcPr>
-                </a:tc>
-                <a:tc>
-                  <a:txBody>
-                    <a:bodyPr/>
-                    <a:lstStyle/>
-                    <a:p>
-                      <a:pPr algn="ctr"/>
-                      <a:r>
-                        <a:rPr sz="1400" b="1">
-                          <a:solidFill>
-                            <a:srgbClr val="1B7F4B"/>
-                          </a:solidFill>
-                        </a:rPr>
-                        <a:t>—</a:t>
-                      </a:r>
-                    </a:p>
-                  </a:txBody>
-                  <a:tcPr>
-                    <a:solidFill>
-                      <a:srgbClr val="E3F1E8"/>
-                    </a:solidFill>
-                  </a:tcPr>
-                </a:tc>
-              </a:tr>
-            </a:tbl>
-          </a:graphicData>
-        </a:graphic>
-      </p:graphicFrame>
-      <p:sp>
-        <p:nvSpPr>
-          <p:cNvPr id="7" name="Rectangle 6"/>
+      <p:sp>
+        <p:nvSpPr>
+          <p:cNvPr id="6" name="Rectangle 5"/>
           <p:cNvSpPr/>
           <p:nvPr/>
         </p:nvSpPr>
         <p:spPr>
           <a:xfrm>
-            <a:off x="640080" y="3794760"/>
-            <a:ext cx="10881360" cy="1143000"/>
+            <a:off x="655167" y="1783080"/>
+            <a:ext cx="6400800" cy="457200"/>
+          </a:xfrm>
+          <a:prstGeom prst="rect">
+            <a:avLst/>
+          </a:prstGeom>
+          <a:solidFill>
+            <a:srgbClr val="1F355E"/>
+          </a:solidFill>
+          <a:ln w="12700">
+            <a:solidFill>
+              <a:srgbClr val="D9E0E8"/>
+            </a:solidFill>
+          </a:ln>
+          <a:effectLst/>
+        </p:spPr>
+        <p:style>
+          <a:lnRef idx="1">
+            <a:schemeClr val="accent1"/>
+          </a:lnRef>
+          <a:fillRef idx="3">
+            <a:schemeClr val="accent1"/>
+          </a:fillRef>
+          <a:effectRef idx="2">
+            <a:schemeClr val="accent1"/>
+          </a:effectRef>
+          <a:fontRef idx="minor">
+            <a:schemeClr val="lt1"/>
+          </a:fontRef>
+        </p:style>
+        <p:txBody>
+          <a:bodyPr rtlCol="0" anchor="ctr"/>
+          <a:lstStyle/>
+          <a:p>
+            <a:pPr algn="ctr"/>
+          </a:p>
+        </p:txBody>
+      </p:sp>
+      <p:sp>
+        <p:nvSpPr>
+          <p:cNvPr id="7" name="TextBox 6"/>
+          <p:cNvSpPr txBox="1"/>
+          <p:nvPr/>
+        </p:nvSpPr>
+        <p:spPr>
+          <a:xfrm>
+            <a:off x="764895" y="1783080"/>
+            <a:ext cx="6199632" cy="457200"/>
+          </a:xfrm>
+          <a:prstGeom prst="rect">
+            <a:avLst/>
+          </a:prstGeom>
+          <a:noFill/>
+        </p:spPr>
+        <p:txBody>
+          <a:bodyPr wrap="square" anchor="ctr">
+            <a:spAutoFit/>
+          </a:bodyPr>
+          <a:lstStyle/>
+          <a:p>
+            <a:pPr algn="l"/>
+            <a:r>
+              <a:rPr sz="1400" b="1" i="0">
+                <a:solidFill>
+                  <a:srgbClr val="FFFFFF"/>
+                </a:solidFill>
+                <a:latin typeface="Calibri"/>
+              </a:rPr>
+              <a:t>Defender (of this class)</a:t>
+            </a:r>
+          </a:p>
+        </p:txBody>
+      </p:sp>
+      <p:sp>
+        <p:nvSpPr>
+          <p:cNvPr id="8" name="Rectangle 7"/>
+          <p:cNvSpPr/>
+          <p:nvPr/>
+        </p:nvSpPr>
+        <p:spPr>
+          <a:xfrm>
+            <a:off x="7055967" y="1783080"/>
+            <a:ext cx="1828800" cy="457200"/>
+          </a:xfrm>
+          <a:prstGeom prst="rect">
+            <a:avLst/>
+          </a:prstGeom>
+          <a:solidFill>
+            <a:srgbClr val="1F355E"/>
+          </a:solidFill>
+          <a:ln w="12700">
+            <a:solidFill>
+              <a:srgbClr val="D9E0E8"/>
+            </a:solidFill>
+          </a:ln>
+          <a:effectLst/>
+        </p:spPr>
+        <p:style>
+          <a:lnRef idx="1">
+            <a:schemeClr val="accent1"/>
+          </a:lnRef>
+          <a:fillRef idx="3">
+            <a:schemeClr val="accent1"/>
+          </a:fillRef>
+          <a:effectRef idx="2">
+            <a:schemeClr val="accent1"/>
+          </a:effectRef>
+          <a:fontRef idx="minor">
+            <a:schemeClr val="lt1"/>
+          </a:fontRef>
+        </p:style>
+        <p:txBody>
+          <a:bodyPr rtlCol="0" anchor="ctr"/>
+          <a:lstStyle/>
+          <a:p>
+            <a:pPr algn="ctr"/>
+          </a:p>
+        </p:txBody>
+      </p:sp>
+      <p:sp>
+        <p:nvSpPr>
+          <p:cNvPr id="9" name="TextBox 8"/>
+          <p:cNvSpPr txBox="1"/>
+          <p:nvPr/>
+        </p:nvSpPr>
+        <p:spPr>
+          <a:xfrm>
+            <a:off x="7165695" y="1783080"/>
+            <a:ext cx="1627632" cy="457200"/>
+          </a:xfrm>
+          <a:prstGeom prst="rect">
+            <a:avLst/>
+          </a:prstGeom>
+          <a:noFill/>
+        </p:spPr>
+        <p:txBody>
+          <a:bodyPr wrap="square" anchor="ctr">
+            <a:spAutoFit/>
+          </a:bodyPr>
+          <a:lstStyle/>
+          <a:p>
+            <a:pPr algn="ctr"/>
+            <a:r>
+              <a:rPr sz="1400" b="1" i="0">
+                <a:solidFill>
+                  <a:srgbClr val="FFFFFF"/>
+                </a:solidFill>
+                <a:latin typeface="Calibri"/>
+              </a:rPr>
+              <a:t>Infected ↓</a:t>
+            </a:r>
+          </a:p>
+        </p:txBody>
+      </p:sp>
+      <p:sp>
+        <p:nvSpPr>
+          <p:cNvPr id="10" name="Rectangle 9"/>
+          <p:cNvSpPr/>
+          <p:nvPr/>
+        </p:nvSpPr>
+        <p:spPr>
+          <a:xfrm>
+            <a:off x="8884767" y="1783080"/>
+            <a:ext cx="2651760" cy="457200"/>
+          </a:xfrm>
+          <a:prstGeom prst="rect">
+            <a:avLst/>
+          </a:prstGeom>
+          <a:solidFill>
+            <a:srgbClr val="1F355E"/>
+          </a:solidFill>
+          <a:ln w="12700">
+            <a:solidFill>
+              <a:srgbClr val="D9E0E8"/>
+            </a:solidFill>
+          </a:ln>
+          <a:effectLst/>
+        </p:spPr>
+        <p:style>
+          <a:lnRef idx="1">
+            <a:schemeClr val="accent1"/>
+          </a:lnRef>
+          <a:fillRef idx="3">
+            <a:schemeClr val="accent1"/>
+          </a:fillRef>
+          <a:effectRef idx="2">
+            <a:schemeClr val="accent1"/>
+          </a:effectRef>
+          <a:fontRef idx="minor">
+            <a:schemeClr val="lt1"/>
+          </a:fontRef>
+        </p:style>
+        <p:txBody>
+          <a:bodyPr rtlCol="0" anchor="ctr"/>
+          <a:lstStyle/>
+          <a:p>
+            <a:pPr algn="ctr"/>
+          </a:p>
+        </p:txBody>
+      </p:sp>
+      <p:sp>
+        <p:nvSpPr>
+          <p:cNvPr id="11" name="TextBox 10"/>
+          <p:cNvSpPr txBox="1"/>
+          <p:nvPr/>
+        </p:nvSpPr>
+        <p:spPr>
+          <a:xfrm>
+            <a:off x="8994495" y="1783080"/>
+            <a:ext cx="2450591" cy="457200"/>
+          </a:xfrm>
+          <a:prstGeom prst="rect">
+            <a:avLst/>
+          </a:prstGeom>
+          <a:noFill/>
+        </p:spPr>
+        <p:txBody>
+          <a:bodyPr wrap="square" anchor="ctr">
+            <a:spAutoFit/>
+          </a:bodyPr>
+          <a:lstStyle/>
+          <a:p>
+            <a:pPr algn="ctr"/>
+            <a:r>
+              <a:rPr sz="1400" b="1" i="0">
+                <a:solidFill>
+                  <a:srgbClr val="FFFFFF"/>
+                </a:solidFill>
+                <a:latin typeface="Calibri"/>
+              </a:rPr>
+              <a:t>vs ours</a:t>
+            </a:r>
+          </a:p>
+        </p:txBody>
+      </p:sp>
+      <p:sp>
+        <p:nvSpPr>
+          <p:cNvPr id="12" name="Rectangle 11"/>
+          <p:cNvSpPr/>
+          <p:nvPr/>
+        </p:nvSpPr>
+        <p:spPr>
+          <a:xfrm>
+            <a:off x="655167" y="2240280"/>
+            <a:ext cx="6400800" cy="457200"/>
+          </a:xfrm>
+          <a:prstGeom prst="rect">
+            <a:avLst/>
+          </a:prstGeom>
+          <a:solidFill>
+            <a:srgbClr val="F3F6FA"/>
+          </a:solidFill>
+          <a:ln w="12700">
+            <a:solidFill>
+              <a:srgbClr val="D9E0E8"/>
+            </a:solidFill>
+          </a:ln>
+          <a:effectLst/>
+        </p:spPr>
+        <p:style>
+          <a:lnRef idx="1">
+            <a:schemeClr val="accent1"/>
+          </a:lnRef>
+          <a:fillRef idx="3">
+            <a:schemeClr val="accent1"/>
+          </a:fillRef>
+          <a:effectRef idx="2">
+            <a:schemeClr val="accent1"/>
+          </a:effectRef>
+          <a:fontRef idx="minor">
+            <a:schemeClr val="lt1"/>
+          </a:fontRef>
+        </p:style>
+        <p:txBody>
+          <a:bodyPr rtlCol="0" anchor="ctr"/>
+          <a:lstStyle/>
+          <a:p>
+            <a:pPr algn="ctr"/>
+          </a:p>
+        </p:txBody>
+      </p:sp>
+      <p:sp>
+        <p:nvSpPr>
+          <p:cNvPr id="13" name="TextBox 12"/>
+          <p:cNvSpPr txBox="1"/>
+          <p:nvPr/>
+        </p:nvSpPr>
+        <p:spPr>
+          <a:xfrm>
+            <a:off x="764895" y="2240280"/>
+            <a:ext cx="6199632" cy="457200"/>
+          </a:xfrm>
+          <a:prstGeom prst="rect">
+            <a:avLst/>
+          </a:prstGeom>
+          <a:noFill/>
+        </p:spPr>
+        <p:txBody>
+          <a:bodyPr wrap="square" anchor="ctr">
+            <a:spAutoFit/>
+          </a:bodyPr>
+          <a:lstStyle/>
+          <a:p>
+            <a:pPr algn="l"/>
+            <a:r>
+              <a:rPr sz="1400" b="0" i="0">
+                <a:solidFill>
+                  <a:srgbClr val="252B33"/>
+                </a:solidFill>
+                <a:latin typeface="Calibri"/>
+              </a:rPr>
+              <a:t>DAVA-style — data-aware but exploit-blind</a:t>
+            </a:r>
+          </a:p>
+        </p:txBody>
+      </p:sp>
+      <p:sp>
+        <p:nvSpPr>
+          <p:cNvPr id="14" name="Rectangle 13"/>
+          <p:cNvSpPr/>
+          <p:nvPr/>
+        </p:nvSpPr>
+        <p:spPr>
+          <a:xfrm>
+            <a:off x="7055967" y="2240280"/>
+            <a:ext cx="1828800" cy="457200"/>
+          </a:xfrm>
+          <a:prstGeom prst="rect">
+            <a:avLst/>
+          </a:prstGeom>
+          <a:solidFill>
+            <a:srgbClr val="F3F6FA"/>
+          </a:solidFill>
+          <a:ln w="12700">
+            <a:solidFill>
+              <a:srgbClr val="D9E0E8"/>
+            </a:solidFill>
+          </a:ln>
+          <a:effectLst/>
+        </p:spPr>
+        <p:style>
+          <a:lnRef idx="1">
+            <a:schemeClr val="accent1"/>
+          </a:lnRef>
+          <a:fillRef idx="3">
+            <a:schemeClr val="accent1"/>
+          </a:fillRef>
+          <a:effectRef idx="2">
+            <a:schemeClr val="accent1"/>
+          </a:effectRef>
+          <a:fontRef idx="minor">
+            <a:schemeClr val="lt1"/>
+          </a:fontRef>
+        </p:style>
+        <p:txBody>
+          <a:bodyPr rtlCol="0" anchor="ctr"/>
+          <a:lstStyle/>
+          <a:p>
+            <a:pPr algn="ctr"/>
+          </a:p>
+        </p:txBody>
+      </p:sp>
+      <p:sp>
+        <p:nvSpPr>
+          <p:cNvPr id="15" name="TextBox 14"/>
+          <p:cNvSpPr txBox="1"/>
+          <p:nvPr/>
+        </p:nvSpPr>
+        <p:spPr>
+          <a:xfrm>
+            <a:off x="7165695" y="2240280"/>
+            <a:ext cx="1627632" cy="457200"/>
+          </a:xfrm>
+          <a:prstGeom prst="rect">
+            <a:avLst/>
+          </a:prstGeom>
+          <a:noFill/>
+        </p:spPr>
+        <p:txBody>
+          <a:bodyPr wrap="square" anchor="ctr">
+            <a:spAutoFit/>
+          </a:bodyPr>
+          <a:lstStyle/>
+          <a:p>
+            <a:pPr algn="ctr"/>
+            <a:r>
+              <a:rPr sz="1400" b="0" i="0">
+                <a:solidFill>
+                  <a:srgbClr val="252B33"/>
+                </a:solidFill>
+                <a:latin typeface="Calibri"/>
+              </a:rPr>
+              <a:t>1.70%</a:t>
+            </a:r>
+          </a:p>
+        </p:txBody>
+      </p:sp>
+      <p:sp>
+        <p:nvSpPr>
+          <p:cNvPr id="16" name="Rectangle 15"/>
+          <p:cNvSpPr/>
+          <p:nvPr/>
+        </p:nvSpPr>
+        <p:spPr>
+          <a:xfrm>
+            <a:off x="8884767" y="2240280"/>
+            <a:ext cx="2651760" cy="457200"/>
+          </a:xfrm>
+          <a:prstGeom prst="rect">
+            <a:avLst/>
+          </a:prstGeom>
+          <a:solidFill>
+            <a:srgbClr val="F3F6FA"/>
+          </a:solidFill>
+          <a:ln w="12700">
+            <a:solidFill>
+              <a:srgbClr val="D9E0E8"/>
+            </a:solidFill>
+          </a:ln>
+          <a:effectLst/>
+        </p:spPr>
+        <p:style>
+          <a:lnRef idx="1">
+            <a:schemeClr val="accent1"/>
+          </a:lnRef>
+          <a:fillRef idx="3">
+            <a:schemeClr val="accent1"/>
+          </a:fillRef>
+          <a:effectRef idx="2">
+            <a:schemeClr val="accent1"/>
+          </a:effectRef>
+          <a:fontRef idx="minor">
+            <a:schemeClr val="lt1"/>
+          </a:fontRef>
+        </p:style>
+        <p:txBody>
+          <a:bodyPr rtlCol="0" anchor="ctr"/>
+          <a:lstStyle/>
+          <a:p>
+            <a:pPr algn="ctr"/>
+          </a:p>
+        </p:txBody>
+      </p:sp>
+      <p:sp>
+        <p:nvSpPr>
+          <p:cNvPr id="17" name="TextBox 16"/>
+          <p:cNvSpPr txBox="1"/>
+          <p:nvPr/>
+        </p:nvSpPr>
+        <p:spPr>
+          <a:xfrm>
+            <a:off x="8994495" y="2240280"/>
+            <a:ext cx="2450591" cy="457200"/>
+          </a:xfrm>
+          <a:prstGeom prst="rect">
+            <a:avLst/>
+          </a:prstGeom>
+          <a:noFill/>
+        </p:spPr>
+        <p:txBody>
+          <a:bodyPr wrap="square" anchor="ctr">
+            <a:spAutoFit/>
+          </a:bodyPr>
+          <a:lstStyle/>
+          <a:p>
+            <a:pPr algn="ctr"/>
+            <a:r>
+              <a:rPr sz="1400" b="0" i="0">
+                <a:solidFill>
+                  <a:srgbClr val="252B33"/>
+                </a:solidFill>
+                <a:latin typeface="Calibri"/>
+              </a:rPr>
+              <a:t>+43.8%  ·  p=2.8×10⁻⁴</a:t>
+            </a:r>
+          </a:p>
+        </p:txBody>
+      </p:sp>
+      <p:sp>
+        <p:nvSpPr>
+          <p:cNvPr id="18" name="Rectangle 17"/>
+          <p:cNvSpPr/>
+          <p:nvPr/>
+        </p:nvSpPr>
+        <p:spPr>
+          <a:xfrm>
+            <a:off x="655167" y="2697480"/>
+            <a:ext cx="6400800" cy="457200"/>
+          </a:xfrm>
+          <a:prstGeom prst="rect">
+            <a:avLst/>
+          </a:prstGeom>
+          <a:solidFill>
+            <a:srgbClr val="FFFFFF"/>
+          </a:solidFill>
+          <a:ln w="12700">
+            <a:solidFill>
+              <a:srgbClr val="D9E0E8"/>
+            </a:solidFill>
+          </a:ln>
+          <a:effectLst/>
+        </p:spPr>
+        <p:style>
+          <a:lnRef idx="1">
+            <a:schemeClr val="accent1"/>
+          </a:lnRef>
+          <a:fillRef idx="3">
+            <a:schemeClr val="accent1"/>
+          </a:fillRef>
+          <a:effectRef idx="2">
+            <a:schemeClr val="accent1"/>
+          </a:effectRef>
+          <a:fontRef idx="minor">
+            <a:schemeClr val="lt1"/>
+          </a:fontRef>
+        </p:style>
+        <p:txBody>
+          <a:bodyPr rtlCol="0" anchor="ctr"/>
+          <a:lstStyle/>
+          <a:p>
+            <a:pPr algn="ctr"/>
+          </a:p>
+        </p:txBody>
+      </p:sp>
+      <p:sp>
+        <p:nvSpPr>
+          <p:cNvPr id="19" name="TextBox 18"/>
+          <p:cNvSpPr txBox="1"/>
+          <p:nvPr/>
+        </p:nvSpPr>
+        <p:spPr>
+          <a:xfrm>
+            <a:off x="764895" y="2697480"/>
+            <a:ext cx="6199632" cy="457200"/>
+          </a:xfrm>
+          <a:prstGeom prst="rect">
+            <a:avLst/>
+          </a:prstGeom>
+          <a:noFill/>
+        </p:spPr>
+        <p:txBody>
+          <a:bodyPr wrap="square" anchor="ctr">
+            <a:spAutoFit/>
+          </a:bodyPr>
+          <a:lstStyle/>
+          <a:p>
+            <a:pPr algn="l"/>
+            <a:r>
+              <a:rPr sz="1400" b="0" i="0">
+                <a:solidFill>
+                  <a:srgbClr val="252B33"/>
+                </a:solidFill>
+                <a:latin typeface="Calibri"/>
+              </a:rPr>
+              <a:t>CyGym-style — static prior, no online update</a:t>
+            </a:r>
+          </a:p>
+        </p:txBody>
+      </p:sp>
+      <p:sp>
+        <p:nvSpPr>
+          <p:cNvPr id="20" name="Rectangle 19"/>
+          <p:cNvSpPr/>
+          <p:nvPr/>
+        </p:nvSpPr>
+        <p:spPr>
+          <a:xfrm>
+            <a:off x="7055967" y="2697480"/>
+            <a:ext cx="1828800" cy="457200"/>
+          </a:xfrm>
+          <a:prstGeom prst="rect">
+            <a:avLst/>
+          </a:prstGeom>
+          <a:solidFill>
+            <a:srgbClr val="FFFFFF"/>
+          </a:solidFill>
+          <a:ln w="12700">
+            <a:solidFill>
+              <a:srgbClr val="D9E0E8"/>
+            </a:solidFill>
+          </a:ln>
+          <a:effectLst/>
+        </p:spPr>
+        <p:style>
+          <a:lnRef idx="1">
+            <a:schemeClr val="accent1"/>
+          </a:lnRef>
+          <a:fillRef idx="3">
+            <a:schemeClr val="accent1"/>
+          </a:fillRef>
+          <a:effectRef idx="2">
+            <a:schemeClr val="accent1"/>
+          </a:effectRef>
+          <a:fontRef idx="minor">
+            <a:schemeClr val="lt1"/>
+          </a:fontRef>
+        </p:style>
+        <p:txBody>
+          <a:bodyPr rtlCol="0" anchor="ctr"/>
+          <a:lstStyle/>
+          <a:p>
+            <a:pPr algn="ctr"/>
+          </a:p>
+        </p:txBody>
+      </p:sp>
+      <p:sp>
+        <p:nvSpPr>
+          <p:cNvPr id="21" name="TextBox 20"/>
+          <p:cNvSpPr txBox="1"/>
+          <p:nvPr/>
+        </p:nvSpPr>
+        <p:spPr>
+          <a:xfrm>
+            <a:off x="7165695" y="2697480"/>
+            <a:ext cx="1627632" cy="457200"/>
+          </a:xfrm>
+          <a:prstGeom prst="rect">
+            <a:avLst/>
+          </a:prstGeom>
+          <a:noFill/>
+        </p:spPr>
+        <p:txBody>
+          <a:bodyPr wrap="square" anchor="ctr">
+            <a:spAutoFit/>
+          </a:bodyPr>
+          <a:lstStyle/>
+          <a:p>
+            <a:pPr algn="ctr"/>
+            <a:r>
+              <a:rPr sz="1400" b="0" i="0">
+                <a:solidFill>
+                  <a:srgbClr val="252B33"/>
+                </a:solidFill>
+                <a:latin typeface="Calibri"/>
+              </a:rPr>
+              <a:t>1.15%</a:t>
+            </a:r>
+          </a:p>
+        </p:txBody>
+      </p:sp>
+      <p:sp>
+        <p:nvSpPr>
+          <p:cNvPr id="22" name="Rectangle 21"/>
+          <p:cNvSpPr/>
+          <p:nvPr/>
+        </p:nvSpPr>
+        <p:spPr>
+          <a:xfrm>
+            <a:off x="8884767" y="2697480"/>
+            <a:ext cx="2651760" cy="457200"/>
+          </a:xfrm>
+          <a:prstGeom prst="rect">
+            <a:avLst/>
+          </a:prstGeom>
+          <a:solidFill>
+            <a:srgbClr val="FFFFFF"/>
+          </a:solidFill>
+          <a:ln w="12700">
+            <a:solidFill>
+              <a:srgbClr val="D9E0E8"/>
+            </a:solidFill>
+          </a:ln>
+          <a:effectLst/>
+        </p:spPr>
+        <p:style>
+          <a:lnRef idx="1">
+            <a:schemeClr val="accent1"/>
+          </a:lnRef>
+          <a:fillRef idx="3">
+            <a:schemeClr val="accent1"/>
+          </a:fillRef>
+          <a:effectRef idx="2">
+            <a:schemeClr val="accent1"/>
+          </a:effectRef>
+          <a:fontRef idx="minor">
+            <a:schemeClr val="lt1"/>
+          </a:fontRef>
+        </p:style>
+        <p:txBody>
+          <a:bodyPr rtlCol="0" anchor="ctr"/>
+          <a:lstStyle/>
+          <a:p>
+            <a:pPr algn="ctr"/>
+          </a:p>
+        </p:txBody>
+      </p:sp>
+      <p:sp>
+        <p:nvSpPr>
+          <p:cNvPr id="23" name="TextBox 22"/>
+          <p:cNvSpPr txBox="1"/>
+          <p:nvPr/>
+        </p:nvSpPr>
+        <p:spPr>
+          <a:xfrm>
+            <a:off x="8994495" y="2697480"/>
+            <a:ext cx="2450591" cy="457200"/>
+          </a:xfrm>
+          <a:prstGeom prst="rect">
+            <a:avLst/>
+          </a:prstGeom>
+          <a:noFill/>
+        </p:spPr>
+        <p:txBody>
+          <a:bodyPr wrap="square" anchor="ctr">
+            <a:spAutoFit/>
+          </a:bodyPr>
+          <a:lstStyle/>
+          <a:p>
+            <a:pPr algn="ctr"/>
+            <a:r>
+              <a:rPr sz="1400" b="0" i="0">
+                <a:solidFill>
+                  <a:srgbClr val="252B33"/>
+                </a:solidFill>
+                <a:latin typeface="Calibri"/>
+              </a:rPr>
+              <a:t>+16.6%  ·  p=1.1×10⁻²</a:t>
+            </a:r>
+          </a:p>
+        </p:txBody>
+      </p:sp>
+      <p:sp>
+        <p:nvSpPr>
+          <p:cNvPr id="24" name="Rectangle 23"/>
+          <p:cNvSpPr/>
+          <p:nvPr/>
+        </p:nvSpPr>
+        <p:spPr>
+          <a:xfrm>
+            <a:off x="655167" y="3154680"/>
+            <a:ext cx="6400800" cy="457200"/>
+          </a:xfrm>
+          <a:prstGeom prst="rect">
+            <a:avLst/>
+          </a:prstGeom>
+          <a:solidFill>
+            <a:srgbClr val="E3F1E8"/>
+          </a:solidFill>
+          <a:ln w="12700">
+            <a:solidFill>
+              <a:srgbClr val="D9E0E8"/>
+            </a:solidFill>
+          </a:ln>
+          <a:effectLst/>
+        </p:spPr>
+        <p:style>
+          <a:lnRef idx="1">
+            <a:schemeClr val="accent1"/>
+          </a:lnRef>
+          <a:fillRef idx="3">
+            <a:schemeClr val="accent1"/>
+          </a:fillRef>
+          <a:effectRef idx="2">
+            <a:schemeClr val="accent1"/>
+          </a:effectRef>
+          <a:fontRef idx="minor">
+            <a:schemeClr val="lt1"/>
+          </a:fontRef>
+        </p:style>
+        <p:txBody>
+          <a:bodyPr rtlCol="0" anchor="ctr"/>
+          <a:lstStyle/>
+          <a:p>
+            <a:pPr algn="ctr"/>
+          </a:p>
+        </p:txBody>
+      </p:sp>
+      <p:sp>
+        <p:nvSpPr>
+          <p:cNvPr id="25" name="TextBox 24"/>
+          <p:cNvSpPr txBox="1"/>
+          <p:nvPr/>
+        </p:nvSpPr>
+        <p:spPr>
+          <a:xfrm>
+            <a:off x="764895" y="3154680"/>
+            <a:ext cx="6199632" cy="457200"/>
+          </a:xfrm>
+          <a:prstGeom prst="rect">
+            <a:avLst/>
+          </a:prstGeom>
+          <a:noFill/>
+        </p:spPr>
+        <p:txBody>
+          <a:bodyPr wrap="square" anchor="ctr">
+            <a:spAutoFit/>
+          </a:bodyPr>
+          <a:lstStyle/>
+          <a:p>
+            <a:pPr algn="l"/>
+            <a:r>
+              <a:rPr sz="1400" b="1" i="0">
+                <a:solidFill>
+                  <a:srgbClr val="1B7F4B"/>
+                </a:solidFill>
+                <a:latin typeface="Calibri"/>
+              </a:rPr>
+              <a:t>SERUM — content-aware (ours)</a:t>
+            </a:r>
+          </a:p>
+        </p:txBody>
+      </p:sp>
+      <p:sp>
+        <p:nvSpPr>
+          <p:cNvPr id="26" name="Rectangle 25"/>
+          <p:cNvSpPr/>
+          <p:nvPr/>
+        </p:nvSpPr>
+        <p:spPr>
+          <a:xfrm>
+            <a:off x="7055967" y="3154680"/>
+            <a:ext cx="1828800" cy="457200"/>
+          </a:xfrm>
+          <a:prstGeom prst="rect">
+            <a:avLst/>
+          </a:prstGeom>
+          <a:solidFill>
+            <a:srgbClr val="E3F1E8"/>
+          </a:solidFill>
+          <a:ln w="12700">
+            <a:solidFill>
+              <a:srgbClr val="D9E0E8"/>
+            </a:solidFill>
+          </a:ln>
+          <a:effectLst/>
+        </p:spPr>
+        <p:style>
+          <a:lnRef idx="1">
+            <a:schemeClr val="accent1"/>
+          </a:lnRef>
+          <a:fillRef idx="3">
+            <a:schemeClr val="accent1"/>
+          </a:fillRef>
+          <a:effectRef idx="2">
+            <a:schemeClr val="accent1"/>
+          </a:effectRef>
+          <a:fontRef idx="minor">
+            <a:schemeClr val="lt1"/>
+          </a:fontRef>
+        </p:style>
+        <p:txBody>
+          <a:bodyPr rtlCol="0" anchor="ctr"/>
+          <a:lstStyle/>
+          <a:p>
+            <a:pPr algn="ctr"/>
+          </a:p>
+        </p:txBody>
+      </p:sp>
+      <p:sp>
+        <p:nvSpPr>
+          <p:cNvPr id="27" name="TextBox 26"/>
+          <p:cNvSpPr txBox="1"/>
+          <p:nvPr/>
+        </p:nvSpPr>
+        <p:spPr>
+          <a:xfrm>
+            <a:off x="7165695" y="3154680"/>
+            <a:ext cx="1627632" cy="457200"/>
+          </a:xfrm>
+          <a:prstGeom prst="rect">
+            <a:avLst/>
+          </a:prstGeom>
+          <a:noFill/>
+        </p:spPr>
+        <p:txBody>
+          <a:bodyPr wrap="square" anchor="ctr">
+            <a:spAutoFit/>
+          </a:bodyPr>
+          <a:lstStyle/>
+          <a:p>
+            <a:pPr algn="ctr"/>
+            <a:r>
+              <a:rPr sz="1400" b="1" i="0">
+                <a:solidFill>
+                  <a:srgbClr val="1B7F4B"/>
+                </a:solidFill>
+                <a:latin typeface="Calibri"/>
+              </a:rPr>
+              <a:t>0.95%</a:t>
+            </a:r>
+          </a:p>
+        </p:txBody>
+      </p:sp>
+      <p:sp>
+        <p:nvSpPr>
+          <p:cNvPr id="28" name="Rectangle 27"/>
+          <p:cNvSpPr/>
+          <p:nvPr/>
+        </p:nvSpPr>
+        <p:spPr>
+          <a:xfrm>
+            <a:off x="8884767" y="3154680"/>
+            <a:ext cx="2651760" cy="457200"/>
+          </a:xfrm>
+          <a:prstGeom prst="rect">
+            <a:avLst/>
+          </a:prstGeom>
+          <a:solidFill>
+            <a:srgbClr val="E3F1E8"/>
+          </a:solidFill>
+          <a:ln w="12700">
+            <a:solidFill>
+              <a:srgbClr val="D9E0E8"/>
+            </a:solidFill>
+          </a:ln>
+          <a:effectLst/>
+        </p:spPr>
+        <p:style>
+          <a:lnRef idx="1">
+            <a:schemeClr val="accent1"/>
+          </a:lnRef>
+          <a:fillRef idx="3">
+            <a:schemeClr val="accent1"/>
+          </a:fillRef>
+          <a:effectRef idx="2">
+            <a:schemeClr val="accent1"/>
+          </a:effectRef>
+          <a:fontRef idx="minor">
+            <a:schemeClr val="lt1"/>
+          </a:fontRef>
+        </p:style>
+        <p:txBody>
+          <a:bodyPr rtlCol="0" anchor="ctr"/>
+          <a:lstStyle/>
+          <a:p>
+            <a:pPr algn="ctr"/>
+          </a:p>
+        </p:txBody>
+      </p:sp>
+      <p:sp>
+        <p:nvSpPr>
+          <p:cNvPr id="29" name="TextBox 28"/>
+          <p:cNvSpPr txBox="1"/>
+          <p:nvPr/>
+        </p:nvSpPr>
+        <p:spPr>
+          <a:xfrm>
+            <a:off x="8994495" y="3154680"/>
+            <a:ext cx="2450591" cy="457200"/>
+          </a:xfrm>
+          <a:prstGeom prst="rect">
+            <a:avLst/>
+          </a:prstGeom>
+          <a:noFill/>
+        </p:spPr>
+        <p:txBody>
+          <a:bodyPr wrap="square" anchor="ctr">
+            <a:spAutoFit/>
+          </a:bodyPr>
+          <a:lstStyle/>
+          <a:p>
+            <a:pPr algn="ctr"/>
+            <a:r>
+              <a:rPr sz="1400" b="1" i="0">
+                <a:solidFill>
+                  <a:srgbClr val="1B7F4B"/>
+                </a:solidFill>
+                <a:latin typeface="Calibri"/>
+              </a:rPr>
+              <a:t>—</a:t>
+            </a:r>
+          </a:p>
+        </p:txBody>
+      </p:sp>
+      <p:sp>
+        <p:nvSpPr>
+          <p:cNvPr id="30" name="Rectangle 29"/>
+          <p:cNvSpPr/>
+          <p:nvPr/>
+        </p:nvSpPr>
+        <p:spPr>
+          <a:xfrm>
+            <a:off x="640080" y="3813048"/>
+            <a:ext cx="10881360" cy="1097280"/>
           </a:xfrm>
           <a:prstGeom prst="rect">
             <a:avLst/>
@@ -18088,14 +20926,14 @@
       </p:sp>
       <p:sp>
         <p:nvSpPr>
-          <p:cNvPr id="8" name="TextBox 7"/>
+          <p:cNvPr id="31" name="TextBox 30"/>
           <p:cNvSpPr txBox="1"/>
           <p:nvPr/>
         </p:nvSpPr>
         <p:spPr>
           <a:xfrm>
             <a:off x="868680" y="3886200"/>
-            <a:ext cx="10424160" cy="1005840"/>
+            <a:ext cx="10424160" cy="932688"/>
           </a:xfrm>
           <a:prstGeom prst="rect">
             <a:avLst/>
@@ -21281,315 +24119,988 @@
           </a:p>
         </p:txBody>
       </p:sp>
-      <p:graphicFrame>
-        <p:nvGraphicFramePr>
-          <p:cNvPr id="6" name="Table 5"/>
-          <p:cNvGraphicFramePr>
-            <a:graphicFrameLocks noGrp="1"/>
-          </p:cNvGraphicFramePr>
-          <p:nvPr/>
-        </p:nvGraphicFramePr>
-        <p:xfrm>
-          <a:off x="655167" y="1783080"/>
-          <a:ext cx="10881360" cy="1828800"/>
-        </p:xfrm>
-        <a:graphic>
-          <a:graphicData uri="http://schemas.openxmlformats.org/drawingml/2006/table">
-            <a:tbl>
-              <a:tblPr firstRow="1" bandRow="1">
-                <a:tableStyleId>{5C22544A-7EE6-4342-B048-85BDC9FD1C3A}</a:tableStyleId>
-              </a:tblPr>
-              <a:tblGrid>
-                <a:gridCol w="2651760"/>
-                <a:gridCol w="4114800"/>
-                <a:gridCol w="4114800"/>
-              </a:tblGrid>
-              <a:tr h="457200">
-                <a:tc>
-                  <a:txBody>
-                    <a:bodyPr/>
-                    <a:lstStyle/>
-                    <a:p>
-                      <a:pPr algn="l"/>
-                      <a:r>
-                        <a:rPr sz="1500" b="1">
-                          <a:solidFill>
-                            <a:srgbClr val="FFFFFF"/>
-                          </a:solidFill>
-                        </a:rPr>
-                        <a:t>Prior work</a:t>
-                      </a:r>
-                    </a:p>
-                  </a:txBody>
-                  <a:tcPr>
-                    <a:solidFill>
-                      <a:srgbClr val="1F355E"/>
-                    </a:solidFill>
-                  </a:tcPr>
-                </a:tc>
-                <a:tc>
-                  <a:txBody>
-                    <a:bodyPr/>
-                    <a:lstStyle/>
-                    <a:p>
-                      <a:pPr algn="ctr"/>
-                      <a:r>
-                        <a:rPr sz="1500" b="1">
-                          <a:solidFill>
-                            <a:srgbClr val="FFFFFF"/>
-                          </a:solidFill>
-                        </a:rPr>
-                        <a:t>What it shares with SERUM</a:t>
-                      </a:r>
-                    </a:p>
-                  </a:txBody>
-                  <a:tcPr>
-                    <a:solidFill>
-                      <a:srgbClr val="1F355E"/>
-                    </a:solidFill>
-                  </a:tcPr>
-                </a:tc>
-                <a:tc>
-                  <a:txBody>
-                    <a:bodyPr/>
-                    <a:lstStyle/>
-                    <a:p>
-                      <a:pPr algn="ctr"/>
-                      <a:r>
-                        <a:rPr sz="1500" b="1">
-                          <a:solidFill>
-                            <a:srgbClr val="FFFFFF"/>
-                          </a:solidFill>
-                        </a:rPr>
-                        <a:t>The gap SERUM fills</a:t>
-                      </a:r>
-                    </a:p>
-                  </a:txBody>
-                  <a:tcPr>
-                    <a:solidFill>
-                      <a:srgbClr val="1F355E"/>
-                    </a:solidFill>
-                  </a:tcPr>
-                </a:tc>
-              </a:tr>
-              <a:tr h="457200">
-                <a:tc>
-                  <a:txBody>
-                    <a:bodyPr/>
-                    <a:lstStyle/>
-                    <a:p>
-                      <a:pPr algn="l"/>
-                      <a:r>
-                        <a:rPr sz="1400" b="0">
-                          <a:solidFill>
-                            <a:srgbClr val="252B33"/>
-                          </a:solidFill>
-                        </a:rPr>
-                        <a:t>CyGym (2025)</a:t>
-                      </a:r>
-                    </a:p>
-                  </a:txBody>
-                  <a:tcPr>
-                    <a:solidFill>
-                      <a:srgbClr val="F3F6FA"/>
-                    </a:solidFill>
-                  </a:tcPr>
-                </a:tc>
-                <a:tc>
-                  <a:txBody>
-                    <a:bodyPr/>
-                    <a:lstStyle/>
-                    <a:p>
-                      <a:pPr algn="ctr"/>
-                      <a:r>
-                        <a:rPr sz="1400" b="0">
-                          <a:solidFill>
-                            <a:srgbClr val="252B33"/>
-                          </a:solidFill>
-                        </a:rPr>
-                        <a:t>vuln-gated spread + a cost model</a:t>
-                      </a:r>
-                    </a:p>
-                  </a:txBody>
-                  <a:tcPr>
-                    <a:solidFill>
-                      <a:srgbClr val="F3F6FA"/>
-                    </a:solidFill>
-                  </a:tcPr>
-                </a:tc>
-                <a:tc>
-                  <a:txBody>
-                    <a:bodyPr/>
-                    <a:lstStyle/>
-                    <a:p>
-                      <a:pPr algn="ctr"/>
-                      <a:r>
-                        <a:rPr sz="1400" b="0">
-                          <a:solidFill>
-                            <a:srgbClr val="252B33"/>
-                          </a:solidFill>
-                        </a:rPr>
-                        <a:t>STATIC zero-day prior; no online belief update</a:t>
-                      </a:r>
-                    </a:p>
-                  </a:txBody>
-                  <a:tcPr>
-                    <a:solidFill>
-                      <a:srgbClr val="F3F6FA"/>
-                    </a:solidFill>
-                  </a:tcPr>
-                </a:tc>
-              </a:tr>
-              <a:tr h="457200">
-                <a:tc>
-                  <a:txBody>
-                    <a:bodyPr/>
-                    <a:lstStyle/>
-                    <a:p>
-                      <a:pPr algn="l"/>
-                      <a:r>
-                        <a:rPr sz="1400" b="0">
-                          <a:solidFill>
-                            <a:srgbClr val="252B33"/>
-                          </a:solidFill>
-                        </a:rPr>
-                        <a:t>SCENARIOID (KDD 2023)</a:t>
-                      </a:r>
-                    </a:p>
-                  </a:txBody>
-                  <a:tcPr>
-                    <a:solidFill>
-                      <a:srgbClr val="FFFFFF"/>
-                    </a:solidFill>
-                  </a:tcPr>
-                </a:tc>
-                <a:tc>
-                  <a:txBody>
-                    <a:bodyPr/>
-                    <a:lstStyle/>
-                    <a:p>
-                      <a:pPr algn="ctr"/>
-                      <a:r>
-                        <a:rPr sz="1400" b="0">
-                          <a:solidFill>
-                            <a:srgbClr val="252B33"/>
-                          </a:solidFill>
-                        </a:rPr>
-                        <a:t>infer which mechanism produced a cascade</a:t>
-                      </a:r>
-                    </a:p>
-                  </a:txBody>
-                  <a:tcPr>
-                    <a:solidFill>
-                      <a:srgbClr val="FFFFFF"/>
-                    </a:solidFill>
-                  </a:tcPr>
-                </a:tc>
-                <a:tc>
-                  <a:txBody>
-                    <a:bodyPr/>
-                    <a:lstStyle/>
-                    <a:p>
-                      <a:pPr algn="ctr"/>
-                      <a:r>
-                        <a:rPr sz="1400" b="0">
-                          <a:solidFill>
-                            <a:srgbClr val="252B33"/>
-                          </a:solidFill>
-                        </a:rPr>
-                        <a:t>OFFLINE, feature-engineered; no identifiability guarantee</a:t>
-                      </a:r>
-                    </a:p>
-                  </a:txBody>
-                  <a:tcPr>
-                    <a:solidFill>
-                      <a:srgbClr val="FFFFFF"/>
-                    </a:solidFill>
-                  </a:tcPr>
-                </a:tc>
-              </a:tr>
-              <a:tr h="457200">
-                <a:tc>
-                  <a:txBody>
-                    <a:bodyPr/>
-                    <a:lstStyle/>
-                    <a:p>
-                      <a:pPr algn="l"/>
-                      <a:r>
-                        <a:rPr sz="1400" b="0">
-                          <a:solidFill>
-                            <a:srgbClr val="252B33"/>
-                          </a:solidFill>
-                        </a:rPr>
-                        <a:t>Hoffmann et al. (ICML 2020)</a:t>
-                      </a:r>
-                    </a:p>
-                  </a:txBody>
-                  <a:tcPr>
-                    <a:solidFill>
-                      <a:srgbClr val="F3F6FA"/>
-                    </a:solidFill>
-                  </a:tcPr>
-                </a:tc>
-                <a:tc>
-                  <a:txBody>
-                    <a:bodyPr/>
-                    <a:lstStyle/>
-                    <a:p>
-                      <a:pPr algn="ctr"/>
-                      <a:r>
-                        <a:rPr sz="1400" b="0">
-                          <a:solidFill>
-                            <a:srgbClr val="252B33"/>
-                          </a:solidFill>
-                        </a:rPr>
-                        <a:t>identifiability from cascades</a:t>
-                      </a:r>
-                    </a:p>
-                  </a:txBody>
-                  <a:tcPr>
-                    <a:solidFill>
-                      <a:srgbClr val="F3F6FA"/>
-                    </a:solidFill>
-                  </a:tcPr>
-                </a:tc>
-                <a:tc>
-                  <a:txBody>
-                    <a:bodyPr/>
-                    <a:lstStyle/>
-                    <a:p>
-                      <a:pPr algn="ctr"/>
-                      <a:r>
-                        <a:rPr sz="1400" b="0">
-                          <a:solidFill>
-                            <a:srgbClr val="252B33"/>
-                          </a:solidFill>
-                        </a:rPr>
-                        <a:t>condition on LATENT edges; batch (an arguably harder setting)</a:t>
-                      </a:r>
-                    </a:p>
-                  </a:txBody>
-                  <a:tcPr>
-                    <a:solidFill>
-                      <a:srgbClr val="F3F6FA"/>
-                    </a:solidFill>
-                  </a:tcPr>
-                </a:tc>
-              </a:tr>
-            </a:tbl>
-          </a:graphicData>
-        </a:graphic>
-      </p:graphicFrame>
-      <p:sp>
-        <p:nvSpPr>
-          <p:cNvPr id="7" name="Rectangle 6"/>
+      <p:sp>
+        <p:nvSpPr>
+          <p:cNvPr id="6" name="Rectangle 5"/>
           <p:cNvSpPr/>
           <p:nvPr/>
         </p:nvSpPr>
         <p:spPr>
           <a:xfrm>
-            <a:off x="640080" y="3794760"/>
-            <a:ext cx="10881360" cy="1143000"/>
+            <a:off x="655167" y="1783080"/>
+            <a:ext cx="2651760" cy="457200"/>
+          </a:xfrm>
+          <a:prstGeom prst="rect">
+            <a:avLst/>
+          </a:prstGeom>
+          <a:solidFill>
+            <a:srgbClr val="1F355E"/>
+          </a:solidFill>
+          <a:ln w="12700">
+            <a:solidFill>
+              <a:srgbClr val="D9E0E8"/>
+            </a:solidFill>
+          </a:ln>
+          <a:effectLst/>
+        </p:spPr>
+        <p:style>
+          <a:lnRef idx="1">
+            <a:schemeClr val="accent1"/>
+          </a:lnRef>
+          <a:fillRef idx="3">
+            <a:schemeClr val="accent1"/>
+          </a:fillRef>
+          <a:effectRef idx="2">
+            <a:schemeClr val="accent1"/>
+          </a:effectRef>
+          <a:fontRef idx="minor">
+            <a:schemeClr val="lt1"/>
+          </a:fontRef>
+        </p:style>
+        <p:txBody>
+          <a:bodyPr rtlCol="0" anchor="ctr"/>
+          <a:lstStyle/>
+          <a:p>
+            <a:pPr algn="ctr"/>
+          </a:p>
+        </p:txBody>
+      </p:sp>
+      <p:sp>
+        <p:nvSpPr>
+          <p:cNvPr id="7" name="TextBox 6"/>
+          <p:cNvSpPr txBox="1"/>
+          <p:nvPr/>
+        </p:nvSpPr>
+        <p:spPr>
+          <a:xfrm>
+            <a:off x="764895" y="1783080"/>
+            <a:ext cx="2450591" cy="457200"/>
+          </a:xfrm>
+          <a:prstGeom prst="rect">
+            <a:avLst/>
+          </a:prstGeom>
+          <a:noFill/>
+        </p:spPr>
+        <p:txBody>
+          <a:bodyPr wrap="square" anchor="ctr">
+            <a:spAutoFit/>
+          </a:bodyPr>
+          <a:lstStyle/>
+          <a:p>
+            <a:pPr algn="l"/>
+            <a:r>
+              <a:rPr sz="1400" b="1" i="0">
+                <a:solidFill>
+                  <a:srgbClr val="FFFFFF"/>
+                </a:solidFill>
+                <a:latin typeface="Calibri"/>
+              </a:rPr>
+              <a:t>Prior work</a:t>
+            </a:r>
+          </a:p>
+        </p:txBody>
+      </p:sp>
+      <p:sp>
+        <p:nvSpPr>
+          <p:cNvPr id="8" name="Rectangle 7"/>
+          <p:cNvSpPr/>
+          <p:nvPr/>
+        </p:nvSpPr>
+        <p:spPr>
+          <a:xfrm>
+            <a:off x="3306927" y="1783080"/>
+            <a:ext cx="4114800" cy="457200"/>
+          </a:xfrm>
+          <a:prstGeom prst="rect">
+            <a:avLst/>
+          </a:prstGeom>
+          <a:solidFill>
+            <a:srgbClr val="1F355E"/>
+          </a:solidFill>
+          <a:ln w="12700">
+            <a:solidFill>
+              <a:srgbClr val="D9E0E8"/>
+            </a:solidFill>
+          </a:ln>
+          <a:effectLst/>
+        </p:spPr>
+        <p:style>
+          <a:lnRef idx="1">
+            <a:schemeClr val="accent1"/>
+          </a:lnRef>
+          <a:fillRef idx="3">
+            <a:schemeClr val="accent1"/>
+          </a:fillRef>
+          <a:effectRef idx="2">
+            <a:schemeClr val="accent1"/>
+          </a:effectRef>
+          <a:fontRef idx="minor">
+            <a:schemeClr val="lt1"/>
+          </a:fontRef>
+        </p:style>
+        <p:txBody>
+          <a:bodyPr rtlCol="0" anchor="ctr"/>
+          <a:lstStyle/>
+          <a:p>
+            <a:pPr algn="ctr"/>
+          </a:p>
+        </p:txBody>
+      </p:sp>
+      <p:sp>
+        <p:nvSpPr>
+          <p:cNvPr id="9" name="TextBox 8"/>
+          <p:cNvSpPr txBox="1"/>
+          <p:nvPr/>
+        </p:nvSpPr>
+        <p:spPr>
+          <a:xfrm>
+            <a:off x="3416655" y="1783080"/>
+            <a:ext cx="3913632" cy="457200"/>
+          </a:xfrm>
+          <a:prstGeom prst="rect">
+            <a:avLst/>
+          </a:prstGeom>
+          <a:noFill/>
+        </p:spPr>
+        <p:txBody>
+          <a:bodyPr wrap="square" anchor="ctr">
+            <a:spAutoFit/>
+          </a:bodyPr>
+          <a:lstStyle/>
+          <a:p>
+            <a:pPr algn="ctr"/>
+            <a:r>
+              <a:rPr sz="1400" b="1" i="0">
+                <a:solidFill>
+                  <a:srgbClr val="FFFFFF"/>
+                </a:solidFill>
+                <a:latin typeface="Calibri"/>
+              </a:rPr>
+              <a:t>What it shares with SERUM</a:t>
+            </a:r>
+          </a:p>
+        </p:txBody>
+      </p:sp>
+      <p:sp>
+        <p:nvSpPr>
+          <p:cNvPr id="10" name="Rectangle 9"/>
+          <p:cNvSpPr/>
+          <p:nvPr/>
+        </p:nvSpPr>
+        <p:spPr>
+          <a:xfrm>
+            <a:off x="7421727" y="1783080"/>
+            <a:ext cx="4114800" cy="457200"/>
+          </a:xfrm>
+          <a:prstGeom prst="rect">
+            <a:avLst/>
+          </a:prstGeom>
+          <a:solidFill>
+            <a:srgbClr val="1F355E"/>
+          </a:solidFill>
+          <a:ln w="12700">
+            <a:solidFill>
+              <a:srgbClr val="D9E0E8"/>
+            </a:solidFill>
+          </a:ln>
+          <a:effectLst/>
+        </p:spPr>
+        <p:style>
+          <a:lnRef idx="1">
+            <a:schemeClr val="accent1"/>
+          </a:lnRef>
+          <a:fillRef idx="3">
+            <a:schemeClr val="accent1"/>
+          </a:fillRef>
+          <a:effectRef idx="2">
+            <a:schemeClr val="accent1"/>
+          </a:effectRef>
+          <a:fontRef idx="minor">
+            <a:schemeClr val="lt1"/>
+          </a:fontRef>
+        </p:style>
+        <p:txBody>
+          <a:bodyPr rtlCol="0" anchor="ctr"/>
+          <a:lstStyle/>
+          <a:p>
+            <a:pPr algn="ctr"/>
+          </a:p>
+        </p:txBody>
+      </p:sp>
+      <p:sp>
+        <p:nvSpPr>
+          <p:cNvPr id="11" name="TextBox 10"/>
+          <p:cNvSpPr txBox="1"/>
+          <p:nvPr/>
+        </p:nvSpPr>
+        <p:spPr>
+          <a:xfrm>
+            <a:off x="7531455" y="1783080"/>
+            <a:ext cx="3913632" cy="457200"/>
+          </a:xfrm>
+          <a:prstGeom prst="rect">
+            <a:avLst/>
+          </a:prstGeom>
+          <a:noFill/>
+        </p:spPr>
+        <p:txBody>
+          <a:bodyPr wrap="square" anchor="ctr">
+            <a:spAutoFit/>
+          </a:bodyPr>
+          <a:lstStyle/>
+          <a:p>
+            <a:pPr algn="ctr"/>
+            <a:r>
+              <a:rPr sz="1400" b="1" i="0">
+                <a:solidFill>
+                  <a:srgbClr val="FFFFFF"/>
+                </a:solidFill>
+                <a:latin typeface="Calibri"/>
+              </a:rPr>
+              <a:t>The gap SERUM fills</a:t>
+            </a:r>
+          </a:p>
+        </p:txBody>
+      </p:sp>
+      <p:sp>
+        <p:nvSpPr>
+          <p:cNvPr id="12" name="Rectangle 11"/>
+          <p:cNvSpPr/>
+          <p:nvPr/>
+        </p:nvSpPr>
+        <p:spPr>
+          <a:xfrm>
+            <a:off x="655167" y="2240280"/>
+            <a:ext cx="2651760" cy="457200"/>
+          </a:xfrm>
+          <a:prstGeom prst="rect">
+            <a:avLst/>
+          </a:prstGeom>
+          <a:solidFill>
+            <a:srgbClr val="F3F6FA"/>
+          </a:solidFill>
+          <a:ln w="12700">
+            <a:solidFill>
+              <a:srgbClr val="D9E0E8"/>
+            </a:solidFill>
+          </a:ln>
+          <a:effectLst/>
+        </p:spPr>
+        <p:style>
+          <a:lnRef idx="1">
+            <a:schemeClr val="accent1"/>
+          </a:lnRef>
+          <a:fillRef idx="3">
+            <a:schemeClr val="accent1"/>
+          </a:fillRef>
+          <a:effectRef idx="2">
+            <a:schemeClr val="accent1"/>
+          </a:effectRef>
+          <a:fontRef idx="minor">
+            <a:schemeClr val="lt1"/>
+          </a:fontRef>
+        </p:style>
+        <p:txBody>
+          <a:bodyPr rtlCol="0" anchor="ctr"/>
+          <a:lstStyle/>
+          <a:p>
+            <a:pPr algn="ctr"/>
+          </a:p>
+        </p:txBody>
+      </p:sp>
+      <p:sp>
+        <p:nvSpPr>
+          <p:cNvPr id="13" name="TextBox 12"/>
+          <p:cNvSpPr txBox="1"/>
+          <p:nvPr/>
+        </p:nvSpPr>
+        <p:spPr>
+          <a:xfrm>
+            <a:off x="764895" y="2240280"/>
+            <a:ext cx="2450591" cy="457200"/>
+          </a:xfrm>
+          <a:prstGeom prst="rect">
+            <a:avLst/>
+          </a:prstGeom>
+          <a:noFill/>
+        </p:spPr>
+        <p:txBody>
+          <a:bodyPr wrap="square" anchor="ctr">
+            <a:spAutoFit/>
+          </a:bodyPr>
+          <a:lstStyle/>
+          <a:p>
+            <a:pPr algn="l"/>
+            <a:r>
+              <a:rPr sz="1400" b="0" i="0">
+                <a:solidFill>
+                  <a:srgbClr val="252B33"/>
+                </a:solidFill>
+                <a:latin typeface="Calibri"/>
+              </a:rPr>
+              <a:t>CyGym (2025)</a:t>
+            </a:r>
+          </a:p>
+        </p:txBody>
+      </p:sp>
+      <p:sp>
+        <p:nvSpPr>
+          <p:cNvPr id="14" name="Rectangle 13"/>
+          <p:cNvSpPr/>
+          <p:nvPr/>
+        </p:nvSpPr>
+        <p:spPr>
+          <a:xfrm>
+            <a:off x="3306927" y="2240280"/>
+            <a:ext cx="4114800" cy="457200"/>
+          </a:xfrm>
+          <a:prstGeom prst="rect">
+            <a:avLst/>
+          </a:prstGeom>
+          <a:solidFill>
+            <a:srgbClr val="F3F6FA"/>
+          </a:solidFill>
+          <a:ln w="12700">
+            <a:solidFill>
+              <a:srgbClr val="D9E0E8"/>
+            </a:solidFill>
+          </a:ln>
+          <a:effectLst/>
+        </p:spPr>
+        <p:style>
+          <a:lnRef idx="1">
+            <a:schemeClr val="accent1"/>
+          </a:lnRef>
+          <a:fillRef idx="3">
+            <a:schemeClr val="accent1"/>
+          </a:fillRef>
+          <a:effectRef idx="2">
+            <a:schemeClr val="accent1"/>
+          </a:effectRef>
+          <a:fontRef idx="minor">
+            <a:schemeClr val="lt1"/>
+          </a:fontRef>
+        </p:style>
+        <p:txBody>
+          <a:bodyPr rtlCol="0" anchor="ctr"/>
+          <a:lstStyle/>
+          <a:p>
+            <a:pPr algn="ctr"/>
+          </a:p>
+        </p:txBody>
+      </p:sp>
+      <p:sp>
+        <p:nvSpPr>
+          <p:cNvPr id="15" name="TextBox 14"/>
+          <p:cNvSpPr txBox="1"/>
+          <p:nvPr/>
+        </p:nvSpPr>
+        <p:spPr>
+          <a:xfrm>
+            <a:off x="3416655" y="2240280"/>
+            <a:ext cx="3913632" cy="457200"/>
+          </a:xfrm>
+          <a:prstGeom prst="rect">
+            <a:avLst/>
+          </a:prstGeom>
+          <a:noFill/>
+        </p:spPr>
+        <p:txBody>
+          <a:bodyPr wrap="square" anchor="ctr">
+            <a:spAutoFit/>
+          </a:bodyPr>
+          <a:lstStyle/>
+          <a:p>
+            <a:pPr algn="ctr"/>
+            <a:r>
+              <a:rPr sz="1400" b="0" i="0">
+                <a:solidFill>
+                  <a:srgbClr val="252B33"/>
+                </a:solidFill>
+                <a:latin typeface="Calibri"/>
+              </a:rPr>
+              <a:t>vuln-gated spread + a cost model</a:t>
+            </a:r>
+          </a:p>
+        </p:txBody>
+      </p:sp>
+      <p:sp>
+        <p:nvSpPr>
+          <p:cNvPr id="16" name="Rectangle 15"/>
+          <p:cNvSpPr/>
+          <p:nvPr/>
+        </p:nvSpPr>
+        <p:spPr>
+          <a:xfrm>
+            <a:off x="7421727" y="2240280"/>
+            <a:ext cx="4114800" cy="457200"/>
+          </a:xfrm>
+          <a:prstGeom prst="rect">
+            <a:avLst/>
+          </a:prstGeom>
+          <a:solidFill>
+            <a:srgbClr val="F3F6FA"/>
+          </a:solidFill>
+          <a:ln w="12700">
+            <a:solidFill>
+              <a:srgbClr val="D9E0E8"/>
+            </a:solidFill>
+          </a:ln>
+          <a:effectLst/>
+        </p:spPr>
+        <p:style>
+          <a:lnRef idx="1">
+            <a:schemeClr val="accent1"/>
+          </a:lnRef>
+          <a:fillRef idx="3">
+            <a:schemeClr val="accent1"/>
+          </a:fillRef>
+          <a:effectRef idx="2">
+            <a:schemeClr val="accent1"/>
+          </a:effectRef>
+          <a:fontRef idx="minor">
+            <a:schemeClr val="lt1"/>
+          </a:fontRef>
+        </p:style>
+        <p:txBody>
+          <a:bodyPr rtlCol="0" anchor="ctr"/>
+          <a:lstStyle/>
+          <a:p>
+            <a:pPr algn="ctr"/>
+          </a:p>
+        </p:txBody>
+      </p:sp>
+      <p:sp>
+        <p:nvSpPr>
+          <p:cNvPr id="17" name="TextBox 16"/>
+          <p:cNvSpPr txBox="1"/>
+          <p:nvPr/>
+        </p:nvSpPr>
+        <p:spPr>
+          <a:xfrm>
+            <a:off x="7531455" y="2240280"/>
+            <a:ext cx="3913632" cy="457200"/>
+          </a:xfrm>
+          <a:prstGeom prst="rect">
+            <a:avLst/>
+          </a:prstGeom>
+          <a:noFill/>
+        </p:spPr>
+        <p:txBody>
+          <a:bodyPr wrap="square" anchor="ctr">
+            <a:spAutoFit/>
+          </a:bodyPr>
+          <a:lstStyle/>
+          <a:p>
+            <a:pPr algn="ctr"/>
+            <a:r>
+              <a:rPr sz="1400" b="0" i="0">
+                <a:solidFill>
+                  <a:srgbClr val="252B33"/>
+                </a:solidFill>
+                <a:latin typeface="Calibri"/>
+              </a:rPr>
+              <a:t>STATIC zero-day prior; no online belief update</a:t>
+            </a:r>
+          </a:p>
+        </p:txBody>
+      </p:sp>
+      <p:sp>
+        <p:nvSpPr>
+          <p:cNvPr id="18" name="Rectangle 17"/>
+          <p:cNvSpPr/>
+          <p:nvPr/>
+        </p:nvSpPr>
+        <p:spPr>
+          <a:xfrm>
+            <a:off x="655167" y="2697480"/>
+            <a:ext cx="2651760" cy="457200"/>
+          </a:xfrm>
+          <a:prstGeom prst="rect">
+            <a:avLst/>
+          </a:prstGeom>
+          <a:solidFill>
+            <a:srgbClr val="FFFFFF"/>
+          </a:solidFill>
+          <a:ln w="12700">
+            <a:solidFill>
+              <a:srgbClr val="D9E0E8"/>
+            </a:solidFill>
+          </a:ln>
+          <a:effectLst/>
+        </p:spPr>
+        <p:style>
+          <a:lnRef idx="1">
+            <a:schemeClr val="accent1"/>
+          </a:lnRef>
+          <a:fillRef idx="3">
+            <a:schemeClr val="accent1"/>
+          </a:fillRef>
+          <a:effectRef idx="2">
+            <a:schemeClr val="accent1"/>
+          </a:effectRef>
+          <a:fontRef idx="minor">
+            <a:schemeClr val="lt1"/>
+          </a:fontRef>
+        </p:style>
+        <p:txBody>
+          <a:bodyPr rtlCol="0" anchor="ctr"/>
+          <a:lstStyle/>
+          <a:p>
+            <a:pPr algn="ctr"/>
+          </a:p>
+        </p:txBody>
+      </p:sp>
+      <p:sp>
+        <p:nvSpPr>
+          <p:cNvPr id="19" name="TextBox 18"/>
+          <p:cNvSpPr txBox="1"/>
+          <p:nvPr/>
+        </p:nvSpPr>
+        <p:spPr>
+          <a:xfrm>
+            <a:off x="764895" y="2697480"/>
+            <a:ext cx="2450591" cy="457200"/>
+          </a:xfrm>
+          <a:prstGeom prst="rect">
+            <a:avLst/>
+          </a:prstGeom>
+          <a:noFill/>
+        </p:spPr>
+        <p:txBody>
+          <a:bodyPr wrap="square" anchor="ctr">
+            <a:spAutoFit/>
+          </a:bodyPr>
+          <a:lstStyle/>
+          <a:p>
+            <a:pPr algn="l"/>
+            <a:r>
+              <a:rPr sz="1400" b="0" i="0">
+                <a:solidFill>
+                  <a:srgbClr val="252B33"/>
+                </a:solidFill>
+                <a:latin typeface="Calibri"/>
+              </a:rPr>
+              <a:t>SCENARIOID (KDD 2023)</a:t>
+            </a:r>
+          </a:p>
+        </p:txBody>
+      </p:sp>
+      <p:sp>
+        <p:nvSpPr>
+          <p:cNvPr id="20" name="Rectangle 19"/>
+          <p:cNvSpPr/>
+          <p:nvPr/>
+        </p:nvSpPr>
+        <p:spPr>
+          <a:xfrm>
+            <a:off x="3306927" y="2697480"/>
+            <a:ext cx="4114800" cy="457200"/>
+          </a:xfrm>
+          <a:prstGeom prst="rect">
+            <a:avLst/>
+          </a:prstGeom>
+          <a:solidFill>
+            <a:srgbClr val="FFFFFF"/>
+          </a:solidFill>
+          <a:ln w="12700">
+            <a:solidFill>
+              <a:srgbClr val="D9E0E8"/>
+            </a:solidFill>
+          </a:ln>
+          <a:effectLst/>
+        </p:spPr>
+        <p:style>
+          <a:lnRef idx="1">
+            <a:schemeClr val="accent1"/>
+          </a:lnRef>
+          <a:fillRef idx="3">
+            <a:schemeClr val="accent1"/>
+          </a:fillRef>
+          <a:effectRef idx="2">
+            <a:schemeClr val="accent1"/>
+          </a:effectRef>
+          <a:fontRef idx="minor">
+            <a:schemeClr val="lt1"/>
+          </a:fontRef>
+        </p:style>
+        <p:txBody>
+          <a:bodyPr rtlCol="0" anchor="ctr"/>
+          <a:lstStyle/>
+          <a:p>
+            <a:pPr algn="ctr"/>
+          </a:p>
+        </p:txBody>
+      </p:sp>
+      <p:sp>
+        <p:nvSpPr>
+          <p:cNvPr id="21" name="TextBox 20"/>
+          <p:cNvSpPr txBox="1"/>
+          <p:nvPr/>
+        </p:nvSpPr>
+        <p:spPr>
+          <a:xfrm>
+            <a:off x="3416655" y="2697480"/>
+            <a:ext cx="3913632" cy="457200"/>
+          </a:xfrm>
+          <a:prstGeom prst="rect">
+            <a:avLst/>
+          </a:prstGeom>
+          <a:noFill/>
+        </p:spPr>
+        <p:txBody>
+          <a:bodyPr wrap="square" anchor="ctr">
+            <a:spAutoFit/>
+          </a:bodyPr>
+          <a:lstStyle/>
+          <a:p>
+            <a:pPr algn="ctr"/>
+            <a:r>
+              <a:rPr sz="1400" b="0" i="0">
+                <a:solidFill>
+                  <a:srgbClr val="252B33"/>
+                </a:solidFill>
+                <a:latin typeface="Calibri"/>
+              </a:rPr>
+              <a:t>infer which mechanism produced a cascade</a:t>
+            </a:r>
+          </a:p>
+        </p:txBody>
+      </p:sp>
+      <p:sp>
+        <p:nvSpPr>
+          <p:cNvPr id="22" name="Rectangle 21"/>
+          <p:cNvSpPr/>
+          <p:nvPr/>
+        </p:nvSpPr>
+        <p:spPr>
+          <a:xfrm>
+            <a:off x="7421727" y="2697480"/>
+            <a:ext cx="4114800" cy="457200"/>
+          </a:xfrm>
+          <a:prstGeom prst="rect">
+            <a:avLst/>
+          </a:prstGeom>
+          <a:solidFill>
+            <a:srgbClr val="FFFFFF"/>
+          </a:solidFill>
+          <a:ln w="12700">
+            <a:solidFill>
+              <a:srgbClr val="D9E0E8"/>
+            </a:solidFill>
+          </a:ln>
+          <a:effectLst/>
+        </p:spPr>
+        <p:style>
+          <a:lnRef idx="1">
+            <a:schemeClr val="accent1"/>
+          </a:lnRef>
+          <a:fillRef idx="3">
+            <a:schemeClr val="accent1"/>
+          </a:fillRef>
+          <a:effectRef idx="2">
+            <a:schemeClr val="accent1"/>
+          </a:effectRef>
+          <a:fontRef idx="minor">
+            <a:schemeClr val="lt1"/>
+          </a:fontRef>
+        </p:style>
+        <p:txBody>
+          <a:bodyPr rtlCol="0" anchor="ctr"/>
+          <a:lstStyle/>
+          <a:p>
+            <a:pPr algn="ctr"/>
+          </a:p>
+        </p:txBody>
+      </p:sp>
+      <p:sp>
+        <p:nvSpPr>
+          <p:cNvPr id="23" name="TextBox 22"/>
+          <p:cNvSpPr txBox="1"/>
+          <p:nvPr/>
+        </p:nvSpPr>
+        <p:spPr>
+          <a:xfrm>
+            <a:off x="7531455" y="2697480"/>
+            <a:ext cx="3913632" cy="457200"/>
+          </a:xfrm>
+          <a:prstGeom prst="rect">
+            <a:avLst/>
+          </a:prstGeom>
+          <a:noFill/>
+        </p:spPr>
+        <p:txBody>
+          <a:bodyPr wrap="square" anchor="ctr">
+            <a:spAutoFit/>
+          </a:bodyPr>
+          <a:lstStyle/>
+          <a:p>
+            <a:pPr algn="ctr"/>
+            <a:r>
+              <a:rPr sz="1400" b="0" i="0">
+                <a:solidFill>
+                  <a:srgbClr val="252B33"/>
+                </a:solidFill>
+                <a:latin typeface="Calibri"/>
+              </a:rPr>
+              <a:t>OFFLINE, feature-engineered; no identifiability guarantee</a:t>
+            </a:r>
+          </a:p>
+        </p:txBody>
+      </p:sp>
+      <p:sp>
+        <p:nvSpPr>
+          <p:cNvPr id="24" name="Rectangle 23"/>
+          <p:cNvSpPr/>
+          <p:nvPr/>
+        </p:nvSpPr>
+        <p:spPr>
+          <a:xfrm>
+            <a:off x="655167" y="3154680"/>
+            <a:ext cx="2651760" cy="457200"/>
+          </a:xfrm>
+          <a:prstGeom prst="rect">
+            <a:avLst/>
+          </a:prstGeom>
+          <a:solidFill>
+            <a:srgbClr val="F3F6FA"/>
+          </a:solidFill>
+          <a:ln w="12700">
+            <a:solidFill>
+              <a:srgbClr val="D9E0E8"/>
+            </a:solidFill>
+          </a:ln>
+          <a:effectLst/>
+        </p:spPr>
+        <p:style>
+          <a:lnRef idx="1">
+            <a:schemeClr val="accent1"/>
+          </a:lnRef>
+          <a:fillRef idx="3">
+            <a:schemeClr val="accent1"/>
+          </a:fillRef>
+          <a:effectRef idx="2">
+            <a:schemeClr val="accent1"/>
+          </a:effectRef>
+          <a:fontRef idx="minor">
+            <a:schemeClr val="lt1"/>
+          </a:fontRef>
+        </p:style>
+        <p:txBody>
+          <a:bodyPr rtlCol="0" anchor="ctr"/>
+          <a:lstStyle/>
+          <a:p>
+            <a:pPr algn="ctr"/>
+          </a:p>
+        </p:txBody>
+      </p:sp>
+      <p:sp>
+        <p:nvSpPr>
+          <p:cNvPr id="25" name="TextBox 24"/>
+          <p:cNvSpPr txBox="1"/>
+          <p:nvPr/>
+        </p:nvSpPr>
+        <p:spPr>
+          <a:xfrm>
+            <a:off x="764895" y="3154680"/>
+            <a:ext cx="2450591" cy="457200"/>
+          </a:xfrm>
+          <a:prstGeom prst="rect">
+            <a:avLst/>
+          </a:prstGeom>
+          <a:noFill/>
+        </p:spPr>
+        <p:txBody>
+          <a:bodyPr wrap="square" anchor="ctr">
+            <a:spAutoFit/>
+          </a:bodyPr>
+          <a:lstStyle/>
+          <a:p>
+            <a:pPr algn="l"/>
+            <a:r>
+              <a:rPr sz="1400" b="0" i="0">
+                <a:solidFill>
+                  <a:srgbClr val="252B33"/>
+                </a:solidFill>
+                <a:latin typeface="Calibri"/>
+              </a:rPr>
+              <a:t>Hoffmann et al. (ICML 2020)</a:t>
+            </a:r>
+          </a:p>
+        </p:txBody>
+      </p:sp>
+      <p:sp>
+        <p:nvSpPr>
+          <p:cNvPr id="26" name="Rectangle 25"/>
+          <p:cNvSpPr/>
+          <p:nvPr/>
+        </p:nvSpPr>
+        <p:spPr>
+          <a:xfrm>
+            <a:off x="3306927" y="3154680"/>
+            <a:ext cx="4114800" cy="457200"/>
+          </a:xfrm>
+          <a:prstGeom prst="rect">
+            <a:avLst/>
+          </a:prstGeom>
+          <a:solidFill>
+            <a:srgbClr val="F3F6FA"/>
+          </a:solidFill>
+          <a:ln w="12700">
+            <a:solidFill>
+              <a:srgbClr val="D9E0E8"/>
+            </a:solidFill>
+          </a:ln>
+          <a:effectLst/>
+        </p:spPr>
+        <p:style>
+          <a:lnRef idx="1">
+            <a:schemeClr val="accent1"/>
+          </a:lnRef>
+          <a:fillRef idx="3">
+            <a:schemeClr val="accent1"/>
+          </a:fillRef>
+          <a:effectRef idx="2">
+            <a:schemeClr val="accent1"/>
+          </a:effectRef>
+          <a:fontRef idx="minor">
+            <a:schemeClr val="lt1"/>
+          </a:fontRef>
+        </p:style>
+        <p:txBody>
+          <a:bodyPr rtlCol="0" anchor="ctr"/>
+          <a:lstStyle/>
+          <a:p>
+            <a:pPr algn="ctr"/>
+          </a:p>
+        </p:txBody>
+      </p:sp>
+      <p:sp>
+        <p:nvSpPr>
+          <p:cNvPr id="27" name="TextBox 26"/>
+          <p:cNvSpPr txBox="1"/>
+          <p:nvPr/>
+        </p:nvSpPr>
+        <p:spPr>
+          <a:xfrm>
+            <a:off x="3416655" y="3154680"/>
+            <a:ext cx="3913632" cy="457200"/>
+          </a:xfrm>
+          <a:prstGeom prst="rect">
+            <a:avLst/>
+          </a:prstGeom>
+          <a:noFill/>
+        </p:spPr>
+        <p:txBody>
+          <a:bodyPr wrap="square" anchor="ctr">
+            <a:spAutoFit/>
+          </a:bodyPr>
+          <a:lstStyle/>
+          <a:p>
+            <a:pPr algn="ctr"/>
+            <a:r>
+              <a:rPr sz="1400" b="0" i="0">
+                <a:solidFill>
+                  <a:srgbClr val="252B33"/>
+                </a:solidFill>
+                <a:latin typeface="Calibri"/>
+              </a:rPr>
+              <a:t>identifiability from cascades</a:t>
+            </a:r>
+          </a:p>
+        </p:txBody>
+      </p:sp>
+      <p:sp>
+        <p:nvSpPr>
+          <p:cNvPr id="28" name="Rectangle 27"/>
+          <p:cNvSpPr/>
+          <p:nvPr/>
+        </p:nvSpPr>
+        <p:spPr>
+          <a:xfrm>
+            <a:off x="7421727" y="3154680"/>
+            <a:ext cx="4114800" cy="457200"/>
+          </a:xfrm>
+          <a:prstGeom prst="rect">
+            <a:avLst/>
+          </a:prstGeom>
+          <a:solidFill>
+            <a:srgbClr val="F3F6FA"/>
+          </a:solidFill>
+          <a:ln w="12700">
+            <a:solidFill>
+              <a:srgbClr val="D9E0E8"/>
+            </a:solidFill>
+          </a:ln>
+          <a:effectLst/>
+        </p:spPr>
+        <p:style>
+          <a:lnRef idx="1">
+            <a:schemeClr val="accent1"/>
+          </a:lnRef>
+          <a:fillRef idx="3">
+            <a:schemeClr val="accent1"/>
+          </a:fillRef>
+          <a:effectRef idx="2">
+            <a:schemeClr val="accent1"/>
+          </a:effectRef>
+          <a:fontRef idx="minor">
+            <a:schemeClr val="lt1"/>
+          </a:fontRef>
+        </p:style>
+        <p:txBody>
+          <a:bodyPr rtlCol="0" anchor="ctr"/>
+          <a:lstStyle/>
+          <a:p>
+            <a:pPr algn="ctr"/>
+          </a:p>
+        </p:txBody>
+      </p:sp>
+      <p:sp>
+        <p:nvSpPr>
+          <p:cNvPr id="29" name="TextBox 28"/>
+          <p:cNvSpPr txBox="1"/>
+          <p:nvPr/>
+        </p:nvSpPr>
+        <p:spPr>
+          <a:xfrm>
+            <a:off x="7531455" y="3154680"/>
+            <a:ext cx="3913632" cy="457200"/>
+          </a:xfrm>
+          <a:prstGeom prst="rect">
+            <a:avLst/>
+          </a:prstGeom>
+          <a:noFill/>
+        </p:spPr>
+        <p:txBody>
+          <a:bodyPr wrap="square" anchor="ctr">
+            <a:spAutoFit/>
+          </a:bodyPr>
+          <a:lstStyle/>
+          <a:p>
+            <a:pPr algn="ctr"/>
+            <a:r>
+              <a:rPr sz="1400" b="0" i="0">
+                <a:solidFill>
+                  <a:srgbClr val="252B33"/>
+                </a:solidFill>
+                <a:latin typeface="Calibri"/>
+              </a:rPr>
+              <a:t>condition on LATENT edges; batch (an arguably harder setting)</a:t>
+            </a:r>
+          </a:p>
+        </p:txBody>
+      </p:sp>
+      <p:sp>
+        <p:nvSpPr>
+          <p:cNvPr id="30" name="Rectangle 29"/>
+          <p:cNvSpPr/>
+          <p:nvPr/>
+        </p:nvSpPr>
+        <p:spPr>
+          <a:xfrm>
+            <a:off x="640080" y="3813048"/>
+            <a:ext cx="10881360" cy="1097280"/>
           </a:xfrm>
           <a:prstGeom prst="rect">
             <a:avLst/>
@@ -21626,14 +25137,14 @@
       </p:sp>
       <p:sp>
         <p:nvSpPr>
-          <p:cNvPr id="8" name="TextBox 7"/>
+          <p:cNvPr id="31" name="TextBox 30"/>
           <p:cNvSpPr txBox="1"/>
           <p:nvPr/>
         </p:nvSpPr>
         <p:spPr>
           <a:xfrm>
             <a:off x="868680" y="3886200"/>
-            <a:ext cx="10424160" cy="1005840"/>
+            <a:ext cx="10424160" cy="932688"/>
           </a:xfrm>
           <a:prstGeom prst="rect">
             <a:avLst/>
